--- a/cursuri/02-explorare-vizualizare/curs-02-analiza-exploratorie.pptx
+++ b/cursuri/02-explorare-vizualizare/curs-02-analiza-exploratorie.pptx
@@ -5,7 +5,7 @@
     <p:sldMasterId id="2147483660" r:id="rId1"/>
   </p:sldMasterIdLst>
   <p:notesMasterIdLst>
-    <p:notesMasterId r:id="rId31"/>
+    <p:notesMasterId r:id="rId18"/>
   </p:notesMasterIdLst>
   <p:sldIdLst>
     <p:sldId id="256" r:id="rId2"/>
@@ -21,25 +21,21 @@
     <p:sldId id="293" r:id="rId12"/>
     <p:sldId id="295" r:id="rId13"/>
     <p:sldId id="297" r:id="rId14"/>
-    <p:sldId id="302" r:id="rId15"/>
-    <p:sldId id="304" r:id="rId16"/>
-    <p:sldId id="308" r:id="rId17"/>
-    <p:sldId id="303" r:id="rId18"/>
-    <p:sldId id="314" r:id="rId19"/>
-    <p:sldId id="312" r:id="rId20"/>
-    <p:sldId id="310" r:id="rId21"/>
-    <p:sldId id="311" r:id="rId22"/>
-    <p:sldId id="317" r:id="rId23"/>
-    <p:sldId id="316" r:id="rId24"/>
-    <p:sldId id="319" r:id="rId25"/>
-    <p:sldId id="318" r:id="rId26"/>
-    <p:sldId id="321" r:id="rId27"/>
-    <p:sldId id="307" r:id="rId28"/>
-    <p:sldId id="305" r:id="rId29"/>
-    <p:sldId id="306" r:id="rId30"/>
+    <p:sldId id="323" r:id="rId15"/>
+    <p:sldId id="307" r:id="rId16"/>
+    <p:sldId id="302" r:id="rId17"/>
   </p:sldIdLst>
   <p:sldSz cx="9144000" cy="5143500" type="screen16x9"/>
   <p:notesSz cx="6858000" cy="9144000"/>
+  <p:embeddedFontLst>
+    <p:embeddedFont>
+      <p:font typeface="Consolas" panose="020B0609020204030204" pitchFamily="49" charset="0"/>
+      <p:regular r:id="rId19"/>
+      <p:bold r:id="rId20"/>
+      <p:italic r:id="rId21"/>
+      <p:boldItalic r:id="rId22"/>
+    </p:embeddedFont>
+  </p:embeddedFontLst>
   <p:defaultTextStyle>
     <a:defPPr marR="0" lvl="0" algn="l" rtl="0">
       <a:lnSpc>
@@ -2479,7 +2475,7 @@
           <a:p>
             <a:fld id="{846CE7D5-CF57-46EF-B807-FDD0502418D4}" type="datetimeFigureOut">
               <a:rPr lang="en-US" smtClean="0"/>
-              <a:t>10/14/2025</a:t>
+              <a:t>10/24/2026</a:t>
             </a:fld>
             <a:endParaRPr lang="en-US"/>
           </a:p>
@@ -2677,7 +2673,7 @@
           <a:p>
             <a:fld id="{846CE7D5-CF57-46EF-B807-FDD0502418D4}" type="datetimeFigureOut">
               <a:rPr lang="en-US" smtClean="0"/>
-              <a:t>10/14/2025</a:t>
+              <a:t>10/24/2026</a:t>
             </a:fld>
             <a:endParaRPr lang="en-US"/>
           </a:p>
@@ -2885,7 +2881,7 @@
           <a:p>
             <a:fld id="{846CE7D5-CF57-46EF-B807-FDD0502418D4}" type="datetimeFigureOut">
               <a:rPr lang="en-US" smtClean="0"/>
-              <a:t>10/14/2025</a:t>
+              <a:t>10/24/2026</a:t>
             </a:fld>
             <a:endParaRPr lang="en-US"/>
           </a:p>
@@ -3083,7 +3079,7 @@
           <a:p>
             <a:fld id="{846CE7D5-CF57-46EF-B807-FDD0502418D4}" type="datetimeFigureOut">
               <a:rPr lang="en-US" smtClean="0"/>
-              <a:t>10/14/2025</a:t>
+              <a:t>10/24/2026</a:t>
             </a:fld>
             <a:endParaRPr lang="en-US"/>
           </a:p>
@@ -3358,7 +3354,7 @@
           <a:p>
             <a:fld id="{846CE7D5-CF57-46EF-B807-FDD0502418D4}" type="datetimeFigureOut">
               <a:rPr lang="en-US" smtClean="0"/>
-              <a:t>10/14/2025</a:t>
+              <a:t>10/24/2026</a:t>
             </a:fld>
             <a:endParaRPr lang="en-US"/>
           </a:p>
@@ -3617,7 +3613,7 @@
           <a:p>
             <a:fld id="{846CE7D5-CF57-46EF-B807-FDD0502418D4}" type="datetimeFigureOut">
               <a:rPr lang="en-US" smtClean="0"/>
-              <a:t>10/14/2025</a:t>
+              <a:t>10/24/2026</a:t>
             </a:fld>
             <a:endParaRPr lang="en-US"/>
           </a:p>
@@ -4011,7 +4007,7 @@
           <a:p>
             <a:fld id="{846CE7D5-CF57-46EF-B807-FDD0502418D4}" type="datetimeFigureOut">
               <a:rPr lang="en-US" smtClean="0"/>
-              <a:t>10/14/2025</a:t>
+              <a:t>10/24/2026</a:t>
             </a:fld>
             <a:endParaRPr lang="en-US"/>
           </a:p>
@@ -4158,7 +4154,7 @@
           <a:p>
             <a:fld id="{846CE7D5-CF57-46EF-B807-FDD0502418D4}" type="datetimeFigureOut">
               <a:rPr lang="en-US" smtClean="0"/>
-              <a:t>10/14/2025</a:t>
+              <a:t>10/24/2026</a:t>
             </a:fld>
             <a:endParaRPr lang="en-US"/>
           </a:p>
@@ -4283,7 +4279,7 @@
           <a:p>
             <a:fld id="{846CE7D5-CF57-46EF-B807-FDD0502418D4}" type="datetimeFigureOut">
               <a:rPr lang="en-US" smtClean="0"/>
-              <a:t>10/14/2025</a:t>
+              <a:t>10/24/2026</a:t>
             </a:fld>
             <a:endParaRPr lang="en-US"/>
           </a:p>
@@ -4588,7 +4584,7 @@
           <a:p>
             <a:fld id="{846CE7D5-CF57-46EF-B807-FDD0502418D4}" type="datetimeFigureOut">
               <a:rPr lang="en-US" smtClean="0"/>
-              <a:t>10/14/2025</a:t>
+              <a:t>10/24/2026</a:t>
             </a:fld>
             <a:endParaRPr lang="en-US"/>
           </a:p>
@@ -4873,7 +4869,7 @@
           <a:p>
             <a:fld id="{846CE7D5-CF57-46EF-B807-FDD0502418D4}" type="datetimeFigureOut">
               <a:rPr lang="en-US" smtClean="0"/>
-              <a:t>10/14/2025</a:t>
+              <a:t>10/24/2026</a:t>
             </a:fld>
             <a:endParaRPr lang="en-US"/>
           </a:p>
@@ -5114,7 +5110,7 @@
           <a:p>
             <a:fld id="{846CE7D5-CF57-46EF-B807-FDD0502418D4}" type="datetimeFigureOut">
               <a:rPr lang="en-US" smtClean="0"/>
-              <a:t>10/14/2025</a:t>
+              <a:t>10/24/2026</a:t>
             </a:fld>
             <a:endParaRPr lang="en-US"/>
           </a:p>
@@ -5585,7 +5581,7 @@
             </a:pPr>
             <a:r>
               <a:rPr lang="en" dirty="0"/>
-              <a:t>ADS1 - Curs </a:t>
+              <a:t>SEED1 - Curs </a:t>
             </a:r>
             <a:r>
               <a:rPr lang="ro-RO" dirty="0"/>
@@ -6809,6 +6805,456 @@
       </p:grpSpPr>
       <p:sp>
         <p:nvSpPr>
+          <p:cNvPr id="2" name="Title 1"/>
+          <p:cNvSpPr>
+            <a:spLocks noGrp="1"/>
+          </p:cNvSpPr>
+          <p:nvPr>
+            <p:ph type="title"/>
+          </p:nvPr>
+        </p:nvSpPr>
+        <p:spPr/>
+        <p:txBody>
+          <a:bodyPr/>
+          <a:lstStyle/>
+          <a:p>
+            <a:r>
+              <a:t>Discretizare cu coloană de referință în Python</a:t>
+            </a:r>
+          </a:p>
+        </p:txBody>
+      </p:sp>
+      <p:sp>
+        <p:nvSpPr>
+          <p:cNvPr id="3" name="Content Placeholder 2"/>
+          <p:cNvSpPr>
+            <a:spLocks noGrp="1"/>
+          </p:cNvSpPr>
+          <p:nvPr>
+            <p:ph idx="1"/>
+          </p:nvPr>
+        </p:nvSpPr>
+        <p:spPr>
+          <a:xfrm>
+            <a:off x="628650" y="1369219"/>
+            <a:ext cx="7886700" cy="500000"/>
+          </a:xfrm>
+        </p:spPr>
+        <p:txBody>
+          <a:bodyPr/>
+          <a:lstStyle/>
+          <a:p>
+            <a:r>
+              <a:rPr sz="1800"/>
+              <a:t>Sumă cumulată pe valori distincte, apoi tăiere în 3 părți egale cu pd.cut</a:t>
+            </a:r>
+          </a:p>
+        </p:txBody>
+      </p:sp>
+      <p:sp>
+        <p:nvSpPr>
+          <p:cNvPr id="4" name="TextBox 3"/>
+          <p:cNvSpPr txBox="1"/>
+          <p:nvPr/>
+        </p:nvSpPr>
+        <p:spPr>
+          <a:xfrm>
+            <a:off x="628650" y="1900000"/>
+            <a:ext cx="7886700" cy="1850000"/>
+          </a:xfrm>
+          <a:prstGeom prst="rect">
+            <a:avLst/>
+          </a:prstGeom>
+          <a:solidFill>
+            <a:srgbClr val="F2F2F2"/>
+          </a:solidFill>
+        </p:spPr>
+        <p:txBody>
+          <a:bodyPr wrap="square">
+            <a:spAutoFit/>
+          </a:bodyPr>
+          <a:lstStyle/>
+          <a:p>
+            <a:r>
+              <a:rPr sz="1300">
+                <a:solidFill>
+                  <a:srgbClr val="202020"/>
+                </a:solidFill>
+                <a:latin typeface="Consolas"/>
+              </a:rPr>
+              <a:t># salariile fiecărei vârste distincte, apoi procentul cumulat</a:t>
+            </a:r>
+          </a:p>
+          <a:p>
+            <a:r>
+              <a:rPr sz="1300">
+                <a:solidFill>
+                  <a:srgbClr val="202020"/>
+                </a:solidFill>
+                <a:latin typeface="Consolas"/>
+              </a:rPr>
+              <a:t>sal = df.groupby('Vârstă')['Salariu'].sum()</a:t>
+            </a:r>
+          </a:p>
+          <a:p>
+            <a:r>
+              <a:rPr sz="1300">
+                <a:solidFill>
+                  <a:srgbClr val="202020"/>
+                </a:solidFill>
+                <a:latin typeface="Consolas"/>
+              </a:rPr>
+              <a:t>cum = sal.cumsum() / sal.sum()</a:t>
+            </a:r>
+          </a:p>
+          <a:p>
+            <a:endParaRPr sz="1300">
+              <a:solidFill>
+                <a:srgbClr val="202020"/>
+              </a:solidFill>
+              <a:latin typeface="Consolas"/>
+            </a:endParaRPr>
+          </a:p>
+          <a:p>
+            <a:r>
+              <a:rPr sz="1300">
+                <a:solidFill>
+                  <a:srgbClr val="202020"/>
+                </a:solidFill>
+                <a:latin typeface="Consolas"/>
+              </a:rPr>
+              <a:t># procentul cumulat al vârstei fiecărui salariat, tăiat în 3 cu pd.cut</a:t>
+            </a:r>
+          </a:p>
+          <a:p>
+            <a:r>
+              <a:rPr sz="1300">
+                <a:solidFill>
+                  <a:srgbClr val="202020"/>
+                </a:solidFill>
+                <a:latin typeface="Consolas"/>
+              </a:rPr>
+              <a:t>df['Grupa'] = pd.cut(df['Vârstă'].map(cum),</a:t>
+            </a:r>
+          </a:p>
+          <a:p>
+            <a:r>
+              <a:rPr sz="1300">
+                <a:solidFill>
+                  <a:srgbClr val="202020"/>
+                </a:solidFill>
+                <a:latin typeface="Consolas"/>
+              </a:rPr>
+              <a:t>                     bins = [0, 1/3, 2/3, 1],</a:t>
+            </a:r>
+          </a:p>
+          <a:p>
+            <a:r>
+              <a:rPr sz="1300">
+                <a:solidFill>
+                  <a:srgbClr val="202020"/>
+                </a:solidFill>
+                <a:latin typeface="Consolas"/>
+              </a:rPr>
+              <a:t>                     labels = ['Grupa 1', 'Grupa 2', 'Grupa 3'])</a:t>
+            </a:r>
+          </a:p>
+        </p:txBody>
+      </p:sp>
+      <p:sp>
+        <p:nvSpPr>
+          <p:cNvPr id="5" name="TextBox 4"/>
+          <p:cNvSpPr txBox="1"/>
+          <p:nvPr/>
+        </p:nvSpPr>
+        <p:spPr>
+          <a:xfrm>
+            <a:off x="628650" y="3850000"/>
+            <a:ext cx="7886700" cy="800000"/>
+          </a:xfrm>
+          <a:prstGeom prst="rect">
+            <a:avLst/>
+          </a:prstGeom>
+          <a:noFill/>
+        </p:spPr>
+        <p:txBody>
+          <a:bodyPr wrap="square">
+            <a:spAutoFit/>
+          </a:bodyPr>
+          <a:lstStyle/>
+          <a:p>
+            <a:r>
+              <a:rPr sz="1200"/>
+              <a:t>Salariații cu aceeași vârstă rămân mereu în aceeași grupă (nu se despart după ordinea rândurilor).</a:t>
+            </a:r>
+          </a:p>
+          <a:p>
+            <a:r>
+              <a:rPr sz="1200"/>
+              <a:t>O vârstă al cărei procent cumulat depășește pragul trece în grupa următoare (57 ani: 71% &gt; 67% → Grupa 3).</a:t>
+            </a:r>
+          </a:p>
+        </p:txBody>
+      </p:sp>
+    </p:spTree>
+  </p:cSld>
+  <p:clrMapOvr>
+    <a:masterClrMapping/>
+  </p:clrMapOvr>
+</p:sld>
+</file>
+
+<file path=ppt/slides/slide15.xml><?xml version="1.0" encoding="utf-8"?>
+<p:sld xmlns:a="http://schemas.openxmlformats.org/drawingml/2006/main" xmlns:r="http://schemas.openxmlformats.org/officeDocument/2006/relationships" xmlns:p="http://schemas.openxmlformats.org/presentationml/2006/main">
+  <p:cSld>
+    <p:spTree>
+      <p:nvGrpSpPr>
+        <p:cNvPr id="1" name=""/>
+        <p:cNvGrpSpPr/>
+        <p:nvPr/>
+      </p:nvGrpSpPr>
+      <p:grpSpPr>
+        <a:xfrm>
+          <a:off x="0" y="0"/>
+          <a:ext cx="0" cy="0"/>
+          <a:chOff x="0" y="0"/>
+          <a:chExt cx="0" cy="0"/>
+        </a:xfrm>
+      </p:grpSpPr>
+      <p:sp>
+        <p:nvSpPr>
+          <p:cNvPr id="2" name="Title 1">
+            <a:extLst>
+              <a:ext uri="{FF2B5EF4-FFF2-40B4-BE49-F238E27FC236}">
+                <a16:creationId xmlns:a16="http://schemas.microsoft.com/office/drawing/2014/main" id="{4953CC1A-823B-F644-300D-4CC0E45F0F6E}"/>
+              </a:ext>
+            </a:extLst>
+          </p:cNvPr>
+          <p:cNvSpPr>
+            <a:spLocks noGrp="1"/>
+          </p:cNvSpPr>
+          <p:nvPr>
+            <p:ph type="title"/>
+          </p:nvPr>
+        </p:nvSpPr>
+        <p:spPr/>
+        <p:txBody>
+          <a:bodyPr/>
+          <a:lstStyle/>
+          <a:p>
+            <a:r>
+              <a:rPr lang="ro-RO" dirty="0"/>
+              <a:t>Ingineria atributelor (Feature engineering)</a:t>
+            </a:r>
+          </a:p>
+        </p:txBody>
+      </p:sp>
+      <p:sp>
+        <p:nvSpPr>
+          <p:cNvPr id="3" name="Content Placeholder 2">
+            <a:extLst>
+              <a:ext uri="{FF2B5EF4-FFF2-40B4-BE49-F238E27FC236}">
+                <a16:creationId xmlns:a16="http://schemas.microsoft.com/office/drawing/2014/main" id="{BE040A14-ABCB-6E15-1DC9-3CAD1FFDEFCB}"/>
+              </a:ext>
+            </a:extLst>
+          </p:cNvPr>
+          <p:cNvSpPr>
+            <a:spLocks noGrp="1"/>
+          </p:cNvSpPr>
+          <p:nvPr>
+            <p:ph idx="1"/>
+          </p:nvPr>
+        </p:nvSpPr>
+        <p:spPr>
+          <a:xfrm>
+            <a:off x="628650" y="1369219"/>
+            <a:ext cx="7938480" cy="1803565"/>
+          </a:xfrm>
+        </p:spPr>
+        <p:txBody>
+          <a:bodyPr>
+            <a:normAutofit fontScale="92500" lnSpcReduction="10000"/>
+          </a:bodyPr>
+          <a:lstStyle/>
+          <a:p>
+            <a:r>
+              <a:rPr lang="ro-RO" dirty="0"/>
+              <a:t>Constă în adăugarea de atribute derivate din datele existente</a:t>
+            </a:r>
+          </a:p>
+          <a:p>
+            <a:pPr lvl="1"/>
+            <a:r>
+              <a:rPr lang="ro-RO" dirty="0"/>
+              <a:t>Atributele obținute prin discretizare</a:t>
+            </a:r>
+          </a:p>
+          <a:p>
+            <a:pPr lvl="1"/>
+            <a:r>
+              <a:rPr lang="ro-RO" dirty="0"/>
+              <a:t>Atribute agregate obținute la nivel de grupări detectate (exemplu: volum vânzări clienți mici,medii mari)</a:t>
+            </a:r>
+          </a:p>
+          <a:p>
+            <a:pPr lvl="1"/>
+            <a:r>
+              <a:rPr lang="ro-RO" dirty="0"/>
+              <a:t>Atribute obținute prin calcul direct, stabilind astfel legături complexe între atribute </a:t>
+            </a:r>
+          </a:p>
+          <a:p>
+            <a:pPr lvl="2"/>
+            <a:r>
+              <a:rPr lang="ro-RO" dirty="0"/>
+              <a:t>Țin în general de natura problemei și depinde doar de creativitatea echipei pentru a inventa atribute care să aducă valoare</a:t>
+            </a:r>
+          </a:p>
+          <a:p>
+            <a:pPr lvl="3"/>
+            <a:endParaRPr lang="ro-RO" dirty="0"/>
+          </a:p>
+        </p:txBody>
+      </p:sp>
+      <p:sp>
+        <p:nvSpPr>
+          <p:cNvPr id="6" name="TextBox 5">
+            <a:extLst>
+              <a:ext uri="{FF2B5EF4-FFF2-40B4-BE49-F238E27FC236}">
+                <a16:creationId xmlns:a16="http://schemas.microsoft.com/office/drawing/2014/main" id="{0EC468E3-6F99-2092-32AE-0676DC179A26}"/>
+              </a:ext>
+            </a:extLst>
+          </p:cNvPr>
+          <p:cNvSpPr txBox="1"/>
+          <p:nvPr/>
+        </p:nvSpPr>
+        <p:spPr>
+          <a:xfrm>
+            <a:off x="659717" y="3337202"/>
+            <a:ext cx="4191511" cy="1154162"/>
+          </a:xfrm>
+          <a:prstGeom prst="rect">
+            <a:avLst/>
+          </a:prstGeom>
+          <a:noFill/>
+        </p:spPr>
+        <p:txBody>
+          <a:bodyPr wrap="square" rtlCol="0">
+            <a:spAutoFit/>
+          </a:bodyPr>
+          <a:lstStyle/>
+          <a:p>
+            <a:pPr lvl="3"/>
+            <a:r>
+              <a:rPr lang="ro-RO" sz="1100" dirty="0">
+                <a:solidFill>
+                  <a:schemeClr val="accent1">
+                    <a:lumMod val="75000"/>
+                  </a:schemeClr>
+                </a:solidFill>
+              </a:rPr>
+              <a:t>Exemplu - indexul de profit al unui produs în grupa din care face parte:</a:t>
+            </a:r>
+          </a:p>
+          <a:p>
+            <a:pPr marL="171450" lvl="4" indent="-171450">
+              <a:buFont typeface="Arial" panose="020B0604020202020204" pitchFamily="34" charset="0"/>
+              <a:buChar char="•"/>
+            </a:pPr>
+            <a:r>
+              <a:rPr lang="ro-RO" sz="1100" dirty="0">
+                <a:solidFill>
+                  <a:schemeClr val="accent1">
+                    <a:lumMod val="75000"/>
+                  </a:schemeClr>
+                </a:solidFill>
+              </a:rPr>
+              <a:t>se împarte profitul (mediu al) produsului la media de profit a produselor grupei</a:t>
+            </a:r>
+          </a:p>
+          <a:p>
+            <a:pPr marL="171450" lvl="4" indent="-171450">
+              <a:buFont typeface="Arial" panose="020B0604020202020204" pitchFamily="34" charset="0"/>
+              <a:buChar char="•"/>
+            </a:pPr>
+            <a:r>
+              <a:rPr lang="ro-RO" sz="1100" dirty="0">
+                <a:solidFill>
+                  <a:schemeClr val="accent1">
+                    <a:lumMod val="75000"/>
+                  </a:schemeClr>
+                </a:solidFill>
+              </a:rPr>
+              <a:t>astfel se poate stabili gradul de profitabilitate în categorie</a:t>
+            </a:r>
+          </a:p>
+          <a:p>
+            <a:endParaRPr lang="en-US" dirty="0"/>
+          </a:p>
+        </p:txBody>
+      </p:sp>
+      <p:pic>
+        <p:nvPicPr>
+          <p:cNvPr id="12" name="Picture 11">
+            <a:extLst>
+              <a:ext uri="{FF2B5EF4-FFF2-40B4-BE49-F238E27FC236}">
+                <a16:creationId xmlns:a16="http://schemas.microsoft.com/office/drawing/2014/main" id="{11BA6A22-D187-2845-755B-6C02BC9E56BB}"/>
+              </a:ext>
+            </a:extLst>
+          </p:cNvPr>
+          <p:cNvPicPr>
+            <a:picLocks noChangeAspect="1"/>
+          </p:cNvPicPr>
+          <p:nvPr/>
+        </p:nvPicPr>
+        <p:blipFill>
+          <a:blip r:embed="rId2"/>
+          <a:stretch>
+            <a:fillRect/>
+          </a:stretch>
+        </p:blipFill>
+        <p:spPr>
+          <a:xfrm>
+            <a:off x="4723992" y="3114073"/>
+            <a:ext cx="3341039" cy="1648171"/>
+          </a:xfrm>
+          <a:prstGeom prst="rect">
+            <a:avLst/>
+          </a:prstGeom>
+        </p:spPr>
+      </p:pic>
+    </p:spTree>
+    <p:extLst>
+      <p:ext uri="{BB962C8B-B14F-4D97-AF65-F5344CB8AC3E}">
+        <p14:creationId xmlns:p14="http://schemas.microsoft.com/office/powerpoint/2010/main" val="76359574"/>
+      </p:ext>
+    </p:extLst>
+  </p:cSld>
+  <p:clrMapOvr>
+    <a:masterClrMapping/>
+  </p:clrMapOvr>
+</p:sld>
+</file>
+
+<file path=ppt/slides/slide16.xml><?xml version="1.0" encoding="utf-8"?>
+<p:sld xmlns:a="http://schemas.openxmlformats.org/drawingml/2006/main" xmlns:r="http://schemas.openxmlformats.org/officeDocument/2006/relationships" xmlns:p="http://schemas.openxmlformats.org/presentationml/2006/main">
+  <p:cSld>
+    <p:spTree>
+      <p:nvGrpSpPr>
+        <p:cNvPr id="1" name=""/>
+        <p:cNvGrpSpPr/>
+        <p:nvPr/>
+      </p:nvGrpSpPr>
+      <p:grpSpPr>
+        <a:xfrm>
+          <a:off x="0" y="0"/>
+          <a:ext cx="0" cy="0"/>
+          <a:chOff x="0" y="0"/>
+          <a:chExt cx="0" cy="0"/>
+        </a:xfrm>
+      </p:grpSpPr>
+      <p:sp>
+        <p:nvSpPr>
           <p:cNvPr id="2" name="Title 1">
             <a:extLst>
               <a:ext uri="{FF2B5EF4-FFF2-40B4-BE49-F238E27FC236}">
@@ -6920,2756 +7366,6 @@
 </p:sld>
 </file>
 
-<file path=ppt/slides/slide15.xml><?xml version="1.0" encoding="utf-8"?>
-<p:sld xmlns:a="http://schemas.openxmlformats.org/drawingml/2006/main" xmlns:r="http://schemas.openxmlformats.org/officeDocument/2006/relationships" xmlns:p="http://schemas.openxmlformats.org/presentationml/2006/main">
-  <p:cSld>
-    <p:spTree>
-      <p:nvGrpSpPr>
-        <p:cNvPr id="1" name=""/>
-        <p:cNvGrpSpPr/>
-        <p:nvPr/>
-      </p:nvGrpSpPr>
-      <p:grpSpPr>
-        <a:xfrm>
-          <a:off x="0" y="0"/>
-          <a:ext cx="0" cy="0"/>
-          <a:chOff x="0" y="0"/>
-          <a:chExt cx="0" cy="0"/>
-        </a:xfrm>
-      </p:grpSpPr>
-      <p:sp>
-        <p:nvSpPr>
-          <p:cNvPr id="2" name="Title 1">
-            <a:extLst>
-              <a:ext uri="{FF2B5EF4-FFF2-40B4-BE49-F238E27FC236}">
-                <a16:creationId xmlns:a16="http://schemas.microsoft.com/office/drawing/2014/main" id="{4953CC1A-823B-F644-300D-4CC0E45F0F6E}"/>
-              </a:ext>
-            </a:extLst>
-          </p:cNvPr>
-          <p:cNvSpPr>
-            <a:spLocks noGrp="1"/>
-          </p:cNvSpPr>
-          <p:nvPr>
-            <p:ph type="title"/>
-          </p:nvPr>
-        </p:nvSpPr>
-        <p:spPr/>
-        <p:txBody>
-          <a:bodyPr>
-            <a:normAutofit fontScale="90000"/>
-          </a:bodyPr>
-          <a:lstStyle/>
-          <a:p>
-            <a:r>
-              <a:rPr lang="ro-RO" dirty="0"/>
-              <a:t>Codificarea numerică a variabilelor categoriale</a:t>
-            </a:r>
-          </a:p>
-        </p:txBody>
-      </p:sp>
-      <p:sp>
-        <p:nvSpPr>
-          <p:cNvPr id="3" name="Content Placeholder 2">
-            <a:extLst>
-              <a:ext uri="{FF2B5EF4-FFF2-40B4-BE49-F238E27FC236}">
-                <a16:creationId xmlns:a16="http://schemas.microsoft.com/office/drawing/2014/main" id="{BE040A14-ABCB-6E15-1DC9-3CAD1FFDEFCB}"/>
-              </a:ext>
-            </a:extLst>
-          </p:cNvPr>
-          <p:cNvSpPr>
-            <a:spLocks noGrp="1"/>
-          </p:cNvSpPr>
-          <p:nvPr>
-            <p:ph idx="1"/>
-          </p:nvPr>
-        </p:nvSpPr>
-        <p:spPr/>
-        <p:txBody>
-          <a:bodyPr>
-            <a:normAutofit/>
-          </a:bodyPr>
-          <a:lstStyle/>
-          <a:p>
-            <a:pPr lvl="1"/>
-            <a:r>
-              <a:rPr lang="ro-RO" dirty="0"/>
-              <a:t>Modelele statistice nu procesează decât numere</a:t>
-            </a:r>
-          </a:p>
-          <a:p>
-            <a:pPr lvl="1"/>
-            <a:r>
-              <a:rPr lang="ro-RO" dirty="0"/>
-              <a:t>Orice atribut categorial – geografice, culori, caracteristici – trebuie codificat</a:t>
-            </a:r>
-          </a:p>
-          <a:p>
-            <a:pPr lvl="1"/>
-            <a:endParaRPr lang="ro-RO" dirty="0"/>
-          </a:p>
-          <a:p>
-            <a:pPr marL="342900" lvl="1" indent="0">
-              <a:buNone/>
-            </a:pPr>
-            <a:endParaRPr lang="ro-RO" dirty="0"/>
-          </a:p>
-          <a:p>
-            <a:pPr lvl="1"/>
-            <a:endParaRPr lang="ro-RO" dirty="0"/>
-          </a:p>
-          <a:p>
-            <a:pPr lvl="1"/>
-            <a:endParaRPr lang="ro-RO" dirty="0"/>
-          </a:p>
-          <a:p>
-            <a:pPr lvl="1"/>
-            <a:endParaRPr lang="ro-RO" dirty="0"/>
-          </a:p>
-          <a:p>
-            <a:pPr lvl="1"/>
-            <a:r>
-              <a:rPr lang="ro-RO" dirty="0"/>
-              <a:t>Cum alegem o codifcare nepărtinitoare și care să nu fie aleatoare?</a:t>
-            </a:r>
-          </a:p>
-          <a:p>
-            <a:pPr lvl="1"/>
-            <a:endParaRPr lang="en-US" dirty="0"/>
-          </a:p>
-        </p:txBody>
-      </p:sp>
-      <p:graphicFrame>
-        <p:nvGraphicFramePr>
-          <p:cNvPr id="4" name="Table 3">
-            <a:extLst>
-              <a:ext uri="{FF2B5EF4-FFF2-40B4-BE49-F238E27FC236}">
-                <a16:creationId xmlns:a16="http://schemas.microsoft.com/office/drawing/2014/main" id="{E50E58F9-F145-7C1A-6678-A63DC4CC2D72}"/>
-              </a:ext>
-            </a:extLst>
-          </p:cNvPr>
-          <p:cNvGraphicFramePr>
-            <a:graphicFrameLocks noGrp="1"/>
-          </p:cNvGraphicFramePr>
-          <p:nvPr>
-            <p:extLst>
-              <p:ext uri="{D42A27DB-BD31-4B8C-83A1-F6EECF244321}">
-                <p14:modId xmlns:p14="http://schemas.microsoft.com/office/powerpoint/2010/main" val="4207388285"/>
-              </p:ext>
-            </p:extLst>
-          </p:nvPr>
-        </p:nvGraphicFramePr>
-        <p:xfrm>
-          <a:off x="1516912" y="2313317"/>
-          <a:ext cx="1244699" cy="1005840"/>
-        </p:xfrm>
-        <a:graphic>
-          <a:graphicData uri="http://schemas.openxmlformats.org/drawingml/2006/table">
-            <a:tbl>
-              <a:tblPr firstRow="1" bandRow="1">
-                <a:tableStyleId>{19765D9A-5B29-4FE0-BD4B-011D1141B641}</a:tableStyleId>
-              </a:tblPr>
-              <a:tblGrid>
-                <a:gridCol w="1244699">
-                  <a:extLst>
-                    <a:ext uri="{9D8B030D-6E8A-4147-A177-3AD203B41FA5}">
-                      <a16:colId xmlns:a16="http://schemas.microsoft.com/office/drawing/2014/main" val="1735651405"/>
-                    </a:ext>
-                  </a:extLst>
-                </a:gridCol>
-              </a:tblGrid>
-              <a:tr h="177436">
-                <a:tc>
-                  <a:txBody>
-                    <a:bodyPr/>
-                    <a:lstStyle/>
-                    <a:p>
-                      <a:r>
-                        <a:rPr lang="ro-RO" sz="1050" dirty="0"/>
-                        <a:t>Culoare mașină</a:t>
-                      </a:r>
-                      <a:endParaRPr lang="en-US" sz="1050" dirty="0"/>
-                    </a:p>
-                  </a:txBody>
-                  <a:tcPr/>
-                </a:tc>
-                <a:extLst>
-                  <a:ext uri="{0D108BD9-81ED-4DB2-BD59-A6C34878D82A}">
-                    <a16:rowId xmlns:a16="http://schemas.microsoft.com/office/drawing/2014/main" val="2195888070"/>
-                  </a:ext>
-                </a:extLst>
-              </a:tr>
-              <a:tr h="177436">
-                <a:tc>
-                  <a:txBody>
-                    <a:bodyPr/>
-                    <a:lstStyle/>
-                    <a:p>
-                      <a:r>
-                        <a:rPr lang="ro-RO" sz="1050" dirty="0"/>
-                        <a:t>Alb</a:t>
-                      </a:r>
-                      <a:endParaRPr lang="en-US" sz="1050" dirty="0"/>
-                    </a:p>
-                  </a:txBody>
-                  <a:tcPr/>
-                </a:tc>
-                <a:extLst>
-                  <a:ext uri="{0D108BD9-81ED-4DB2-BD59-A6C34878D82A}">
-                    <a16:rowId xmlns:a16="http://schemas.microsoft.com/office/drawing/2014/main" val="2958170600"/>
-                  </a:ext>
-                </a:extLst>
-              </a:tr>
-              <a:tr h="177436">
-                <a:tc>
-                  <a:txBody>
-                    <a:bodyPr/>
-                    <a:lstStyle/>
-                    <a:p>
-                      <a:r>
-                        <a:rPr lang="ro-RO" sz="1050" dirty="0"/>
-                        <a:t>Albastru</a:t>
-                      </a:r>
-                      <a:endParaRPr lang="en-US" sz="1050" dirty="0"/>
-                    </a:p>
-                  </a:txBody>
-                  <a:tcPr/>
-                </a:tc>
-                <a:extLst>
-                  <a:ext uri="{0D108BD9-81ED-4DB2-BD59-A6C34878D82A}">
-                    <a16:rowId xmlns:a16="http://schemas.microsoft.com/office/drawing/2014/main" val="1664631160"/>
-                  </a:ext>
-                </a:extLst>
-              </a:tr>
-              <a:tr h="177436">
-                <a:tc>
-                  <a:txBody>
-                    <a:bodyPr/>
-                    <a:lstStyle/>
-                    <a:p>
-                      <a:r>
-                        <a:rPr lang="ro-RO" sz="1050" dirty="0"/>
-                        <a:t>Roșu</a:t>
-                      </a:r>
-                      <a:endParaRPr lang="en-US" sz="1050" dirty="0"/>
-                    </a:p>
-                  </a:txBody>
-                  <a:tcPr/>
-                </a:tc>
-                <a:extLst>
-                  <a:ext uri="{0D108BD9-81ED-4DB2-BD59-A6C34878D82A}">
-                    <a16:rowId xmlns:a16="http://schemas.microsoft.com/office/drawing/2014/main" val="274380783"/>
-                  </a:ext>
-                </a:extLst>
-              </a:tr>
-            </a:tbl>
-          </a:graphicData>
-        </a:graphic>
-      </p:graphicFrame>
-      <p:graphicFrame>
-        <p:nvGraphicFramePr>
-          <p:cNvPr id="5" name="Table 4">
-            <a:extLst>
-              <a:ext uri="{FF2B5EF4-FFF2-40B4-BE49-F238E27FC236}">
-                <a16:creationId xmlns:a16="http://schemas.microsoft.com/office/drawing/2014/main" id="{DD986EFB-C150-DCEC-6606-A4F8D0C1A9D1}"/>
-              </a:ext>
-            </a:extLst>
-          </p:cNvPr>
-          <p:cNvGraphicFramePr>
-            <a:graphicFrameLocks noGrp="1"/>
-          </p:cNvGraphicFramePr>
-          <p:nvPr/>
-        </p:nvGraphicFramePr>
-        <p:xfrm>
-          <a:off x="2950832" y="2313317"/>
-          <a:ext cx="1233520" cy="1005840"/>
-        </p:xfrm>
-        <a:graphic>
-          <a:graphicData uri="http://schemas.openxmlformats.org/drawingml/2006/table">
-            <a:tbl>
-              <a:tblPr firstRow="1" bandRow="1">
-                <a:tableStyleId>{19765D9A-5B29-4FE0-BD4B-011D1141B641}</a:tableStyleId>
-              </a:tblPr>
-              <a:tblGrid>
-                <a:gridCol w="1233520">
-                  <a:extLst>
-                    <a:ext uri="{9D8B030D-6E8A-4147-A177-3AD203B41FA5}">
-                      <a16:colId xmlns:a16="http://schemas.microsoft.com/office/drawing/2014/main" val="1735651405"/>
-                    </a:ext>
-                  </a:extLst>
-                </a:gridCol>
-              </a:tblGrid>
-              <a:tr h="177436">
-                <a:tc>
-                  <a:txBody>
-                    <a:bodyPr/>
-                    <a:lstStyle/>
-                    <a:p>
-                      <a:r>
-                        <a:rPr lang="ro-RO" sz="1050" dirty="0"/>
-                        <a:t>Codificare 1</a:t>
-                      </a:r>
-                      <a:endParaRPr lang="en-US" sz="1050" dirty="0"/>
-                    </a:p>
-                  </a:txBody>
-                  <a:tcPr/>
-                </a:tc>
-                <a:extLst>
-                  <a:ext uri="{0D108BD9-81ED-4DB2-BD59-A6C34878D82A}">
-                    <a16:rowId xmlns:a16="http://schemas.microsoft.com/office/drawing/2014/main" val="2195888070"/>
-                  </a:ext>
-                </a:extLst>
-              </a:tr>
-              <a:tr h="177436">
-                <a:tc>
-                  <a:txBody>
-                    <a:bodyPr/>
-                    <a:lstStyle/>
-                    <a:p>
-                      <a:r>
-                        <a:rPr lang="ro-RO" sz="1050" dirty="0"/>
-                        <a:t>0</a:t>
-                      </a:r>
-                      <a:endParaRPr lang="en-US" sz="1050" dirty="0"/>
-                    </a:p>
-                  </a:txBody>
-                  <a:tcPr/>
-                </a:tc>
-                <a:extLst>
-                  <a:ext uri="{0D108BD9-81ED-4DB2-BD59-A6C34878D82A}">
-                    <a16:rowId xmlns:a16="http://schemas.microsoft.com/office/drawing/2014/main" val="2958170600"/>
-                  </a:ext>
-                </a:extLst>
-              </a:tr>
-              <a:tr h="177436">
-                <a:tc>
-                  <a:txBody>
-                    <a:bodyPr/>
-                    <a:lstStyle/>
-                    <a:p>
-                      <a:r>
-                        <a:rPr lang="ro-RO" sz="1050" dirty="0"/>
-                        <a:t>1</a:t>
-                      </a:r>
-                      <a:endParaRPr lang="en-US" sz="1050" dirty="0"/>
-                    </a:p>
-                  </a:txBody>
-                  <a:tcPr/>
-                </a:tc>
-                <a:extLst>
-                  <a:ext uri="{0D108BD9-81ED-4DB2-BD59-A6C34878D82A}">
-                    <a16:rowId xmlns:a16="http://schemas.microsoft.com/office/drawing/2014/main" val="1664631160"/>
-                  </a:ext>
-                </a:extLst>
-              </a:tr>
-              <a:tr h="177436">
-                <a:tc>
-                  <a:txBody>
-                    <a:bodyPr/>
-                    <a:lstStyle/>
-                    <a:p>
-                      <a:r>
-                        <a:rPr lang="ro-RO" sz="1050" dirty="0"/>
-                        <a:t>2</a:t>
-                      </a:r>
-                      <a:endParaRPr lang="en-US" sz="1050" dirty="0"/>
-                    </a:p>
-                  </a:txBody>
-                  <a:tcPr/>
-                </a:tc>
-                <a:extLst>
-                  <a:ext uri="{0D108BD9-81ED-4DB2-BD59-A6C34878D82A}">
-                    <a16:rowId xmlns:a16="http://schemas.microsoft.com/office/drawing/2014/main" val="274380783"/>
-                  </a:ext>
-                </a:extLst>
-              </a:tr>
-            </a:tbl>
-          </a:graphicData>
-        </a:graphic>
-      </p:graphicFrame>
-      <p:graphicFrame>
-        <p:nvGraphicFramePr>
-          <p:cNvPr id="6" name="Table 5">
-            <a:extLst>
-              <a:ext uri="{FF2B5EF4-FFF2-40B4-BE49-F238E27FC236}">
-                <a16:creationId xmlns:a16="http://schemas.microsoft.com/office/drawing/2014/main" id="{08C65D75-184C-3273-068B-3459CD6ED672}"/>
-              </a:ext>
-            </a:extLst>
-          </p:cNvPr>
-          <p:cNvGraphicFramePr>
-            <a:graphicFrameLocks noGrp="1"/>
-          </p:cNvGraphicFramePr>
-          <p:nvPr/>
-        </p:nvGraphicFramePr>
-        <p:xfrm>
-          <a:off x="4310350" y="2313317"/>
-          <a:ext cx="1233520" cy="1005840"/>
-        </p:xfrm>
-        <a:graphic>
-          <a:graphicData uri="http://schemas.openxmlformats.org/drawingml/2006/table">
-            <a:tbl>
-              <a:tblPr firstRow="1" bandRow="1">
-                <a:tableStyleId>{19765D9A-5B29-4FE0-BD4B-011D1141B641}</a:tableStyleId>
-              </a:tblPr>
-              <a:tblGrid>
-                <a:gridCol w="1233520">
-                  <a:extLst>
-                    <a:ext uri="{9D8B030D-6E8A-4147-A177-3AD203B41FA5}">
-                      <a16:colId xmlns:a16="http://schemas.microsoft.com/office/drawing/2014/main" val="1735651405"/>
-                    </a:ext>
-                  </a:extLst>
-                </a:gridCol>
-              </a:tblGrid>
-              <a:tr h="177436">
-                <a:tc>
-                  <a:txBody>
-                    <a:bodyPr/>
-                    <a:lstStyle/>
-                    <a:p>
-                      <a:r>
-                        <a:rPr lang="ro-RO" sz="1050" dirty="0"/>
-                        <a:t>Codificare 2</a:t>
-                      </a:r>
-                      <a:endParaRPr lang="en-US" sz="1050" dirty="0"/>
-                    </a:p>
-                  </a:txBody>
-                  <a:tcPr/>
-                </a:tc>
-                <a:extLst>
-                  <a:ext uri="{0D108BD9-81ED-4DB2-BD59-A6C34878D82A}">
-                    <a16:rowId xmlns:a16="http://schemas.microsoft.com/office/drawing/2014/main" val="2195888070"/>
-                  </a:ext>
-                </a:extLst>
-              </a:tr>
-              <a:tr h="177436">
-                <a:tc>
-                  <a:txBody>
-                    <a:bodyPr/>
-                    <a:lstStyle/>
-                    <a:p>
-                      <a:r>
-                        <a:rPr lang="ro-RO" sz="1050" dirty="0"/>
-                        <a:t>1</a:t>
-                      </a:r>
-                      <a:endParaRPr lang="en-US" sz="1050" dirty="0"/>
-                    </a:p>
-                  </a:txBody>
-                  <a:tcPr/>
-                </a:tc>
-                <a:extLst>
-                  <a:ext uri="{0D108BD9-81ED-4DB2-BD59-A6C34878D82A}">
-                    <a16:rowId xmlns:a16="http://schemas.microsoft.com/office/drawing/2014/main" val="2958170600"/>
-                  </a:ext>
-                </a:extLst>
-              </a:tr>
-              <a:tr h="177436">
-                <a:tc>
-                  <a:txBody>
-                    <a:bodyPr/>
-                    <a:lstStyle/>
-                    <a:p>
-                      <a:r>
-                        <a:rPr lang="ro-RO" sz="1050" dirty="0"/>
-                        <a:t>0</a:t>
-                      </a:r>
-                      <a:endParaRPr lang="en-US" sz="1050" dirty="0"/>
-                    </a:p>
-                  </a:txBody>
-                  <a:tcPr/>
-                </a:tc>
-                <a:extLst>
-                  <a:ext uri="{0D108BD9-81ED-4DB2-BD59-A6C34878D82A}">
-                    <a16:rowId xmlns:a16="http://schemas.microsoft.com/office/drawing/2014/main" val="1664631160"/>
-                  </a:ext>
-                </a:extLst>
-              </a:tr>
-              <a:tr h="177436">
-                <a:tc>
-                  <a:txBody>
-                    <a:bodyPr/>
-                    <a:lstStyle/>
-                    <a:p>
-                      <a:r>
-                        <a:rPr lang="ro-RO" sz="1050" dirty="0"/>
-                        <a:t>2</a:t>
-                      </a:r>
-                      <a:endParaRPr lang="en-US" sz="1050" dirty="0"/>
-                    </a:p>
-                  </a:txBody>
-                  <a:tcPr/>
-                </a:tc>
-                <a:extLst>
-                  <a:ext uri="{0D108BD9-81ED-4DB2-BD59-A6C34878D82A}">
-                    <a16:rowId xmlns:a16="http://schemas.microsoft.com/office/drawing/2014/main" val="274380783"/>
-                  </a:ext>
-                </a:extLst>
-              </a:tr>
-            </a:tbl>
-          </a:graphicData>
-        </a:graphic>
-      </p:graphicFrame>
-      <p:graphicFrame>
-        <p:nvGraphicFramePr>
-          <p:cNvPr id="7" name="Table 6">
-            <a:extLst>
-              <a:ext uri="{FF2B5EF4-FFF2-40B4-BE49-F238E27FC236}">
-                <a16:creationId xmlns:a16="http://schemas.microsoft.com/office/drawing/2014/main" id="{BDFF86D5-3EBC-C773-69DE-CC559AD640C0}"/>
-              </a:ext>
-            </a:extLst>
-          </p:cNvPr>
-          <p:cNvGraphicFramePr>
-            <a:graphicFrameLocks noGrp="1"/>
-          </p:cNvGraphicFramePr>
-          <p:nvPr/>
-        </p:nvGraphicFramePr>
-        <p:xfrm>
-          <a:off x="5699529" y="2313317"/>
-          <a:ext cx="1554301" cy="1005840"/>
-        </p:xfrm>
-        <a:graphic>
-          <a:graphicData uri="http://schemas.openxmlformats.org/drawingml/2006/table">
-            <a:tbl>
-              <a:tblPr firstRow="1" bandRow="1">
-                <a:tableStyleId>{19765D9A-5B29-4FE0-BD4B-011D1141B641}</a:tableStyleId>
-              </a:tblPr>
-              <a:tblGrid>
-                <a:gridCol w="1554301">
-                  <a:extLst>
-                    <a:ext uri="{9D8B030D-6E8A-4147-A177-3AD203B41FA5}">
-                      <a16:colId xmlns:a16="http://schemas.microsoft.com/office/drawing/2014/main" val="1735651405"/>
-                    </a:ext>
-                  </a:extLst>
-                </a:gridCol>
-              </a:tblGrid>
-              <a:tr h="177436">
-                <a:tc>
-                  <a:txBody>
-                    <a:bodyPr/>
-                    <a:lstStyle/>
-                    <a:p>
-                      <a:r>
-                        <a:rPr lang="ro-RO" sz="1050" dirty="0"/>
-                        <a:t>Codifcare oareacare</a:t>
-                      </a:r>
-                      <a:endParaRPr lang="en-US" sz="1050" dirty="0"/>
-                    </a:p>
-                  </a:txBody>
-                  <a:tcPr/>
-                </a:tc>
-                <a:extLst>
-                  <a:ext uri="{0D108BD9-81ED-4DB2-BD59-A6C34878D82A}">
-                    <a16:rowId xmlns:a16="http://schemas.microsoft.com/office/drawing/2014/main" val="2195888070"/>
-                  </a:ext>
-                </a:extLst>
-              </a:tr>
-              <a:tr h="177436">
-                <a:tc>
-                  <a:txBody>
-                    <a:bodyPr/>
-                    <a:lstStyle/>
-                    <a:p>
-                      <a:r>
-                        <a:rPr lang="ro-RO" sz="1050" dirty="0"/>
-                        <a:t>7</a:t>
-                      </a:r>
-                      <a:endParaRPr lang="en-US" sz="1050" dirty="0"/>
-                    </a:p>
-                  </a:txBody>
-                  <a:tcPr/>
-                </a:tc>
-                <a:extLst>
-                  <a:ext uri="{0D108BD9-81ED-4DB2-BD59-A6C34878D82A}">
-                    <a16:rowId xmlns:a16="http://schemas.microsoft.com/office/drawing/2014/main" val="2958170600"/>
-                  </a:ext>
-                </a:extLst>
-              </a:tr>
-              <a:tr h="177436">
-                <a:tc>
-                  <a:txBody>
-                    <a:bodyPr/>
-                    <a:lstStyle/>
-                    <a:p>
-                      <a:r>
-                        <a:rPr lang="ro-RO" sz="1050" dirty="0"/>
-                        <a:t>-1</a:t>
-                      </a:r>
-                      <a:endParaRPr lang="en-US" sz="1050" dirty="0"/>
-                    </a:p>
-                  </a:txBody>
-                  <a:tcPr/>
-                </a:tc>
-                <a:extLst>
-                  <a:ext uri="{0D108BD9-81ED-4DB2-BD59-A6C34878D82A}">
-                    <a16:rowId xmlns:a16="http://schemas.microsoft.com/office/drawing/2014/main" val="1664631160"/>
-                  </a:ext>
-                </a:extLst>
-              </a:tr>
-              <a:tr h="177436">
-                <a:tc>
-                  <a:txBody>
-                    <a:bodyPr/>
-                    <a:lstStyle/>
-                    <a:p>
-                      <a:r>
-                        <a:rPr lang="ro-RO" sz="1050" dirty="0"/>
-                        <a:t>2013</a:t>
-                      </a:r>
-                      <a:endParaRPr lang="en-US" sz="1050" dirty="0"/>
-                    </a:p>
-                  </a:txBody>
-                  <a:tcPr/>
-                </a:tc>
-                <a:extLst>
-                  <a:ext uri="{0D108BD9-81ED-4DB2-BD59-A6C34878D82A}">
-                    <a16:rowId xmlns:a16="http://schemas.microsoft.com/office/drawing/2014/main" val="274380783"/>
-                  </a:ext>
-                </a:extLst>
-              </a:tr>
-            </a:tbl>
-          </a:graphicData>
-        </a:graphic>
-      </p:graphicFrame>
-    </p:spTree>
-    <p:extLst>
-      <p:ext uri="{BB962C8B-B14F-4D97-AF65-F5344CB8AC3E}">
-        <p14:creationId xmlns:p14="http://schemas.microsoft.com/office/powerpoint/2010/main" val="690373291"/>
-      </p:ext>
-    </p:extLst>
-  </p:cSld>
-  <p:clrMapOvr>
-    <a:masterClrMapping/>
-  </p:clrMapOvr>
-</p:sld>
-</file>
-
-<file path=ppt/slides/slide16.xml><?xml version="1.0" encoding="utf-8"?>
-<p:sld xmlns:a="http://schemas.openxmlformats.org/drawingml/2006/main" xmlns:r="http://schemas.openxmlformats.org/officeDocument/2006/relationships" xmlns:p="http://schemas.openxmlformats.org/presentationml/2006/main">
-  <p:cSld>
-    <p:spTree>
-      <p:nvGrpSpPr>
-        <p:cNvPr id="1" name=""/>
-        <p:cNvGrpSpPr/>
-        <p:nvPr/>
-      </p:nvGrpSpPr>
-      <p:grpSpPr>
-        <a:xfrm>
-          <a:off x="0" y="0"/>
-          <a:ext cx="0" cy="0"/>
-          <a:chOff x="0" y="0"/>
-          <a:chExt cx="0" cy="0"/>
-        </a:xfrm>
-      </p:grpSpPr>
-      <p:sp>
-        <p:nvSpPr>
-          <p:cNvPr id="2" name="Title 1">
-            <a:extLst>
-              <a:ext uri="{FF2B5EF4-FFF2-40B4-BE49-F238E27FC236}">
-                <a16:creationId xmlns:a16="http://schemas.microsoft.com/office/drawing/2014/main" id="{4953CC1A-823B-F644-300D-4CC0E45F0F6E}"/>
-              </a:ext>
-            </a:extLst>
-          </p:cNvPr>
-          <p:cNvSpPr>
-            <a:spLocks noGrp="1"/>
-          </p:cNvSpPr>
-          <p:nvPr>
-            <p:ph type="title"/>
-          </p:nvPr>
-        </p:nvSpPr>
-        <p:spPr/>
-        <p:txBody>
-          <a:bodyPr>
-            <a:normAutofit fontScale="90000"/>
-          </a:bodyPr>
-          <a:lstStyle/>
-          <a:p>
-            <a:r>
-              <a:rPr lang="ro-RO" dirty="0"/>
-              <a:t>Codificarea numerică a variabilelor categoriale</a:t>
-            </a:r>
-          </a:p>
-        </p:txBody>
-      </p:sp>
-      <p:sp>
-        <p:nvSpPr>
-          <p:cNvPr id="3" name="Content Placeholder 2">
-            <a:extLst>
-              <a:ext uri="{FF2B5EF4-FFF2-40B4-BE49-F238E27FC236}">
-                <a16:creationId xmlns:a16="http://schemas.microsoft.com/office/drawing/2014/main" id="{BE040A14-ABCB-6E15-1DC9-3CAD1FFDEFCB}"/>
-              </a:ext>
-            </a:extLst>
-          </p:cNvPr>
-          <p:cNvSpPr>
-            <a:spLocks noGrp="1"/>
-          </p:cNvSpPr>
-          <p:nvPr>
-            <p:ph idx="1"/>
-          </p:nvPr>
-        </p:nvSpPr>
-        <p:spPr/>
-        <p:txBody>
-          <a:bodyPr>
-            <a:normAutofit fontScale="92500" lnSpcReduction="20000"/>
-          </a:bodyPr>
-          <a:lstStyle/>
-          <a:p>
-            <a:r>
-              <a:rPr lang="ro-RO" dirty="0"/>
-              <a:t>ONE HOT ENCODING – codificare nepărtinitoare</a:t>
-            </a:r>
-          </a:p>
-          <a:p>
-            <a:pPr lvl="1"/>
-            <a:endParaRPr lang="ro-RO" dirty="0"/>
-          </a:p>
-          <a:p>
-            <a:pPr lvl="1"/>
-            <a:endParaRPr lang="ro-RO" dirty="0"/>
-          </a:p>
-          <a:p>
-            <a:pPr lvl="1"/>
-            <a:endParaRPr lang="ro-RO" dirty="0"/>
-          </a:p>
-          <a:p>
-            <a:pPr lvl="1"/>
-            <a:endParaRPr lang="ro-RO" dirty="0"/>
-          </a:p>
-          <a:p>
-            <a:pPr lvl="1"/>
-            <a:endParaRPr lang="ro-RO" dirty="0"/>
-          </a:p>
-          <a:p>
-            <a:pPr lvl="1"/>
-            <a:endParaRPr lang="ro-RO" dirty="0"/>
-          </a:p>
-          <a:p>
-            <a:pPr lvl="1"/>
-            <a:r>
-              <a:rPr lang="ro-RO" dirty="0"/>
-              <a:t>Alb = (1,0,0), Albastru = (0,1,0), Roșu = (0,0,1)</a:t>
-            </a:r>
-          </a:p>
-          <a:p>
-            <a:pPr lvl="1"/>
-            <a:r>
-              <a:rPr lang="ro-RO" dirty="0"/>
-              <a:t>Dezavantaj: în loc de o coloană vom avea 3 (=numărul de valori distincte pentru culoare); în plus toate culorile noi vor avea vectorul (0,0,0) care nu apare la antrenament.</a:t>
-            </a:r>
-          </a:p>
-          <a:p>
-            <a:pPr lvl="1"/>
-            <a:r>
-              <a:rPr lang="ro-RO" dirty="0"/>
-              <a:t>Pentru un atribut cu </a:t>
-            </a:r>
-            <a:r>
-              <a:rPr lang="ro-RO" i="1" dirty="0"/>
-              <a:t>n</a:t>
-            </a:r>
-            <a:r>
-              <a:rPr lang="ro-RO" dirty="0"/>
-              <a:t> valori distincte vom construi </a:t>
-            </a:r>
-            <a:r>
-              <a:rPr lang="ro-RO" i="1" dirty="0"/>
-              <a:t>n</a:t>
-            </a:r>
-            <a:r>
-              <a:rPr lang="ro-RO" dirty="0"/>
-              <a:t> coloane</a:t>
-            </a:r>
-          </a:p>
-          <a:p>
-            <a:pPr lvl="1"/>
-            <a:r>
-              <a:rPr lang="en-US" dirty="0"/>
-              <a:t>ATENTIE: </a:t>
-            </a:r>
-            <a:r>
-              <a:rPr lang="ro-RO" dirty="0">
-                <a:highlight>
-                  <a:srgbClr val="FFFF00"/>
-                </a:highlight>
-              </a:rPr>
-              <a:t>Numărul de coloane va crește rapid</a:t>
-            </a:r>
-            <a:r>
-              <a:rPr lang="ro-RO" dirty="0"/>
-              <a:t> dacă sunt prezente mai multe variabile categoriale cu multe valori distincte fiecare</a:t>
-            </a:r>
-          </a:p>
-          <a:p>
-            <a:pPr lvl="1"/>
-            <a:endParaRPr lang="ro-RO" dirty="0"/>
-          </a:p>
-          <a:p>
-            <a:pPr lvl="1"/>
-            <a:endParaRPr lang="en-US" dirty="0"/>
-          </a:p>
-        </p:txBody>
-      </p:sp>
-      <p:graphicFrame>
-        <p:nvGraphicFramePr>
-          <p:cNvPr id="4" name="Table 3">
-            <a:extLst>
-              <a:ext uri="{FF2B5EF4-FFF2-40B4-BE49-F238E27FC236}">
-                <a16:creationId xmlns:a16="http://schemas.microsoft.com/office/drawing/2014/main" id="{E50E58F9-F145-7C1A-6678-A63DC4CC2D72}"/>
-              </a:ext>
-            </a:extLst>
-          </p:cNvPr>
-          <p:cNvGraphicFramePr>
-            <a:graphicFrameLocks noGrp="1"/>
-          </p:cNvGraphicFramePr>
-          <p:nvPr>
-            <p:extLst>
-              <p:ext uri="{D42A27DB-BD31-4B8C-83A1-F6EECF244321}">
-                <p14:modId xmlns:p14="http://schemas.microsoft.com/office/powerpoint/2010/main" val="1316744760"/>
-              </p:ext>
-            </p:extLst>
-          </p:nvPr>
-        </p:nvGraphicFramePr>
-        <p:xfrm>
-          <a:off x="1528091" y="1861081"/>
-          <a:ext cx="1233520" cy="1005840"/>
-        </p:xfrm>
-        <a:graphic>
-          <a:graphicData uri="http://schemas.openxmlformats.org/drawingml/2006/table">
-            <a:tbl>
-              <a:tblPr firstRow="1" bandRow="1">
-                <a:tableStyleId>{19765D9A-5B29-4FE0-BD4B-011D1141B641}</a:tableStyleId>
-              </a:tblPr>
-              <a:tblGrid>
-                <a:gridCol w="1233520">
-                  <a:extLst>
-                    <a:ext uri="{9D8B030D-6E8A-4147-A177-3AD203B41FA5}">
-                      <a16:colId xmlns:a16="http://schemas.microsoft.com/office/drawing/2014/main" val="1735651405"/>
-                    </a:ext>
-                  </a:extLst>
-                </a:gridCol>
-              </a:tblGrid>
-              <a:tr h="177436">
-                <a:tc>
-                  <a:txBody>
-                    <a:bodyPr/>
-                    <a:lstStyle/>
-                    <a:p>
-                      <a:r>
-                        <a:rPr lang="ro-RO" sz="1050" dirty="0"/>
-                        <a:t>Culoare mașină</a:t>
-                      </a:r>
-                      <a:endParaRPr lang="en-US" sz="1050" dirty="0"/>
-                    </a:p>
-                  </a:txBody>
-                  <a:tcPr/>
-                </a:tc>
-                <a:extLst>
-                  <a:ext uri="{0D108BD9-81ED-4DB2-BD59-A6C34878D82A}">
-                    <a16:rowId xmlns:a16="http://schemas.microsoft.com/office/drawing/2014/main" val="2195888070"/>
-                  </a:ext>
-                </a:extLst>
-              </a:tr>
-              <a:tr h="177436">
-                <a:tc>
-                  <a:txBody>
-                    <a:bodyPr/>
-                    <a:lstStyle/>
-                    <a:p>
-                      <a:r>
-                        <a:rPr lang="ro-RO" sz="1050" dirty="0"/>
-                        <a:t>Alb</a:t>
-                      </a:r>
-                      <a:endParaRPr lang="en-US" sz="1050" dirty="0"/>
-                    </a:p>
-                  </a:txBody>
-                  <a:tcPr/>
-                </a:tc>
-                <a:extLst>
-                  <a:ext uri="{0D108BD9-81ED-4DB2-BD59-A6C34878D82A}">
-                    <a16:rowId xmlns:a16="http://schemas.microsoft.com/office/drawing/2014/main" val="2958170600"/>
-                  </a:ext>
-                </a:extLst>
-              </a:tr>
-              <a:tr h="177436">
-                <a:tc>
-                  <a:txBody>
-                    <a:bodyPr/>
-                    <a:lstStyle/>
-                    <a:p>
-                      <a:r>
-                        <a:rPr lang="ro-RO" sz="1050" dirty="0"/>
-                        <a:t>Albastru</a:t>
-                      </a:r>
-                      <a:endParaRPr lang="en-US" sz="1050" dirty="0"/>
-                    </a:p>
-                  </a:txBody>
-                  <a:tcPr/>
-                </a:tc>
-                <a:extLst>
-                  <a:ext uri="{0D108BD9-81ED-4DB2-BD59-A6C34878D82A}">
-                    <a16:rowId xmlns:a16="http://schemas.microsoft.com/office/drawing/2014/main" val="1664631160"/>
-                  </a:ext>
-                </a:extLst>
-              </a:tr>
-              <a:tr h="177436">
-                <a:tc>
-                  <a:txBody>
-                    <a:bodyPr/>
-                    <a:lstStyle/>
-                    <a:p>
-                      <a:r>
-                        <a:rPr lang="ro-RO" sz="1050" dirty="0"/>
-                        <a:t>Roșu</a:t>
-                      </a:r>
-                      <a:endParaRPr lang="en-US" sz="1050" dirty="0"/>
-                    </a:p>
-                  </a:txBody>
-                  <a:tcPr/>
-                </a:tc>
-                <a:extLst>
-                  <a:ext uri="{0D108BD9-81ED-4DB2-BD59-A6C34878D82A}">
-                    <a16:rowId xmlns:a16="http://schemas.microsoft.com/office/drawing/2014/main" val="274380783"/>
-                  </a:ext>
-                </a:extLst>
-              </a:tr>
-            </a:tbl>
-          </a:graphicData>
-        </a:graphic>
-      </p:graphicFrame>
-      <p:graphicFrame>
-        <p:nvGraphicFramePr>
-          <p:cNvPr id="5" name="Table 4">
-            <a:extLst>
-              <a:ext uri="{FF2B5EF4-FFF2-40B4-BE49-F238E27FC236}">
-                <a16:creationId xmlns:a16="http://schemas.microsoft.com/office/drawing/2014/main" id="{DD986EFB-C150-DCEC-6606-A4F8D0C1A9D1}"/>
-              </a:ext>
-            </a:extLst>
-          </p:cNvPr>
-          <p:cNvGraphicFramePr>
-            <a:graphicFrameLocks noGrp="1"/>
-          </p:cNvGraphicFramePr>
-          <p:nvPr/>
-        </p:nvGraphicFramePr>
-        <p:xfrm>
-          <a:off x="4399142" y="1846905"/>
-          <a:ext cx="3431559" cy="1005840"/>
-        </p:xfrm>
-        <a:graphic>
-          <a:graphicData uri="http://schemas.openxmlformats.org/drawingml/2006/table">
-            <a:tbl>
-              <a:tblPr firstRow="1" bandRow="1">
-                <a:tableStyleId>{19765D9A-5B29-4FE0-BD4B-011D1141B641}</a:tableStyleId>
-              </a:tblPr>
-              <a:tblGrid>
-                <a:gridCol w="1143852">
-                  <a:extLst>
-                    <a:ext uri="{9D8B030D-6E8A-4147-A177-3AD203B41FA5}">
-                      <a16:colId xmlns:a16="http://schemas.microsoft.com/office/drawing/2014/main" val="1735651405"/>
-                    </a:ext>
-                  </a:extLst>
-                </a:gridCol>
-                <a:gridCol w="1201473">
-                  <a:extLst>
-                    <a:ext uri="{9D8B030D-6E8A-4147-A177-3AD203B41FA5}">
-                      <a16:colId xmlns:a16="http://schemas.microsoft.com/office/drawing/2014/main" val="3592497874"/>
-                    </a:ext>
-                  </a:extLst>
-                </a:gridCol>
-                <a:gridCol w="1086234">
-                  <a:extLst>
-                    <a:ext uri="{9D8B030D-6E8A-4147-A177-3AD203B41FA5}">
-                      <a16:colId xmlns:a16="http://schemas.microsoft.com/office/drawing/2014/main" val="547345336"/>
-                    </a:ext>
-                  </a:extLst>
-                </a:gridCol>
-              </a:tblGrid>
-              <a:tr h="177436">
-                <a:tc>
-                  <a:txBody>
-                    <a:bodyPr/>
-                    <a:lstStyle/>
-                    <a:p>
-                      <a:r>
-                        <a:rPr lang="ro-RO" sz="1050" dirty="0"/>
-                        <a:t>Culoare_Alb</a:t>
-                      </a:r>
-                      <a:endParaRPr lang="en-US" sz="1050" dirty="0"/>
-                    </a:p>
-                  </a:txBody>
-                  <a:tcPr/>
-                </a:tc>
-                <a:tc>
-                  <a:txBody>
-                    <a:bodyPr/>
-                    <a:lstStyle/>
-                    <a:p>
-                      <a:r>
-                        <a:rPr lang="ro-RO" sz="1050" dirty="0"/>
-                        <a:t>Culoare_Abastru</a:t>
-                      </a:r>
-                      <a:endParaRPr lang="en-US" sz="1050" dirty="0"/>
-                    </a:p>
-                  </a:txBody>
-                  <a:tcPr/>
-                </a:tc>
-                <a:tc>
-                  <a:txBody>
-                    <a:bodyPr/>
-                    <a:lstStyle/>
-                    <a:p>
-                      <a:r>
-                        <a:rPr lang="ro-RO" sz="1050" dirty="0"/>
-                        <a:t>Culoare_Roșu</a:t>
-                      </a:r>
-                      <a:endParaRPr lang="en-US" sz="1050" dirty="0"/>
-                    </a:p>
-                  </a:txBody>
-                  <a:tcPr/>
-                </a:tc>
-                <a:extLst>
-                  <a:ext uri="{0D108BD9-81ED-4DB2-BD59-A6C34878D82A}">
-                    <a16:rowId xmlns:a16="http://schemas.microsoft.com/office/drawing/2014/main" val="2195888070"/>
-                  </a:ext>
-                </a:extLst>
-              </a:tr>
-              <a:tr h="177436">
-                <a:tc>
-                  <a:txBody>
-                    <a:bodyPr/>
-                    <a:lstStyle/>
-                    <a:p>
-                      <a:r>
-                        <a:rPr lang="ro-RO" sz="1050" dirty="0"/>
-                        <a:t>1</a:t>
-                      </a:r>
-                      <a:endParaRPr lang="en-US" sz="1050" dirty="0"/>
-                    </a:p>
-                  </a:txBody>
-                  <a:tcPr/>
-                </a:tc>
-                <a:tc>
-                  <a:txBody>
-                    <a:bodyPr/>
-                    <a:lstStyle/>
-                    <a:p>
-                      <a:r>
-                        <a:rPr lang="ro-RO" sz="1050" dirty="0"/>
-                        <a:t>0</a:t>
-                      </a:r>
-                      <a:endParaRPr lang="en-US" sz="1050" dirty="0"/>
-                    </a:p>
-                  </a:txBody>
-                  <a:tcPr/>
-                </a:tc>
-                <a:tc>
-                  <a:txBody>
-                    <a:bodyPr/>
-                    <a:lstStyle/>
-                    <a:p>
-                      <a:r>
-                        <a:rPr lang="ro-RO" sz="1050" dirty="0"/>
-                        <a:t>0</a:t>
-                      </a:r>
-                      <a:endParaRPr lang="en-US" sz="1050" dirty="0"/>
-                    </a:p>
-                  </a:txBody>
-                  <a:tcPr/>
-                </a:tc>
-                <a:extLst>
-                  <a:ext uri="{0D108BD9-81ED-4DB2-BD59-A6C34878D82A}">
-                    <a16:rowId xmlns:a16="http://schemas.microsoft.com/office/drawing/2014/main" val="2958170600"/>
-                  </a:ext>
-                </a:extLst>
-              </a:tr>
-              <a:tr h="177436">
-                <a:tc>
-                  <a:txBody>
-                    <a:bodyPr/>
-                    <a:lstStyle/>
-                    <a:p>
-                      <a:r>
-                        <a:rPr lang="ro-RO" sz="1050" dirty="0"/>
-                        <a:t>0</a:t>
-                      </a:r>
-                      <a:endParaRPr lang="en-US" sz="1050" dirty="0"/>
-                    </a:p>
-                  </a:txBody>
-                  <a:tcPr/>
-                </a:tc>
-                <a:tc>
-                  <a:txBody>
-                    <a:bodyPr/>
-                    <a:lstStyle/>
-                    <a:p>
-                      <a:r>
-                        <a:rPr lang="ro-RO" sz="1050" dirty="0"/>
-                        <a:t>1</a:t>
-                      </a:r>
-                      <a:endParaRPr lang="en-US" sz="1050" dirty="0"/>
-                    </a:p>
-                  </a:txBody>
-                  <a:tcPr/>
-                </a:tc>
-                <a:tc>
-                  <a:txBody>
-                    <a:bodyPr/>
-                    <a:lstStyle/>
-                    <a:p>
-                      <a:r>
-                        <a:rPr lang="ro-RO" sz="1050" dirty="0"/>
-                        <a:t>0</a:t>
-                      </a:r>
-                      <a:endParaRPr lang="en-US" sz="1050" dirty="0"/>
-                    </a:p>
-                  </a:txBody>
-                  <a:tcPr/>
-                </a:tc>
-                <a:extLst>
-                  <a:ext uri="{0D108BD9-81ED-4DB2-BD59-A6C34878D82A}">
-                    <a16:rowId xmlns:a16="http://schemas.microsoft.com/office/drawing/2014/main" val="1664631160"/>
-                  </a:ext>
-                </a:extLst>
-              </a:tr>
-              <a:tr h="177436">
-                <a:tc>
-                  <a:txBody>
-                    <a:bodyPr/>
-                    <a:lstStyle/>
-                    <a:p>
-                      <a:r>
-                        <a:rPr lang="ro-RO" sz="1050" dirty="0"/>
-                        <a:t>0</a:t>
-                      </a:r>
-                      <a:endParaRPr lang="en-US" sz="1050" dirty="0"/>
-                    </a:p>
-                  </a:txBody>
-                  <a:tcPr/>
-                </a:tc>
-                <a:tc>
-                  <a:txBody>
-                    <a:bodyPr/>
-                    <a:lstStyle/>
-                    <a:p>
-                      <a:r>
-                        <a:rPr lang="ro-RO" sz="1050" dirty="0"/>
-                        <a:t>0</a:t>
-                      </a:r>
-                      <a:endParaRPr lang="en-US" sz="1050" dirty="0"/>
-                    </a:p>
-                  </a:txBody>
-                  <a:tcPr/>
-                </a:tc>
-                <a:tc>
-                  <a:txBody>
-                    <a:bodyPr/>
-                    <a:lstStyle/>
-                    <a:p>
-                      <a:r>
-                        <a:rPr lang="ro-RO" sz="1050" dirty="0"/>
-                        <a:t>1</a:t>
-                      </a:r>
-                      <a:endParaRPr lang="en-US" sz="1050" dirty="0"/>
-                    </a:p>
-                  </a:txBody>
-                  <a:tcPr/>
-                </a:tc>
-                <a:extLst>
-                  <a:ext uri="{0D108BD9-81ED-4DB2-BD59-A6C34878D82A}">
-                    <a16:rowId xmlns:a16="http://schemas.microsoft.com/office/drawing/2014/main" val="274380783"/>
-                  </a:ext>
-                </a:extLst>
-              </a:tr>
-            </a:tbl>
-          </a:graphicData>
-        </a:graphic>
-      </p:graphicFrame>
-      <p:cxnSp>
-        <p:nvCxnSpPr>
-          <p:cNvPr id="11" name="Straight Arrow Connector 10">
-            <a:extLst>
-              <a:ext uri="{FF2B5EF4-FFF2-40B4-BE49-F238E27FC236}">
-                <a16:creationId xmlns:a16="http://schemas.microsoft.com/office/drawing/2014/main" id="{9B4FBF5F-DA95-5BC3-D3F6-CFF1A1F1DBED}"/>
-              </a:ext>
-            </a:extLst>
-          </p:cNvPr>
-          <p:cNvCxnSpPr/>
-          <p:nvPr/>
-        </p:nvCxnSpPr>
-        <p:spPr>
-          <a:xfrm>
-            <a:off x="2927307" y="2349825"/>
-            <a:ext cx="1288752" cy="0"/>
-          </a:xfrm>
-          <a:prstGeom prst="straightConnector1">
-            <a:avLst/>
-          </a:prstGeom>
-          <a:ln>
-            <a:tailEnd type="triangle"/>
-          </a:ln>
-        </p:spPr>
-        <p:style>
-          <a:lnRef idx="1">
-            <a:schemeClr val="accent1"/>
-          </a:lnRef>
-          <a:fillRef idx="0">
-            <a:schemeClr val="accent1"/>
-          </a:fillRef>
-          <a:effectRef idx="0">
-            <a:schemeClr val="accent1"/>
-          </a:effectRef>
-          <a:fontRef idx="minor">
-            <a:schemeClr val="tx1"/>
-          </a:fontRef>
-        </p:style>
-      </p:cxnSp>
-    </p:spTree>
-    <p:extLst>
-      <p:ext uri="{BB962C8B-B14F-4D97-AF65-F5344CB8AC3E}">
-        <p14:creationId xmlns:p14="http://schemas.microsoft.com/office/powerpoint/2010/main" val="1980379935"/>
-      </p:ext>
-    </p:extLst>
-  </p:cSld>
-  <p:clrMapOvr>
-    <a:masterClrMapping/>
-  </p:clrMapOvr>
-</p:sld>
-</file>
-
-<file path=ppt/slides/slide17.xml><?xml version="1.0" encoding="utf-8"?>
-<p:sld xmlns:a="http://schemas.openxmlformats.org/drawingml/2006/main" xmlns:r="http://schemas.openxmlformats.org/officeDocument/2006/relationships" xmlns:p="http://schemas.openxmlformats.org/presentationml/2006/main">
-  <p:cSld>
-    <p:spTree>
-      <p:nvGrpSpPr>
-        <p:cNvPr id="1" name=""/>
-        <p:cNvGrpSpPr/>
-        <p:nvPr/>
-      </p:nvGrpSpPr>
-      <p:grpSpPr>
-        <a:xfrm>
-          <a:off x="0" y="0"/>
-          <a:ext cx="0" cy="0"/>
-          <a:chOff x="0" y="0"/>
-          <a:chExt cx="0" cy="0"/>
-        </a:xfrm>
-      </p:grpSpPr>
-      <p:sp>
-        <p:nvSpPr>
-          <p:cNvPr id="2" name="Title 1">
-            <a:extLst>
-              <a:ext uri="{FF2B5EF4-FFF2-40B4-BE49-F238E27FC236}">
-                <a16:creationId xmlns:a16="http://schemas.microsoft.com/office/drawing/2014/main" id="{4953CC1A-823B-F644-300D-4CC0E45F0F6E}"/>
-              </a:ext>
-            </a:extLst>
-          </p:cNvPr>
-          <p:cNvSpPr>
-            <a:spLocks noGrp="1"/>
-          </p:cNvSpPr>
-          <p:nvPr>
-            <p:ph type="title"/>
-          </p:nvPr>
-        </p:nvSpPr>
-        <p:spPr/>
-        <p:txBody>
-          <a:bodyPr/>
-          <a:lstStyle/>
-          <a:p>
-            <a:r>
-              <a:rPr lang="ro-RO" dirty="0"/>
-              <a:t>Normalizare, standardizare (</a:t>
-            </a:r>
-            <a:r>
-              <a:rPr lang="ro-RO" dirty="0">
-                <a:hlinkClick r:id="rId2"/>
-              </a:rPr>
-              <a:t>ref</a:t>
-            </a:r>
-            <a:r>
-              <a:rPr lang="ro-RO" dirty="0"/>
-              <a:t>)</a:t>
-            </a:r>
-          </a:p>
-        </p:txBody>
-      </p:sp>
-      <p:sp>
-        <p:nvSpPr>
-          <p:cNvPr id="3" name="Content Placeholder 2">
-            <a:extLst>
-              <a:ext uri="{FF2B5EF4-FFF2-40B4-BE49-F238E27FC236}">
-                <a16:creationId xmlns:a16="http://schemas.microsoft.com/office/drawing/2014/main" id="{BE040A14-ABCB-6E15-1DC9-3CAD1FFDEFCB}"/>
-              </a:ext>
-            </a:extLst>
-          </p:cNvPr>
-          <p:cNvSpPr>
-            <a:spLocks noGrp="1"/>
-          </p:cNvSpPr>
-          <p:nvPr>
-            <p:ph idx="1"/>
-          </p:nvPr>
-        </p:nvSpPr>
-        <p:spPr/>
-        <p:txBody>
-          <a:bodyPr>
-            <a:normAutofit/>
-          </a:bodyPr>
-          <a:lstStyle/>
-          <a:p>
-            <a:r>
-              <a:rPr lang="ro-RO" dirty="0"/>
-              <a:t>Pentru modelele bazate pe distanță, standardizarea este efectuată pentru a preveni caracteristicile cu intervale mai largi să domine metrica distanței. </a:t>
-            </a:r>
-          </a:p>
-          <a:p>
-            <a:endParaRPr lang="ro-RO" dirty="0"/>
-          </a:p>
-        </p:txBody>
-      </p:sp>
-      <p:pic>
-        <p:nvPicPr>
-          <p:cNvPr id="1026" name="Picture 2" descr="No alt text provided for this image">
-            <a:extLst>
-              <a:ext uri="{FF2B5EF4-FFF2-40B4-BE49-F238E27FC236}">
-                <a16:creationId xmlns:a16="http://schemas.microsoft.com/office/drawing/2014/main" id="{13145C57-6443-F23C-BA72-152D8332CA7C}"/>
-              </a:ext>
-            </a:extLst>
-          </p:cNvPr>
-          <p:cNvPicPr>
-            <a:picLocks noChangeAspect="1" noChangeArrowheads="1"/>
-          </p:cNvPicPr>
-          <p:nvPr/>
-        </p:nvPicPr>
-        <p:blipFill>
-          <a:blip r:embed="rId3">
-            <a:extLst>
-              <a:ext uri="{28A0092B-C50C-407E-A947-70E740481C1C}">
-                <a14:useLocalDpi xmlns:a14="http://schemas.microsoft.com/office/drawing/2010/main" val="0"/>
-              </a:ext>
-            </a:extLst>
-          </a:blip>
-          <a:srcRect/>
-          <a:stretch>
-            <a:fillRect/>
-          </a:stretch>
-        </p:blipFill>
-        <p:spPr bwMode="auto">
-          <a:xfrm>
-            <a:off x="628650" y="2267903"/>
-            <a:ext cx="3524250" cy="2820583"/>
-          </a:xfrm>
-          <a:prstGeom prst="rect">
-            <a:avLst/>
-          </a:prstGeom>
-          <a:noFill/>
-          <a:extLst>
-            <a:ext uri="{909E8E84-426E-40DD-AFC4-6F175D3DCCD1}">
-              <a14:hiddenFill xmlns:a14="http://schemas.microsoft.com/office/drawing/2010/main">
-                <a:solidFill>
-                  <a:srgbClr val="FFFFFF"/>
-                </a:solidFill>
-              </a14:hiddenFill>
-            </a:ext>
-          </a:extLst>
-        </p:spPr>
-      </p:pic>
-      <p:pic>
-        <p:nvPicPr>
-          <p:cNvPr id="1028" name="Picture 4" descr="No alt text provided for this image">
-            <a:extLst>
-              <a:ext uri="{FF2B5EF4-FFF2-40B4-BE49-F238E27FC236}">
-                <a16:creationId xmlns:a16="http://schemas.microsoft.com/office/drawing/2014/main" id="{5EF7B96F-B9C1-4A46-EC0A-DCB4FF4534C0}"/>
-              </a:ext>
-            </a:extLst>
-          </p:cNvPr>
-          <p:cNvPicPr>
-            <a:picLocks noChangeAspect="1" noChangeArrowheads="1"/>
-          </p:cNvPicPr>
-          <p:nvPr/>
-        </p:nvPicPr>
-        <p:blipFill>
-          <a:blip r:embed="rId4">
-            <a:extLst>
-              <a:ext uri="{28A0092B-C50C-407E-A947-70E740481C1C}">
-                <a14:useLocalDpi xmlns:a14="http://schemas.microsoft.com/office/drawing/2010/main" val="0"/>
-              </a:ext>
-            </a:extLst>
-          </a:blip>
-          <a:srcRect/>
-          <a:stretch>
-            <a:fillRect/>
-          </a:stretch>
-        </p:blipFill>
-        <p:spPr bwMode="auto">
-          <a:xfrm>
-            <a:off x="4027170" y="2113004"/>
-            <a:ext cx="3465420" cy="2975481"/>
-          </a:xfrm>
-          <a:prstGeom prst="rect">
-            <a:avLst/>
-          </a:prstGeom>
-          <a:noFill/>
-          <a:extLst>
-            <a:ext uri="{909E8E84-426E-40DD-AFC4-6F175D3DCCD1}">
-              <a14:hiddenFill xmlns:a14="http://schemas.microsoft.com/office/drawing/2010/main">
-                <a:solidFill>
-                  <a:srgbClr val="FFFFFF"/>
-                </a:solidFill>
-              </a14:hiddenFill>
-            </a:ext>
-          </a:extLst>
-        </p:spPr>
-      </p:pic>
-    </p:spTree>
-    <p:extLst>
-      <p:ext uri="{BB962C8B-B14F-4D97-AF65-F5344CB8AC3E}">
-        <p14:creationId xmlns:p14="http://schemas.microsoft.com/office/powerpoint/2010/main" val="2733477099"/>
-      </p:ext>
-    </p:extLst>
-  </p:cSld>
-  <p:clrMapOvr>
-    <a:masterClrMapping/>
-  </p:clrMapOvr>
-</p:sld>
-</file>
-
-<file path=ppt/slides/slide18.xml><?xml version="1.0" encoding="utf-8"?>
-<p:sld xmlns:a="http://schemas.openxmlformats.org/drawingml/2006/main" xmlns:r="http://schemas.openxmlformats.org/officeDocument/2006/relationships" xmlns:p="http://schemas.openxmlformats.org/presentationml/2006/main">
-  <p:cSld>
-    <p:spTree>
-      <p:nvGrpSpPr>
-        <p:cNvPr id="1" name=""/>
-        <p:cNvGrpSpPr/>
-        <p:nvPr/>
-      </p:nvGrpSpPr>
-      <p:grpSpPr>
-        <a:xfrm>
-          <a:off x="0" y="0"/>
-          <a:ext cx="0" cy="0"/>
-          <a:chOff x="0" y="0"/>
-          <a:chExt cx="0" cy="0"/>
-        </a:xfrm>
-      </p:grpSpPr>
-      <p:sp>
-        <p:nvSpPr>
-          <p:cNvPr id="2" name="Title 1">
-            <a:extLst>
-              <a:ext uri="{FF2B5EF4-FFF2-40B4-BE49-F238E27FC236}">
-                <a16:creationId xmlns:a16="http://schemas.microsoft.com/office/drawing/2014/main" id="{4953CC1A-823B-F644-300D-4CC0E45F0F6E}"/>
-              </a:ext>
-            </a:extLst>
-          </p:cNvPr>
-          <p:cNvSpPr>
-            <a:spLocks noGrp="1"/>
-          </p:cNvSpPr>
-          <p:nvPr>
-            <p:ph type="title"/>
-          </p:nvPr>
-        </p:nvSpPr>
-        <p:spPr/>
-        <p:txBody>
-          <a:bodyPr/>
-          <a:lstStyle/>
-          <a:p>
-            <a:r>
-              <a:rPr lang="ro-RO" dirty="0"/>
-              <a:t>Normalizare, standardizare</a:t>
-            </a:r>
-          </a:p>
-        </p:txBody>
-      </p:sp>
-      <p:sp>
-        <p:nvSpPr>
-          <p:cNvPr id="3" name="Content Placeholder 2">
-            <a:extLst>
-              <a:ext uri="{FF2B5EF4-FFF2-40B4-BE49-F238E27FC236}">
-                <a16:creationId xmlns:a16="http://schemas.microsoft.com/office/drawing/2014/main" id="{BE040A14-ABCB-6E15-1DC9-3CAD1FFDEFCB}"/>
-              </a:ext>
-            </a:extLst>
-          </p:cNvPr>
-          <p:cNvSpPr>
-            <a:spLocks noGrp="1"/>
-          </p:cNvSpPr>
-          <p:nvPr>
-            <p:ph idx="1"/>
-          </p:nvPr>
-        </p:nvSpPr>
-        <p:spPr/>
-        <p:txBody>
-          <a:bodyPr>
-            <a:normAutofit/>
-          </a:bodyPr>
-          <a:lstStyle/>
-          <a:p>
-            <a:r>
-              <a:rPr lang="ro-RO" dirty="0"/>
-              <a:t>Metode de a comasa atributele numerice pe aceeiași scală pentru  a putea măsura mai bine importanța lor, ca în cazul </a:t>
-            </a:r>
-            <a:r>
-              <a:rPr lang="en-US" dirty="0"/>
-              <a:t>PCA, </a:t>
-            </a:r>
-            <a:r>
-              <a:rPr lang="en-US" dirty="0" err="1"/>
-              <a:t>sau</a:t>
-            </a:r>
-            <a:r>
-              <a:rPr lang="en-US" dirty="0"/>
-              <a:t> al </a:t>
-            </a:r>
-            <a:r>
-              <a:rPr lang="ro-RO" dirty="0"/>
-              <a:t>regresiei statistice.</a:t>
-            </a:r>
-          </a:p>
-          <a:p>
-            <a:endParaRPr lang="ro-RO" dirty="0"/>
-          </a:p>
-          <a:p>
-            <a:endParaRPr lang="ro-RO" dirty="0"/>
-          </a:p>
-          <a:p>
-            <a:endParaRPr lang="ro-RO" dirty="0"/>
-          </a:p>
-        </p:txBody>
-      </p:sp>
-      <p:pic>
-        <p:nvPicPr>
-          <p:cNvPr id="2050" name="Picture 2" descr="No alt text provided for this image">
-            <a:extLst>
-              <a:ext uri="{FF2B5EF4-FFF2-40B4-BE49-F238E27FC236}">
-                <a16:creationId xmlns:a16="http://schemas.microsoft.com/office/drawing/2014/main" id="{17A33EA8-C4C7-210C-5A99-B458C368ADA5}"/>
-              </a:ext>
-            </a:extLst>
-          </p:cNvPr>
-          <p:cNvPicPr>
-            <a:picLocks noChangeAspect="1" noChangeArrowheads="1"/>
-          </p:cNvPicPr>
-          <p:nvPr/>
-        </p:nvPicPr>
-        <p:blipFill>
-          <a:blip r:embed="rId2">
-            <a:extLst>
-              <a:ext uri="{28A0092B-C50C-407E-A947-70E740481C1C}">
-                <a14:useLocalDpi xmlns:a14="http://schemas.microsoft.com/office/drawing/2010/main" val="0"/>
-              </a:ext>
-            </a:extLst>
-          </a:blip>
-          <a:srcRect/>
-          <a:stretch>
-            <a:fillRect/>
-          </a:stretch>
-        </p:blipFill>
-        <p:spPr bwMode="auto">
-          <a:xfrm>
-            <a:off x="822960" y="2274911"/>
-            <a:ext cx="6530340" cy="2740411"/>
-          </a:xfrm>
-          <a:prstGeom prst="rect">
-            <a:avLst/>
-          </a:prstGeom>
-          <a:noFill/>
-          <a:extLst>
-            <a:ext uri="{909E8E84-426E-40DD-AFC4-6F175D3DCCD1}">
-              <a14:hiddenFill xmlns:a14="http://schemas.microsoft.com/office/drawing/2010/main">
-                <a:solidFill>
-                  <a:srgbClr val="FFFFFF"/>
-                </a:solidFill>
-              </a14:hiddenFill>
-            </a:ext>
-          </a:extLst>
-        </p:spPr>
-      </p:pic>
-    </p:spTree>
-    <p:extLst>
-      <p:ext uri="{BB962C8B-B14F-4D97-AF65-F5344CB8AC3E}">
-        <p14:creationId xmlns:p14="http://schemas.microsoft.com/office/powerpoint/2010/main" val="1066855423"/>
-      </p:ext>
-    </p:extLst>
-  </p:cSld>
-  <p:clrMapOvr>
-    <a:masterClrMapping/>
-  </p:clrMapOvr>
-</p:sld>
-</file>
-
-<file path=ppt/slides/slide19.xml><?xml version="1.0" encoding="utf-8"?>
-<p:sld xmlns:a="http://schemas.openxmlformats.org/drawingml/2006/main" xmlns:r="http://schemas.openxmlformats.org/officeDocument/2006/relationships" xmlns:p="http://schemas.openxmlformats.org/presentationml/2006/main">
-  <p:cSld>
-    <p:spTree>
-      <p:nvGrpSpPr>
-        <p:cNvPr id="1" name=""/>
-        <p:cNvGrpSpPr/>
-        <p:nvPr/>
-      </p:nvGrpSpPr>
-      <p:grpSpPr>
-        <a:xfrm>
-          <a:off x="0" y="0"/>
-          <a:ext cx="0" cy="0"/>
-          <a:chOff x="0" y="0"/>
-          <a:chExt cx="0" cy="0"/>
-        </a:xfrm>
-      </p:grpSpPr>
-      <p:sp>
-        <p:nvSpPr>
-          <p:cNvPr id="2" name="Title 1">
-            <a:extLst>
-              <a:ext uri="{FF2B5EF4-FFF2-40B4-BE49-F238E27FC236}">
-                <a16:creationId xmlns:a16="http://schemas.microsoft.com/office/drawing/2014/main" id="{4953CC1A-823B-F644-300D-4CC0E45F0F6E}"/>
-              </a:ext>
-            </a:extLst>
-          </p:cNvPr>
-          <p:cNvSpPr>
-            <a:spLocks noGrp="1"/>
-          </p:cNvSpPr>
-          <p:nvPr>
-            <p:ph type="title"/>
-          </p:nvPr>
-        </p:nvSpPr>
-        <p:spPr/>
-        <p:txBody>
-          <a:bodyPr/>
-          <a:lstStyle/>
-          <a:p>
-            <a:r>
-              <a:rPr lang="ro-RO" dirty="0"/>
-              <a:t>Normalizare, standardizare</a:t>
-            </a:r>
-          </a:p>
-        </p:txBody>
-      </p:sp>
-      <p:sp>
-        <p:nvSpPr>
-          <p:cNvPr id="3" name="Content Placeholder 2">
-            <a:extLst>
-              <a:ext uri="{FF2B5EF4-FFF2-40B4-BE49-F238E27FC236}">
-                <a16:creationId xmlns:a16="http://schemas.microsoft.com/office/drawing/2014/main" id="{BE040A14-ABCB-6E15-1DC9-3CAD1FFDEFCB}"/>
-              </a:ext>
-            </a:extLst>
-          </p:cNvPr>
-          <p:cNvSpPr>
-            <a:spLocks noGrp="1"/>
-          </p:cNvSpPr>
-          <p:nvPr>
-            <p:ph idx="1"/>
-          </p:nvPr>
-        </p:nvSpPr>
-        <p:spPr/>
-        <p:txBody>
-          <a:bodyPr>
-            <a:normAutofit/>
-          </a:bodyPr>
-          <a:lstStyle/>
-          <a:p>
-            <a:r>
-              <a:rPr lang="ro-RO" dirty="0"/>
-              <a:t>Motivul pentru care standardizăm datele nu este același pentru toate modelele de învățare automată și diferă de la un model la altul.</a:t>
-            </a:r>
-          </a:p>
-          <a:p>
-            <a:endParaRPr lang="ro-RO" dirty="0"/>
-          </a:p>
-        </p:txBody>
-      </p:sp>
-      <p:graphicFrame>
-        <p:nvGraphicFramePr>
-          <p:cNvPr id="6" name="Table 5">
-            <a:extLst>
-              <a:ext uri="{FF2B5EF4-FFF2-40B4-BE49-F238E27FC236}">
-                <a16:creationId xmlns:a16="http://schemas.microsoft.com/office/drawing/2014/main" id="{5ADE8251-5E68-9213-DC89-CC0D9BBCE39E}"/>
-              </a:ext>
-            </a:extLst>
-          </p:cNvPr>
-          <p:cNvGraphicFramePr>
-            <a:graphicFrameLocks noGrp="1"/>
-          </p:cNvGraphicFramePr>
-          <p:nvPr>
-            <p:extLst>
-              <p:ext uri="{D42A27DB-BD31-4B8C-83A1-F6EECF244321}">
-                <p14:modId xmlns:p14="http://schemas.microsoft.com/office/powerpoint/2010/main" val="1088589453"/>
-              </p:ext>
-            </p:extLst>
-          </p:nvPr>
-        </p:nvGraphicFramePr>
-        <p:xfrm>
-          <a:off x="870994" y="2137906"/>
-          <a:ext cx="7402012" cy="2428261"/>
-        </p:xfrm>
-        <a:graphic>
-          <a:graphicData uri="http://schemas.openxmlformats.org/drawingml/2006/table">
-            <a:tbl>
-              <a:tblPr/>
-              <a:tblGrid>
-                <a:gridCol w="1782262">
-                  <a:extLst>
-                    <a:ext uri="{9D8B030D-6E8A-4147-A177-3AD203B41FA5}">
-                      <a16:colId xmlns:a16="http://schemas.microsoft.com/office/drawing/2014/main" val="4215076832"/>
-                    </a:ext>
-                  </a:extLst>
-                </a:gridCol>
-                <a:gridCol w="5619750">
-                  <a:extLst>
-                    <a:ext uri="{9D8B030D-6E8A-4147-A177-3AD203B41FA5}">
-                      <a16:colId xmlns:a16="http://schemas.microsoft.com/office/drawing/2014/main" val="388179475"/>
-                    </a:ext>
-                  </a:extLst>
-                </a:gridCol>
-              </a:tblGrid>
-              <a:tr h="114760">
-                <a:tc>
-                  <a:txBody>
-                    <a:bodyPr/>
-                    <a:lstStyle/>
-                    <a:p>
-                      <a:pPr fontAlgn="b"/>
-                      <a:r>
-                        <a:rPr lang="ro-RO" sz="1050" b="1" dirty="0">
-                          <a:effectLst/>
-                        </a:rPr>
-                        <a:t>Beneficiu</a:t>
-                      </a:r>
-                      <a:endParaRPr lang="en-US" sz="1050" b="1" dirty="0">
-                        <a:effectLst/>
-                      </a:endParaRPr>
-                    </a:p>
-                  </a:txBody>
-                  <a:tcPr marL="44385" marR="44385" marT="22193" marB="22193" anchor="b">
-                    <a:lnL w="6350" cap="flat" cmpd="sng" algn="ctr">
-                      <a:solidFill>
-                        <a:srgbClr val="D9D9E3"/>
-                      </a:solidFill>
-                      <a:prstDash val="solid"/>
-                      <a:round/>
-                      <a:headEnd type="none" w="med" len="med"/>
-                      <a:tailEnd type="none" w="med" len="med"/>
-                    </a:lnL>
-                    <a:lnR w="6350" cap="flat" cmpd="sng" algn="ctr">
-                      <a:solidFill>
-                        <a:srgbClr val="D9D9E3"/>
-                      </a:solidFill>
-                      <a:prstDash val="solid"/>
-                      <a:round/>
-                      <a:headEnd type="none" w="med" len="med"/>
-                      <a:tailEnd type="none" w="med" len="med"/>
-                    </a:lnR>
-                    <a:lnT w="6350" cap="flat" cmpd="sng" algn="ctr">
-                      <a:solidFill>
-                        <a:srgbClr val="D9D9E3"/>
-                      </a:solidFill>
-                      <a:prstDash val="solid"/>
-                      <a:round/>
-                      <a:headEnd type="none" w="med" len="med"/>
-                      <a:tailEnd type="none" w="med" len="med"/>
-                    </a:lnT>
-                    <a:lnB w="12700" cap="flat" cmpd="sng" algn="ctr">
-                      <a:solidFill>
-                        <a:srgbClr val="D9D9E3"/>
-                      </a:solidFill>
-                      <a:prstDash val="solid"/>
-                      <a:round/>
-                      <a:headEnd type="none" w="med" len="med"/>
-                      <a:tailEnd type="none" w="med" len="med"/>
-                    </a:lnB>
-                    <a:solidFill>
-                      <a:srgbClr val="F7F7F8"/>
-                    </a:solidFill>
-                  </a:tcPr>
-                </a:tc>
-                <a:tc>
-                  <a:txBody>
-                    <a:bodyPr/>
-                    <a:lstStyle/>
-                    <a:p>
-                      <a:pPr fontAlgn="b"/>
-                      <a:r>
-                        <a:rPr lang="en-US" sz="1050" b="1">
-                          <a:effectLst/>
-                        </a:rPr>
-                        <a:t>Descriere</a:t>
-                      </a:r>
-                    </a:p>
-                  </a:txBody>
-                  <a:tcPr marL="44385" marR="44385" marT="22193" marB="22193" anchor="b">
-                    <a:lnL w="6350" cap="flat" cmpd="sng" algn="ctr">
-                      <a:solidFill>
-                        <a:srgbClr val="D9D9E3"/>
-                      </a:solidFill>
-                      <a:prstDash val="solid"/>
-                      <a:round/>
-                      <a:headEnd type="none" w="med" len="med"/>
-                      <a:tailEnd type="none" w="med" len="med"/>
-                    </a:lnL>
-                    <a:lnR w="6350" cap="flat" cmpd="sng" algn="ctr">
-                      <a:solidFill>
-                        <a:srgbClr val="D9D9E3"/>
-                      </a:solidFill>
-                      <a:prstDash val="solid"/>
-                      <a:round/>
-                      <a:headEnd type="none" w="med" len="med"/>
-                      <a:tailEnd type="none" w="med" len="med"/>
-                    </a:lnR>
-                    <a:lnT w="6350" cap="flat" cmpd="sng" algn="ctr">
-                      <a:solidFill>
-                        <a:srgbClr val="D9D9E3"/>
-                      </a:solidFill>
-                      <a:prstDash val="solid"/>
-                      <a:round/>
-                      <a:headEnd type="none" w="med" len="med"/>
-                      <a:tailEnd type="none" w="med" len="med"/>
-                    </a:lnT>
-                    <a:lnB w="12700" cap="flat" cmpd="sng" algn="ctr">
-                      <a:solidFill>
-                        <a:srgbClr val="D9D9E3"/>
-                      </a:solidFill>
-                      <a:prstDash val="solid"/>
-                      <a:round/>
-                      <a:headEnd type="none" w="med" len="med"/>
-                      <a:tailEnd type="none" w="med" len="med"/>
-                    </a:lnB>
-                    <a:solidFill>
-                      <a:srgbClr val="F7F7F8"/>
-                    </a:solidFill>
-                  </a:tcPr>
-                </a:tc>
-                <a:extLst>
-                  <a:ext uri="{0D108BD9-81ED-4DB2-BD59-A6C34878D82A}">
-                    <a16:rowId xmlns:a16="http://schemas.microsoft.com/office/drawing/2014/main" val="1869920784"/>
-                  </a:ext>
-                </a:extLst>
-              </a:tr>
-              <a:tr h="476899">
-                <a:tc>
-                  <a:txBody>
-                    <a:bodyPr/>
-                    <a:lstStyle/>
-                    <a:p>
-                      <a:pPr fontAlgn="base"/>
-                      <a:r>
-                        <a:rPr lang="it-IT" sz="1050" b="1" i="1" dirty="0">
-                          <a:effectLst/>
-                        </a:rPr>
-                        <a:t>Compararea și interpretarea mai ușoară</a:t>
-                      </a:r>
-                    </a:p>
-                  </a:txBody>
-                  <a:tcPr marL="44385" marR="44385" marT="22193" marB="22193" anchor="ctr">
-                    <a:lnL w="6350" cap="flat" cmpd="sng" algn="ctr">
-                      <a:solidFill>
-                        <a:srgbClr val="D9D9E3"/>
-                      </a:solidFill>
-                      <a:prstDash val="solid"/>
-                      <a:round/>
-                      <a:headEnd type="none" w="med" len="med"/>
-                      <a:tailEnd type="none" w="med" len="med"/>
-                    </a:lnL>
-                    <a:lnR w="6350" cap="flat" cmpd="sng" algn="ctr">
-                      <a:solidFill>
-                        <a:srgbClr val="D9D9E3"/>
-                      </a:solidFill>
-                      <a:prstDash val="solid"/>
-                      <a:round/>
-                      <a:headEnd type="none" w="med" len="med"/>
-                      <a:tailEnd type="none" w="med" len="med"/>
-                    </a:lnR>
-                    <a:lnT w="12700" cap="flat" cmpd="sng" algn="ctr">
-                      <a:solidFill>
-                        <a:srgbClr val="D9D9E3"/>
-                      </a:solidFill>
-                      <a:prstDash val="solid"/>
-                      <a:round/>
-                      <a:headEnd type="none" w="med" len="med"/>
-                      <a:tailEnd type="none" w="med" len="med"/>
-                    </a:lnT>
-                    <a:lnB w="12700" cap="flat" cmpd="sng" algn="ctr">
-                      <a:solidFill>
-                        <a:srgbClr val="D9D9E3"/>
-                      </a:solidFill>
-                      <a:prstDash val="solid"/>
-                      <a:round/>
-                      <a:headEnd type="none" w="med" len="med"/>
-                      <a:tailEnd type="none" w="med" len="med"/>
-                    </a:lnB>
-                    <a:solidFill>
-                      <a:srgbClr val="F7F7F8"/>
-                    </a:solidFill>
-                  </a:tcPr>
-                </a:tc>
-                <a:tc>
-                  <a:txBody>
-                    <a:bodyPr/>
-                    <a:lstStyle/>
-                    <a:p>
-                      <a:pPr fontAlgn="base"/>
-                      <a:r>
-                        <a:rPr lang="en-US" sz="1050">
-                          <a:effectLst/>
-                        </a:rPr>
-                        <a:t>Standardizarea transformă datele pentru a avea o medie de 0 și o deviație standard de 1, facilitând compararea și interpretarea.</a:t>
-                      </a:r>
-                    </a:p>
-                  </a:txBody>
-                  <a:tcPr marL="44385" marR="44385" marT="22193" marB="22193" anchor="ctr">
-                    <a:lnL w="6350" cap="flat" cmpd="sng" algn="ctr">
-                      <a:solidFill>
-                        <a:srgbClr val="D9D9E3"/>
-                      </a:solidFill>
-                      <a:prstDash val="solid"/>
-                      <a:round/>
-                      <a:headEnd type="none" w="med" len="med"/>
-                      <a:tailEnd type="none" w="med" len="med"/>
-                    </a:lnL>
-                    <a:lnR w="6350" cap="flat" cmpd="sng" algn="ctr">
-                      <a:solidFill>
-                        <a:srgbClr val="D9D9E3"/>
-                      </a:solidFill>
-                      <a:prstDash val="solid"/>
-                      <a:round/>
-                      <a:headEnd type="none" w="med" len="med"/>
-                      <a:tailEnd type="none" w="med" len="med"/>
-                    </a:lnR>
-                    <a:lnT w="12700" cap="flat" cmpd="sng" algn="ctr">
-                      <a:solidFill>
-                        <a:srgbClr val="D9D9E3"/>
-                      </a:solidFill>
-                      <a:prstDash val="solid"/>
-                      <a:round/>
-                      <a:headEnd type="none" w="med" len="med"/>
-                      <a:tailEnd type="none" w="med" len="med"/>
-                    </a:lnT>
-                    <a:lnB w="12700" cap="flat" cmpd="sng" algn="ctr">
-                      <a:solidFill>
-                        <a:srgbClr val="D9D9E3"/>
-                      </a:solidFill>
-                      <a:prstDash val="solid"/>
-                      <a:round/>
-                      <a:headEnd type="none" w="med" len="med"/>
-                      <a:tailEnd type="none" w="med" len="med"/>
-                    </a:lnB>
-                    <a:solidFill>
-                      <a:srgbClr val="F7F7F8"/>
-                    </a:solidFill>
-                  </a:tcPr>
-                </a:tc>
-                <a:extLst>
-                  <a:ext uri="{0D108BD9-81ED-4DB2-BD59-A6C34878D82A}">
-                    <a16:rowId xmlns:a16="http://schemas.microsoft.com/office/drawing/2014/main" val="1019774590"/>
-                  </a:ext>
-                </a:extLst>
-              </a:tr>
-              <a:tr h="476899">
-                <a:tc>
-                  <a:txBody>
-                    <a:bodyPr/>
-                    <a:lstStyle/>
-                    <a:p>
-                      <a:pPr fontAlgn="base"/>
-                      <a:r>
-                        <a:rPr lang="en-US" sz="1050" b="1" i="1">
-                          <a:effectLst/>
-                        </a:rPr>
-                        <a:t>Eliminarea unităților de măsură</a:t>
-                      </a:r>
-                    </a:p>
-                  </a:txBody>
-                  <a:tcPr marL="44385" marR="44385" marT="22193" marB="22193" anchor="ctr">
-                    <a:lnL w="6350" cap="flat" cmpd="sng" algn="ctr">
-                      <a:solidFill>
-                        <a:srgbClr val="D9D9E3"/>
-                      </a:solidFill>
-                      <a:prstDash val="solid"/>
-                      <a:round/>
-                      <a:headEnd type="none" w="med" len="med"/>
-                      <a:tailEnd type="none" w="med" len="med"/>
-                    </a:lnL>
-                    <a:lnR w="6350" cap="flat" cmpd="sng" algn="ctr">
-                      <a:solidFill>
-                        <a:srgbClr val="D9D9E3"/>
-                      </a:solidFill>
-                      <a:prstDash val="solid"/>
-                      <a:round/>
-                      <a:headEnd type="none" w="med" len="med"/>
-                      <a:tailEnd type="none" w="med" len="med"/>
-                    </a:lnR>
-                    <a:lnT w="12700" cap="flat" cmpd="sng" algn="ctr">
-                      <a:solidFill>
-                        <a:srgbClr val="D9D9E3"/>
-                      </a:solidFill>
-                      <a:prstDash val="solid"/>
-                      <a:round/>
-                      <a:headEnd type="none" w="med" len="med"/>
-                      <a:tailEnd type="none" w="med" len="med"/>
-                    </a:lnT>
-                    <a:lnB w="12700" cap="flat" cmpd="sng" algn="ctr">
-                      <a:solidFill>
-                        <a:srgbClr val="D9D9E3"/>
-                      </a:solidFill>
-                      <a:prstDash val="solid"/>
-                      <a:round/>
-                      <a:headEnd type="none" w="med" len="med"/>
-                      <a:tailEnd type="none" w="med" len="med"/>
-                    </a:lnB>
-                    <a:solidFill>
-                      <a:srgbClr val="F7F7F8"/>
-                    </a:solidFill>
-                  </a:tcPr>
-                </a:tc>
-                <a:tc>
-                  <a:txBody>
-                    <a:bodyPr/>
-                    <a:lstStyle/>
-                    <a:p>
-                      <a:pPr fontAlgn="base"/>
-                      <a:r>
-                        <a:rPr lang="en-US" sz="1050" dirty="0" err="1">
-                          <a:effectLst/>
-                        </a:rPr>
-                        <a:t>Standardizarea</a:t>
-                      </a:r>
-                      <a:r>
-                        <a:rPr lang="en-US" sz="1050" dirty="0">
-                          <a:effectLst/>
-                        </a:rPr>
-                        <a:t> </a:t>
-                      </a:r>
-                      <a:r>
-                        <a:rPr lang="en-US" sz="1050" dirty="0" err="1">
-                          <a:effectLst/>
-                        </a:rPr>
-                        <a:t>elimină</a:t>
-                      </a:r>
-                      <a:r>
-                        <a:rPr lang="en-US" sz="1050" dirty="0">
-                          <a:effectLst/>
-                        </a:rPr>
-                        <a:t> </a:t>
-                      </a:r>
-                      <a:r>
-                        <a:rPr lang="en-US" sz="1050" dirty="0" err="1">
-                          <a:effectLst/>
-                        </a:rPr>
-                        <a:t>efectele</a:t>
-                      </a:r>
-                      <a:r>
-                        <a:rPr lang="en-US" sz="1050" dirty="0">
-                          <a:effectLst/>
-                        </a:rPr>
-                        <a:t> </a:t>
-                      </a:r>
-                      <a:r>
-                        <a:rPr lang="en-US" sz="1050" dirty="0" err="1">
-                          <a:effectLst/>
-                        </a:rPr>
-                        <a:t>unităților</a:t>
-                      </a:r>
-                      <a:r>
-                        <a:rPr lang="en-US" sz="1050" dirty="0">
-                          <a:effectLst/>
-                        </a:rPr>
-                        <a:t> de </a:t>
-                      </a:r>
-                      <a:r>
-                        <a:rPr lang="en-US" sz="1050" dirty="0" err="1">
-                          <a:effectLst/>
-                        </a:rPr>
-                        <a:t>măsură</a:t>
-                      </a:r>
-                      <a:r>
-                        <a:rPr lang="en-US" sz="1050" dirty="0">
-                          <a:effectLst/>
-                        </a:rPr>
-                        <a:t> </a:t>
-                      </a:r>
-                      <a:r>
-                        <a:rPr lang="en-US" sz="1050" dirty="0" err="1">
-                          <a:effectLst/>
-                        </a:rPr>
-                        <a:t>și</a:t>
-                      </a:r>
-                      <a:r>
-                        <a:rPr lang="en-US" sz="1050" dirty="0">
-                          <a:effectLst/>
-                        </a:rPr>
-                        <a:t> </a:t>
-                      </a:r>
-                      <a:r>
-                        <a:rPr lang="en-US" sz="1050" dirty="0" err="1">
-                          <a:effectLst/>
-                        </a:rPr>
-                        <a:t>dimensiunile</a:t>
-                      </a:r>
-                      <a:r>
-                        <a:rPr lang="en-US" sz="1050" dirty="0">
-                          <a:effectLst/>
-                        </a:rPr>
-                        <a:t> </a:t>
-                      </a:r>
-                      <a:r>
-                        <a:rPr lang="en-US" sz="1050" dirty="0" err="1">
-                          <a:effectLst/>
-                        </a:rPr>
-                        <a:t>diferite</a:t>
-                      </a:r>
-                      <a:r>
-                        <a:rPr lang="en-US" sz="1050" dirty="0">
-                          <a:effectLst/>
-                        </a:rPr>
-                        <a:t> ale </a:t>
-                      </a:r>
-                      <a:r>
-                        <a:rPr lang="en-US" sz="1050" dirty="0" err="1">
-                          <a:effectLst/>
-                        </a:rPr>
-                        <a:t>caracteristicilor</a:t>
-                      </a:r>
-                      <a:r>
-                        <a:rPr lang="en-US" sz="1050" dirty="0">
-                          <a:effectLst/>
-                        </a:rPr>
-                        <a:t>, </a:t>
-                      </a:r>
-                      <a:r>
-                        <a:rPr lang="en-US" sz="1050" dirty="0" err="1">
-                          <a:effectLst/>
-                        </a:rPr>
-                        <a:t>permitând</a:t>
-                      </a:r>
-                      <a:r>
-                        <a:rPr lang="en-US" sz="1050" dirty="0">
-                          <a:effectLst/>
-                        </a:rPr>
-                        <a:t> </a:t>
-                      </a:r>
-                      <a:r>
-                        <a:rPr lang="en-US" sz="1050" dirty="0" err="1">
-                          <a:effectLst/>
-                        </a:rPr>
-                        <a:t>compararea</a:t>
-                      </a:r>
-                      <a:r>
-                        <a:rPr lang="en-US" sz="1050" dirty="0">
-                          <a:effectLst/>
-                        </a:rPr>
-                        <a:t> </a:t>
-                      </a:r>
-                      <a:r>
-                        <a:rPr lang="en-US" sz="1050" dirty="0" err="1">
-                          <a:effectLst/>
-                        </a:rPr>
-                        <a:t>directă</a:t>
-                      </a:r>
-                      <a:r>
-                        <a:rPr lang="en-US" sz="1050" dirty="0">
-                          <a:effectLst/>
-                        </a:rPr>
-                        <a:t>.</a:t>
-                      </a:r>
-                    </a:p>
-                  </a:txBody>
-                  <a:tcPr marL="44385" marR="44385" marT="22193" marB="22193" anchor="ctr">
-                    <a:lnL w="6350" cap="flat" cmpd="sng" algn="ctr">
-                      <a:solidFill>
-                        <a:srgbClr val="D9D9E3"/>
-                      </a:solidFill>
-                      <a:prstDash val="solid"/>
-                      <a:round/>
-                      <a:headEnd type="none" w="med" len="med"/>
-                      <a:tailEnd type="none" w="med" len="med"/>
-                    </a:lnL>
-                    <a:lnR w="6350" cap="flat" cmpd="sng" algn="ctr">
-                      <a:solidFill>
-                        <a:srgbClr val="D9D9E3"/>
-                      </a:solidFill>
-                      <a:prstDash val="solid"/>
-                      <a:round/>
-                      <a:headEnd type="none" w="med" len="med"/>
-                      <a:tailEnd type="none" w="med" len="med"/>
-                    </a:lnR>
-                    <a:lnT w="12700" cap="flat" cmpd="sng" algn="ctr">
-                      <a:solidFill>
-                        <a:srgbClr val="D9D9E3"/>
-                      </a:solidFill>
-                      <a:prstDash val="solid"/>
-                      <a:round/>
-                      <a:headEnd type="none" w="med" len="med"/>
-                      <a:tailEnd type="none" w="med" len="med"/>
-                    </a:lnT>
-                    <a:lnB w="12700" cap="flat" cmpd="sng" algn="ctr">
-                      <a:solidFill>
-                        <a:srgbClr val="D9D9E3"/>
-                      </a:solidFill>
-                      <a:prstDash val="solid"/>
-                      <a:round/>
-                      <a:headEnd type="none" w="med" len="med"/>
-                      <a:tailEnd type="none" w="med" len="med"/>
-                    </a:lnB>
-                    <a:solidFill>
-                      <a:srgbClr val="F7F7F8"/>
-                    </a:solidFill>
-                  </a:tcPr>
-                </a:tc>
-                <a:extLst>
-                  <a:ext uri="{0D108BD9-81ED-4DB2-BD59-A6C34878D82A}">
-                    <a16:rowId xmlns:a16="http://schemas.microsoft.com/office/drawing/2014/main" val="2352138375"/>
-                  </a:ext>
-                </a:extLst>
-              </a:tr>
-              <a:tr h="541205">
-                <a:tc>
-                  <a:txBody>
-                    <a:bodyPr/>
-                    <a:lstStyle/>
-                    <a:p>
-                      <a:pPr fontAlgn="base"/>
-                      <a:r>
-                        <a:rPr lang="en-US" sz="1050" b="1" i="1">
-                          <a:effectLst/>
-                        </a:rPr>
-                        <a:t>Îmbunătățirea performanței algoritmilor</a:t>
-                      </a:r>
-                    </a:p>
-                  </a:txBody>
-                  <a:tcPr marL="44385" marR="44385" marT="22193" marB="22193" anchor="ctr">
-                    <a:lnL w="6350" cap="flat" cmpd="sng" algn="ctr">
-                      <a:solidFill>
-                        <a:srgbClr val="D9D9E3"/>
-                      </a:solidFill>
-                      <a:prstDash val="solid"/>
-                      <a:round/>
-                      <a:headEnd type="none" w="med" len="med"/>
-                      <a:tailEnd type="none" w="med" len="med"/>
-                    </a:lnL>
-                    <a:lnR w="6350" cap="flat" cmpd="sng" algn="ctr">
-                      <a:solidFill>
-                        <a:srgbClr val="D9D9E3"/>
-                      </a:solidFill>
-                      <a:prstDash val="solid"/>
-                      <a:round/>
-                      <a:headEnd type="none" w="med" len="med"/>
-                      <a:tailEnd type="none" w="med" len="med"/>
-                    </a:lnR>
-                    <a:lnT w="12700" cap="flat" cmpd="sng" algn="ctr">
-                      <a:solidFill>
-                        <a:srgbClr val="D9D9E3"/>
-                      </a:solidFill>
-                      <a:prstDash val="solid"/>
-                      <a:round/>
-                      <a:headEnd type="none" w="med" len="med"/>
-                      <a:tailEnd type="none" w="med" len="med"/>
-                    </a:lnT>
-                    <a:lnB w="12700" cap="flat" cmpd="sng" algn="ctr">
-                      <a:solidFill>
-                        <a:srgbClr val="D9D9E3"/>
-                      </a:solidFill>
-                      <a:prstDash val="solid"/>
-                      <a:round/>
-                      <a:headEnd type="none" w="med" len="med"/>
-                      <a:tailEnd type="none" w="med" len="med"/>
-                    </a:lnB>
-                    <a:solidFill>
-                      <a:srgbClr val="F7F7F8"/>
-                    </a:solidFill>
-                  </a:tcPr>
-                </a:tc>
-                <a:tc>
-                  <a:txBody>
-                    <a:bodyPr/>
-                    <a:lstStyle/>
-                    <a:p>
-                      <a:pPr fontAlgn="base"/>
-                      <a:r>
-                        <a:rPr lang="en-US" sz="1050" dirty="0" err="1">
-                          <a:effectLst/>
-                        </a:rPr>
-                        <a:t>Algoritmii</a:t>
-                      </a:r>
-                      <a:r>
-                        <a:rPr lang="en-US" sz="1050" dirty="0">
-                          <a:effectLst/>
-                        </a:rPr>
-                        <a:t> de </a:t>
-                      </a:r>
-                      <a:r>
-                        <a:rPr lang="en-US" sz="1050" dirty="0" err="1">
-                          <a:effectLst/>
-                        </a:rPr>
-                        <a:t>învățare</a:t>
-                      </a:r>
-                      <a:r>
-                        <a:rPr lang="en-US" sz="1050" dirty="0">
-                          <a:effectLst/>
-                        </a:rPr>
-                        <a:t> </a:t>
-                      </a:r>
-                      <a:r>
-                        <a:rPr lang="en-US" sz="1050" dirty="0" err="1">
-                          <a:effectLst/>
-                        </a:rPr>
-                        <a:t>automată</a:t>
-                      </a:r>
-                      <a:r>
-                        <a:rPr lang="en-US" sz="1050" dirty="0">
-                          <a:effectLst/>
-                        </a:rPr>
-                        <a:t> sunt </a:t>
-                      </a:r>
-                      <a:r>
-                        <a:rPr lang="en-US" sz="1050" dirty="0" err="1">
-                          <a:effectLst/>
-                        </a:rPr>
-                        <a:t>adesea</a:t>
-                      </a:r>
-                      <a:r>
-                        <a:rPr lang="en-US" sz="1050" dirty="0">
-                          <a:effectLst/>
-                        </a:rPr>
-                        <a:t> </a:t>
-                      </a:r>
-                      <a:r>
-                        <a:rPr lang="en-US" sz="1050" dirty="0" err="1">
-                          <a:effectLst/>
-                        </a:rPr>
-                        <a:t>influențați</a:t>
-                      </a:r>
-                      <a:r>
-                        <a:rPr lang="en-US" sz="1050" dirty="0">
-                          <a:effectLst/>
-                        </a:rPr>
-                        <a:t> de </a:t>
-                      </a:r>
-                      <a:r>
-                        <a:rPr lang="en-US" sz="1050" dirty="0" err="1">
-                          <a:effectLst/>
-                        </a:rPr>
-                        <a:t>scala</a:t>
-                      </a:r>
-                      <a:r>
-                        <a:rPr lang="en-US" sz="1050" dirty="0">
-                          <a:effectLst/>
-                        </a:rPr>
-                        <a:t> </a:t>
-                      </a:r>
-                      <a:r>
-                        <a:rPr lang="en-US" sz="1050" dirty="0" err="1">
-                          <a:effectLst/>
-                        </a:rPr>
-                        <a:t>datelor</a:t>
-                      </a:r>
-                      <a:r>
-                        <a:rPr lang="en-US" sz="1050" dirty="0">
-                          <a:effectLst/>
-                        </a:rPr>
-                        <a:t>, </a:t>
-                      </a:r>
-                      <a:r>
-                        <a:rPr lang="en-US" sz="1050" dirty="0" err="1">
-                          <a:effectLst/>
-                        </a:rPr>
-                        <a:t>iar</a:t>
-                      </a:r>
-                      <a:r>
-                        <a:rPr lang="en-US" sz="1050" dirty="0">
-                          <a:effectLst/>
-                        </a:rPr>
-                        <a:t> </a:t>
-                      </a:r>
-                      <a:r>
-                        <a:rPr lang="en-US" sz="1050" dirty="0" err="1">
-                          <a:effectLst/>
-                        </a:rPr>
-                        <a:t>standardizarea</a:t>
-                      </a:r>
-                      <a:r>
-                        <a:rPr lang="en-US" sz="1050" dirty="0">
-                          <a:effectLst/>
-                        </a:rPr>
-                        <a:t> </a:t>
-                      </a:r>
-                      <a:r>
-                        <a:rPr lang="en-US" sz="1050" dirty="0" err="1">
-                          <a:effectLst/>
-                        </a:rPr>
-                        <a:t>îmbunătățește</a:t>
-                      </a:r>
-                      <a:r>
-                        <a:rPr lang="en-US" sz="1050" dirty="0">
-                          <a:effectLst/>
-                        </a:rPr>
-                        <a:t> </a:t>
-                      </a:r>
-                      <a:r>
-                        <a:rPr lang="en-US" sz="1050" dirty="0" err="1">
-                          <a:effectLst/>
-                        </a:rPr>
-                        <a:t>performanța</a:t>
-                      </a:r>
-                      <a:r>
-                        <a:rPr lang="en-US" sz="1050" dirty="0">
-                          <a:effectLst/>
-                        </a:rPr>
-                        <a:t> </a:t>
-                      </a:r>
-                      <a:r>
-                        <a:rPr lang="en-US" sz="1050" dirty="0" err="1">
-                          <a:effectLst/>
-                        </a:rPr>
-                        <a:t>și</a:t>
-                      </a:r>
-                      <a:r>
-                        <a:rPr lang="en-US" sz="1050" dirty="0">
-                          <a:effectLst/>
-                        </a:rPr>
-                        <a:t> </a:t>
-                      </a:r>
-                      <a:r>
-                        <a:rPr lang="en-US" sz="1050" dirty="0" err="1">
-                          <a:effectLst/>
-                        </a:rPr>
-                        <a:t>convergența</a:t>
-                      </a:r>
-                      <a:r>
-                        <a:rPr lang="en-US" sz="1050" dirty="0">
-                          <a:effectLst/>
-                        </a:rPr>
-                        <a:t> </a:t>
-                      </a:r>
-                      <a:r>
-                        <a:rPr lang="en-US" sz="1050" dirty="0" err="1">
-                          <a:effectLst/>
-                        </a:rPr>
-                        <a:t>acestora</a:t>
-                      </a:r>
-                      <a:r>
-                        <a:rPr lang="en-US" sz="1050" dirty="0">
-                          <a:effectLst/>
-                        </a:rPr>
-                        <a:t>.</a:t>
-                      </a:r>
-                    </a:p>
-                  </a:txBody>
-                  <a:tcPr marL="44385" marR="44385" marT="22193" marB="22193" anchor="ctr">
-                    <a:lnL w="6350" cap="flat" cmpd="sng" algn="ctr">
-                      <a:solidFill>
-                        <a:srgbClr val="D9D9E3"/>
-                      </a:solidFill>
-                      <a:prstDash val="solid"/>
-                      <a:round/>
-                      <a:headEnd type="none" w="med" len="med"/>
-                      <a:tailEnd type="none" w="med" len="med"/>
-                    </a:lnL>
-                    <a:lnR w="6350" cap="flat" cmpd="sng" algn="ctr">
-                      <a:solidFill>
-                        <a:srgbClr val="D9D9E3"/>
-                      </a:solidFill>
-                      <a:prstDash val="solid"/>
-                      <a:round/>
-                      <a:headEnd type="none" w="med" len="med"/>
-                      <a:tailEnd type="none" w="med" len="med"/>
-                    </a:lnR>
-                    <a:lnT w="12700" cap="flat" cmpd="sng" algn="ctr">
-                      <a:solidFill>
-                        <a:srgbClr val="D9D9E3"/>
-                      </a:solidFill>
-                      <a:prstDash val="solid"/>
-                      <a:round/>
-                      <a:headEnd type="none" w="med" len="med"/>
-                      <a:tailEnd type="none" w="med" len="med"/>
-                    </a:lnT>
-                    <a:lnB w="12700" cap="flat" cmpd="sng" algn="ctr">
-                      <a:solidFill>
-                        <a:srgbClr val="D9D9E3"/>
-                      </a:solidFill>
-                      <a:prstDash val="solid"/>
-                      <a:round/>
-                      <a:headEnd type="none" w="med" len="med"/>
-                      <a:tailEnd type="none" w="med" len="med"/>
-                    </a:lnB>
-                    <a:solidFill>
-                      <a:srgbClr val="F7F7F8"/>
-                    </a:solidFill>
-                  </a:tcPr>
-                </a:tc>
-                <a:extLst>
-                  <a:ext uri="{0D108BD9-81ED-4DB2-BD59-A6C34878D82A}">
-                    <a16:rowId xmlns:a16="http://schemas.microsoft.com/office/drawing/2014/main" val="2515773596"/>
-                  </a:ext>
-                </a:extLst>
-              </a:tr>
-              <a:tr h="348287">
-                <a:tc>
-                  <a:txBody>
-                    <a:bodyPr/>
-                    <a:lstStyle/>
-                    <a:p>
-                      <a:pPr fontAlgn="base"/>
-                      <a:r>
-                        <a:rPr lang="it-IT" sz="1050" b="1" i="1">
-                          <a:effectLst/>
-                        </a:rPr>
-                        <a:t>Reducerea sensibilității la valori extreme</a:t>
-                      </a:r>
-                    </a:p>
-                  </a:txBody>
-                  <a:tcPr marL="44385" marR="44385" marT="22193" marB="22193" anchor="ctr">
-                    <a:lnL w="6350" cap="flat" cmpd="sng" algn="ctr">
-                      <a:solidFill>
-                        <a:srgbClr val="D9D9E3"/>
-                      </a:solidFill>
-                      <a:prstDash val="solid"/>
-                      <a:round/>
-                      <a:headEnd type="none" w="med" len="med"/>
-                      <a:tailEnd type="none" w="med" len="med"/>
-                    </a:lnL>
-                    <a:lnR w="6350" cap="flat" cmpd="sng" algn="ctr">
-                      <a:solidFill>
-                        <a:srgbClr val="D9D9E3"/>
-                      </a:solidFill>
-                      <a:prstDash val="solid"/>
-                      <a:round/>
-                      <a:headEnd type="none" w="med" len="med"/>
-                      <a:tailEnd type="none" w="med" len="med"/>
-                    </a:lnR>
-                    <a:lnT w="12700" cap="flat" cmpd="sng" algn="ctr">
-                      <a:solidFill>
-                        <a:srgbClr val="D9D9E3"/>
-                      </a:solidFill>
-                      <a:prstDash val="solid"/>
-                      <a:round/>
-                      <a:headEnd type="none" w="med" len="med"/>
-                      <a:tailEnd type="none" w="med" len="med"/>
-                    </a:lnT>
-                    <a:lnB w="12700" cap="flat" cmpd="sng" algn="ctr">
-                      <a:solidFill>
-                        <a:srgbClr val="D9D9E3"/>
-                      </a:solidFill>
-                      <a:prstDash val="solid"/>
-                      <a:round/>
-                      <a:headEnd type="none" w="med" len="med"/>
-                      <a:tailEnd type="none" w="med" len="med"/>
-                    </a:lnB>
-                    <a:solidFill>
-                      <a:srgbClr val="F7F7F8"/>
-                    </a:solidFill>
-                  </a:tcPr>
-                </a:tc>
-                <a:tc>
-                  <a:txBody>
-                    <a:bodyPr/>
-                    <a:lstStyle/>
-                    <a:p>
-                      <a:pPr fontAlgn="base"/>
-                      <a:r>
-                        <a:rPr lang="en-US" sz="1050">
-                          <a:effectLst/>
-                        </a:rPr>
-                        <a:t>Standardizarea face datele mai robuste la valori extreme, evitând efectele incorecte ale acestora asupra analizei.</a:t>
-                      </a:r>
-                    </a:p>
-                  </a:txBody>
-                  <a:tcPr marL="44385" marR="44385" marT="22193" marB="22193" anchor="ctr">
-                    <a:lnL w="6350" cap="flat" cmpd="sng" algn="ctr">
-                      <a:solidFill>
-                        <a:srgbClr val="D9D9E3"/>
-                      </a:solidFill>
-                      <a:prstDash val="solid"/>
-                      <a:round/>
-                      <a:headEnd type="none" w="med" len="med"/>
-                      <a:tailEnd type="none" w="med" len="med"/>
-                    </a:lnL>
-                    <a:lnR w="6350" cap="flat" cmpd="sng" algn="ctr">
-                      <a:solidFill>
-                        <a:srgbClr val="D9D9E3"/>
-                      </a:solidFill>
-                      <a:prstDash val="solid"/>
-                      <a:round/>
-                      <a:headEnd type="none" w="med" len="med"/>
-                      <a:tailEnd type="none" w="med" len="med"/>
-                    </a:lnR>
-                    <a:lnT w="12700" cap="flat" cmpd="sng" algn="ctr">
-                      <a:solidFill>
-                        <a:srgbClr val="D9D9E3"/>
-                      </a:solidFill>
-                      <a:prstDash val="solid"/>
-                      <a:round/>
-                      <a:headEnd type="none" w="med" len="med"/>
-                      <a:tailEnd type="none" w="med" len="med"/>
-                    </a:lnT>
-                    <a:lnB w="12700" cap="flat" cmpd="sng" algn="ctr">
-                      <a:solidFill>
-                        <a:srgbClr val="D9D9E3"/>
-                      </a:solidFill>
-                      <a:prstDash val="solid"/>
-                      <a:round/>
-                      <a:headEnd type="none" w="med" len="med"/>
-                      <a:tailEnd type="none" w="med" len="med"/>
-                    </a:lnB>
-                    <a:solidFill>
-                      <a:srgbClr val="F7F7F8"/>
-                    </a:solidFill>
-                  </a:tcPr>
-                </a:tc>
-                <a:extLst>
-                  <a:ext uri="{0D108BD9-81ED-4DB2-BD59-A6C34878D82A}">
-                    <a16:rowId xmlns:a16="http://schemas.microsoft.com/office/drawing/2014/main" val="3486396214"/>
-                  </a:ext>
-                </a:extLst>
-              </a:tr>
-              <a:tr h="348287">
-                <a:tc>
-                  <a:txBody>
-                    <a:bodyPr/>
-                    <a:lstStyle/>
-                    <a:p>
-                      <a:pPr fontAlgn="base"/>
-                      <a:r>
-                        <a:rPr lang="en-US" sz="1050" b="1" i="1" dirty="0" err="1">
-                          <a:effectLst/>
-                        </a:rPr>
-                        <a:t>Simplificarea</a:t>
-                      </a:r>
-                      <a:r>
-                        <a:rPr lang="en-US" sz="1050" b="1" i="1" dirty="0">
-                          <a:effectLst/>
-                        </a:rPr>
-                        <a:t> </a:t>
-                      </a:r>
-                      <a:r>
-                        <a:rPr lang="en-US" sz="1050" b="1" i="1" dirty="0" err="1">
-                          <a:effectLst/>
-                        </a:rPr>
-                        <a:t>interpretării</a:t>
-                      </a:r>
-                      <a:r>
-                        <a:rPr lang="en-US" sz="1050" b="1" i="1" dirty="0">
-                          <a:effectLst/>
-                        </a:rPr>
-                        <a:t> </a:t>
-                      </a:r>
-                      <a:r>
-                        <a:rPr lang="en-US" sz="1050" b="1" i="1" dirty="0" err="1">
-                          <a:effectLst/>
-                        </a:rPr>
-                        <a:t>coeficienților</a:t>
-                      </a:r>
-                      <a:endParaRPr lang="en-US" sz="1050" b="1" i="1" dirty="0">
-                        <a:effectLst/>
-                      </a:endParaRPr>
-                    </a:p>
-                  </a:txBody>
-                  <a:tcPr marL="44385" marR="44385" marT="22193" marB="22193" anchor="ctr">
-                    <a:lnL w="6350" cap="flat" cmpd="sng" algn="ctr">
-                      <a:solidFill>
-                        <a:srgbClr val="D9D9E3"/>
-                      </a:solidFill>
-                      <a:prstDash val="solid"/>
-                      <a:round/>
-                      <a:headEnd type="none" w="med" len="med"/>
-                      <a:tailEnd type="none" w="med" len="med"/>
-                    </a:lnL>
-                    <a:lnR w="6350" cap="flat" cmpd="sng" algn="ctr">
-                      <a:solidFill>
-                        <a:srgbClr val="D9D9E3"/>
-                      </a:solidFill>
-                      <a:prstDash val="solid"/>
-                      <a:round/>
-                      <a:headEnd type="none" w="med" len="med"/>
-                      <a:tailEnd type="none" w="med" len="med"/>
-                    </a:lnR>
-                    <a:lnT w="12700" cap="flat" cmpd="sng" algn="ctr">
-                      <a:solidFill>
-                        <a:srgbClr val="D9D9E3"/>
-                      </a:solidFill>
-                      <a:prstDash val="solid"/>
-                      <a:round/>
-                      <a:headEnd type="none" w="med" len="med"/>
-                      <a:tailEnd type="none" w="med" len="med"/>
-                    </a:lnT>
-                    <a:lnB w="6350" cap="flat" cmpd="sng" algn="ctr">
-                      <a:solidFill>
-                        <a:srgbClr val="D9D9E3"/>
-                      </a:solidFill>
-                      <a:prstDash val="solid"/>
-                      <a:round/>
-                      <a:headEnd type="none" w="med" len="med"/>
-                      <a:tailEnd type="none" w="med" len="med"/>
-                    </a:lnB>
-                    <a:solidFill>
-                      <a:srgbClr val="F7F7F8"/>
-                    </a:solidFill>
-                  </a:tcPr>
-                </a:tc>
-                <a:tc>
-                  <a:txBody>
-                    <a:bodyPr/>
-                    <a:lstStyle/>
-                    <a:p>
-                      <a:pPr fontAlgn="base"/>
-                      <a:r>
-                        <a:rPr lang="it-IT" sz="1050" dirty="0">
-                          <a:effectLst/>
-                        </a:rPr>
-                        <a:t>În modelele statistice, standardizarea facilitează interpretarea coeficienților, care devin mai direct interpretabili.</a:t>
-                      </a:r>
-                    </a:p>
-                  </a:txBody>
-                  <a:tcPr marL="44385" marR="44385" marT="22193" marB="22193" anchor="ctr">
-                    <a:lnL w="6350" cap="flat" cmpd="sng" algn="ctr">
-                      <a:solidFill>
-                        <a:srgbClr val="D9D9E3"/>
-                      </a:solidFill>
-                      <a:prstDash val="solid"/>
-                      <a:round/>
-                      <a:headEnd type="none" w="med" len="med"/>
-                      <a:tailEnd type="none" w="med" len="med"/>
-                    </a:lnL>
-                    <a:lnR w="6350" cap="flat" cmpd="sng" algn="ctr">
-                      <a:solidFill>
-                        <a:srgbClr val="D9D9E3"/>
-                      </a:solidFill>
-                      <a:prstDash val="solid"/>
-                      <a:round/>
-                      <a:headEnd type="none" w="med" len="med"/>
-                      <a:tailEnd type="none" w="med" len="med"/>
-                    </a:lnR>
-                    <a:lnT w="12700" cap="flat" cmpd="sng" algn="ctr">
-                      <a:solidFill>
-                        <a:srgbClr val="D9D9E3"/>
-                      </a:solidFill>
-                      <a:prstDash val="solid"/>
-                      <a:round/>
-                      <a:headEnd type="none" w="med" len="med"/>
-                      <a:tailEnd type="none" w="med" len="med"/>
-                    </a:lnT>
-                    <a:lnB w="6350" cap="flat" cmpd="sng" algn="ctr">
-                      <a:solidFill>
-                        <a:srgbClr val="D9D9E3"/>
-                      </a:solidFill>
-                      <a:prstDash val="solid"/>
-                      <a:round/>
-                      <a:headEnd type="none" w="med" len="med"/>
-                      <a:tailEnd type="none" w="med" len="med"/>
-                    </a:lnB>
-                    <a:solidFill>
-                      <a:srgbClr val="F7F7F8"/>
-                    </a:solidFill>
-                  </a:tcPr>
-                </a:tc>
-                <a:extLst>
-                  <a:ext uri="{0D108BD9-81ED-4DB2-BD59-A6C34878D82A}">
-                    <a16:rowId xmlns:a16="http://schemas.microsoft.com/office/drawing/2014/main" val="3971014328"/>
-                  </a:ext>
-                </a:extLst>
-              </a:tr>
-            </a:tbl>
-          </a:graphicData>
-        </a:graphic>
-      </p:graphicFrame>
-    </p:spTree>
-    <p:extLst>
-      <p:ext uri="{BB962C8B-B14F-4D97-AF65-F5344CB8AC3E}">
-        <p14:creationId xmlns:p14="http://schemas.microsoft.com/office/powerpoint/2010/main" val="2257630536"/>
-      </p:ext>
-    </p:extLst>
-  </p:cSld>
-  <p:clrMapOvr>
-    <a:masterClrMapping/>
-  </p:clrMapOvr>
-</p:sld>
-</file>
-
 <file path=ppt/slides/slide2.xml><?xml version="1.0" encoding="utf-8"?>
 <p:sld xmlns:a="http://schemas.openxmlformats.org/drawingml/2006/main" xmlns:r="http://schemas.openxmlformats.org/officeDocument/2006/relationships" xmlns:p="http://schemas.openxmlformats.org/presentationml/2006/main">
   <p:cSld>
@@ -9853,4083 +7549,6 @@
 </p:sld>
 </file>
 
-<file path=ppt/slides/slide20.xml><?xml version="1.0" encoding="utf-8"?>
-<p:sld xmlns:a="http://schemas.openxmlformats.org/drawingml/2006/main" xmlns:r="http://schemas.openxmlformats.org/officeDocument/2006/relationships" xmlns:p="http://schemas.openxmlformats.org/presentationml/2006/main">
-  <p:cSld>
-    <p:spTree>
-      <p:nvGrpSpPr>
-        <p:cNvPr id="1" name=""/>
-        <p:cNvGrpSpPr/>
-        <p:nvPr/>
-      </p:nvGrpSpPr>
-      <p:grpSpPr>
-        <a:xfrm>
-          <a:off x="0" y="0"/>
-          <a:ext cx="0" cy="0"/>
-          <a:chOff x="0" y="0"/>
-          <a:chExt cx="0" cy="0"/>
-        </a:xfrm>
-      </p:grpSpPr>
-      <p:sp>
-        <p:nvSpPr>
-          <p:cNvPr id="2" name="Title 1">
-            <a:extLst>
-              <a:ext uri="{FF2B5EF4-FFF2-40B4-BE49-F238E27FC236}">
-                <a16:creationId xmlns:a16="http://schemas.microsoft.com/office/drawing/2014/main" id="{4953CC1A-823B-F644-300D-4CC0E45F0F6E}"/>
-              </a:ext>
-            </a:extLst>
-          </p:cNvPr>
-          <p:cNvSpPr>
-            <a:spLocks noGrp="1"/>
-          </p:cNvSpPr>
-          <p:nvPr>
-            <p:ph type="title"/>
-          </p:nvPr>
-        </p:nvSpPr>
-        <p:spPr/>
-        <p:txBody>
-          <a:bodyPr/>
-          <a:lstStyle/>
-          <a:p>
-            <a:r>
-              <a:rPr lang="ro-RO" dirty="0"/>
-              <a:t>Normalizare, standardizare</a:t>
-            </a:r>
-            <a:endParaRPr lang="en-US" dirty="0"/>
-          </a:p>
-        </p:txBody>
-      </p:sp>
-      <p:sp>
-        <p:nvSpPr>
-          <p:cNvPr id="3" name="Content Placeholder 2">
-            <a:extLst>
-              <a:ext uri="{FF2B5EF4-FFF2-40B4-BE49-F238E27FC236}">
-                <a16:creationId xmlns:a16="http://schemas.microsoft.com/office/drawing/2014/main" id="{BE040A14-ABCB-6E15-1DC9-3CAD1FFDEFCB}"/>
-              </a:ext>
-            </a:extLst>
-          </p:cNvPr>
-          <p:cNvSpPr>
-            <a:spLocks noGrp="1"/>
-          </p:cNvSpPr>
-          <p:nvPr>
-            <p:ph idx="1"/>
-          </p:nvPr>
-        </p:nvSpPr>
-        <p:spPr>
-          <a:xfrm>
-            <a:off x="628650" y="1369219"/>
-            <a:ext cx="3080746" cy="3263504"/>
-          </a:xfrm>
-        </p:spPr>
-        <p:txBody>
-          <a:bodyPr>
-            <a:normAutofit/>
-          </a:bodyPr>
-          <a:lstStyle/>
-          <a:p>
-            <a:r>
-              <a:rPr lang="en-US" sz="1600" b="0" i="0" dirty="0" err="1">
-                <a:solidFill>
-                  <a:srgbClr val="374151"/>
-                </a:solidFill>
-                <a:effectLst/>
-                <a:latin typeface="Söhne"/>
-              </a:rPr>
-              <a:t>Aceste</a:t>
-            </a:r>
-            <a:r>
-              <a:rPr lang="en-US" sz="1600" b="0" i="0" dirty="0">
-                <a:solidFill>
-                  <a:srgbClr val="374151"/>
-                </a:solidFill>
-                <a:effectLst/>
-                <a:latin typeface="Söhne"/>
-              </a:rPr>
-              <a:t> </a:t>
-            </a:r>
-            <a:r>
-              <a:rPr lang="en-US" sz="1600" b="0" i="0" dirty="0" err="1">
-                <a:solidFill>
-                  <a:srgbClr val="374151"/>
-                </a:solidFill>
-                <a:effectLst/>
-                <a:latin typeface="Söhne"/>
-              </a:rPr>
-              <a:t>metode</a:t>
-            </a:r>
-            <a:r>
-              <a:rPr lang="en-US" sz="1600" b="0" i="0" dirty="0">
-                <a:solidFill>
-                  <a:srgbClr val="374151"/>
-                </a:solidFill>
-                <a:effectLst/>
-                <a:latin typeface="Söhne"/>
-              </a:rPr>
-              <a:t> de </a:t>
-            </a:r>
-            <a:r>
-              <a:rPr lang="en-US" sz="1600" b="0" i="0" dirty="0" err="1">
-                <a:solidFill>
-                  <a:srgbClr val="374151"/>
-                </a:solidFill>
-                <a:effectLst/>
-                <a:latin typeface="Söhne"/>
-              </a:rPr>
-              <a:t>standardizare</a:t>
-            </a:r>
-            <a:r>
-              <a:rPr lang="en-US" sz="1600" b="0" i="0" dirty="0">
-                <a:solidFill>
-                  <a:srgbClr val="374151"/>
-                </a:solidFill>
-                <a:effectLst/>
-                <a:latin typeface="Söhne"/>
-              </a:rPr>
-              <a:t> pot fi </a:t>
-            </a:r>
-            <a:r>
-              <a:rPr lang="en-US" sz="1600" b="0" i="0" dirty="0" err="1">
-                <a:solidFill>
-                  <a:srgbClr val="374151"/>
-                </a:solidFill>
-                <a:effectLst/>
-                <a:latin typeface="Söhne"/>
-              </a:rPr>
-              <a:t>aplicate</a:t>
-            </a:r>
-            <a:r>
-              <a:rPr lang="en-US" sz="1600" b="0" i="0" dirty="0">
-                <a:solidFill>
-                  <a:srgbClr val="374151"/>
-                </a:solidFill>
-                <a:effectLst/>
-                <a:latin typeface="Söhne"/>
-              </a:rPr>
-              <a:t> </a:t>
-            </a:r>
-            <a:r>
-              <a:rPr lang="en-US" sz="1600" b="0" i="0" dirty="0" err="1">
-                <a:solidFill>
-                  <a:srgbClr val="374151"/>
-                </a:solidFill>
-                <a:effectLst/>
-                <a:latin typeface="Söhne"/>
-              </a:rPr>
-              <a:t>în</a:t>
-            </a:r>
-            <a:r>
-              <a:rPr lang="en-US" sz="1600" b="0" i="0" dirty="0">
-                <a:solidFill>
-                  <a:srgbClr val="374151"/>
-                </a:solidFill>
-                <a:effectLst/>
-                <a:latin typeface="Söhne"/>
-              </a:rPr>
-              <a:t> </a:t>
-            </a:r>
-            <a:r>
-              <a:rPr lang="en-US" sz="1600" b="0" i="0" dirty="0" err="1">
-                <a:solidFill>
-                  <a:srgbClr val="374151"/>
-                </a:solidFill>
-                <a:effectLst/>
-                <a:latin typeface="Söhne"/>
-              </a:rPr>
-              <a:t>funcție</a:t>
-            </a:r>
-            <a:r>
-              <a:rPr lang="en-US" sz="1600" b="0" i="0" dirty="0">
-                <a:solidFill>
-                  <a:srgbClr val="374151"/>
-                </a:solidFill>
-                <a:effectLst/>
-                <a:latin typeface="Söhne"/>
-              </a:rPr>
-              <a:t> de natura </a:t>
-            </a:r>
-            <a:r>
-              <a:rPr lang="en-US" sz="1600" b="0" i="0" dirty="0" err="1">
-                <a:solidFill>
-                  <a:srgbClr val="374151"/>
-                </a:solidFill>
-                <a:effectLst/>
-                <a:latin typeface="Söhne"/>
-              </a:rPr>
-              <a:t>datelor</a:t>
-            </a:r>
-            <a:r>
-              <a:rPr lang="en-US" sz="1600" b="0" i="0" dirty="0">
-                <a:solidFill>
-                  <a:srgbClr val="374151"/>
-                </a:solidFill>
-                <a:effectLst/>
-                <a:latin typeface="Söhne"/>
-              </a:rPr>
-              <a:t>, </a:t>
-            </a:r>
-            <a:r>
-              <a:rPr lang="en-US" sz="1600" b="0" i="0" dirty="0" err="1">
-                <a:solidFill>
-                  <a:srgbClr val="374151"/>
-                </a:solidFill>
-                <a:effectLst/>
-                <a:latin typeface="Söhne"/>
-              </a:rPr>
-              <a:t>cerințele</a:t>
-            </a:r>
-            <a:r>
-              <a:rPr lang="en-US" sz="1600" b="0" i="0" dirty="0">
-                <a:solidFill>
-                  <a:srgbClr val="374151"/>
-                </a:solidFill>
-                <a:effectLst/>
-                <a:latin typeface="Söhne"/>
-              </a:rPr>
-              <a:t> </a:t>
-            </a:r>
-            <a:r>
-              <a:rPr lang="en-US" sz="1600" b="0" i="0" dirty="0" err="1">
-                <a:solidFill>
-                  <a:srgbClr val="374151"/>
-                </a:solidFill>
-                <a:effectLst/>
-                <a:latin typeface="Söhne"/>
-              </a:rPr>
-              <a:t>analizei</a:t>
-            </a:r>
-            <a:r>
-              <a:rPr lang="en-US" sz="1600" b="0" i="0" dirty="0">
-                <a:solidFill>
-                  <a:srgbClr val="374151"/>
-                </a:solidFill>
-                <a:effectLst/>
-                <a:latin typeface="Söhne"/>
-              </a:rPr>
-              <a:t> </a:t>
-            </a:r>
-            <a:r>
-              <a:rPr lang="en-US" sz="1600" b="0" i="0" dirty="0" err="1">
-                <a:solidFill>
-                  <a:srgbClr val="374151"/>
-                </a:solidFill>
-                <a:effectLst/>
-                <a:latin typeface="Söhne"/>
-              </a:rPr>
-              <a:t>și</a:t>
-            </a:r>
-            <a:r>
-              <a:rPr lang="en-US" sz="1600" b="0" i="0" dirty="0">
-                <a:solidFill>
-                  <a:srgbClr val="374151"/>
-                </a:solidFill>
-                <a:effectLst/>
-                <a:latin typeface="Söhne"/>
-              </a:rPr>
-              <a:t> </a:t>
-            </a:r>
-            <a:r>
-              <a:rPr lang="en-US" sz="1600" b="0" i="0" dirty="0" err="1">
-                <a:solidFill>
-                  <a:srgbClr val="374151"/>
-                </a:solidFill>
-                <a:effectLst/>
-                <a:latin typeface="Söhne"/>
-              </a:rPr>
-              <a:t>tipul</a:t>
-            </a:r>
-            <a:r>
-              <a:rPr lang="en-US" sz="1600" b="0" i="0" dirty="0">
-                <a:solidFill>
-                  <a:srgbClr val="374151"/>
-                </a:solidFill>
-                <a:effectLst/>
-                <a:latin typeface="Söhne"/>
-              </a:rPr>
-              <a:t> de </a:t>
-            </a:r>
-            <a:r>
-              <a:rPr lang="en-US" sz="1600" b="0" i="0" dirty="0" err="1">
-                <a:solidFill>
-                  <a:srgbClr val="374151"/>
-                </a:solidFill>
-                <a:effectLst/>
-                <a:latin typeface="Söhne"/>
-              </a:rPr>
-              <a:t>algoritm</a:t>
-            </a:r>
-            <a:r>
-              <a:rPr lang="en-US" sz="1600" b="0" i="0" dirty="0">
-                <a:solidFill>
-                  <a:srgbClr val="374151"/>
-                </a:solidFill>
-                <a:effectLst/>
-                <a:latin typeface="Söhne"/>
-              </a:rPr>
-              <a:t> pe care </a:t>
-            </a:r>
-            <a:r>
-              <a:rPr lang="en-US" sz="1600" b="0" i="0" dirty="0" err="1">
-                <a:solidFill>
-                  <a:srgbClr val="374151"/>
-                </a:solidFill>
-                <a:effectLst/>
-                <a:latin typeface="Söhne"/>
-              </a:rPr>
-              <a:t>intenționați</a:t>
-            </a:r>
-            <a:r>
-              <a:rPr lang="en-US" sz="1600" b="0" i="0" dirty="0">
-                <a:solidFill>
-                  <a:srgbClr val="374151"/>
-                </a:solidFill>
-                <a:effectLst/>
-                <a:latin typeface="Söhne"/>
-              </a:rPr>
-              <a:t> </a:t>
-            </a:r>
-            <a:r>
-              <a:rPr lang="en-US" sz="1600" b="0" i="0" dirty="0" err="1">
-                <a:solidFill>
-                  <a:srgbClr val="374151"/>
-                </a:solidFill>
-                <a:effectLst/>
-                <a:latin typeface="Söhne"/>
-              </a:rPr>
-              <a:t>să</a:t>
-            </a:r>
-            <a:r>
-              <a:rPr lang="en-US" sz="1600" b="0" i="0" dirty="0">
-                <a:solidFill>
-                  <a:srgbClr val="374151"/>
-                </a:solidFill>
-                <a:effectLst/>
-                <a:latin typeface="Söhne"/>
-              </a:rPr>
-              <a:t> </a:t>
-            </a:r>
-            <a:r>
-              <a:rPr lang="en-US" sz="1600" b="0" i="0" dirty="0" err="1">
-                <a:solidFill>
-                  <a:srgbClr val="374151"/>
-                </a:solidFill>
-                <a:effectLst/>
-                <a:latin typeface="Söhne"/>
-              </a:rPr>
-              <a:t>îl</a:t>
-            </a:r>
-            <a:r>
-              <a:rPr lang="en-US" sz="1600" b="0" i="0" dirty="0">
-                <a:solidFill>
-                  <a:srgbClr val="374151"/>
-                </a:solidFill>
-                <a:effectLst/>
-                <a:latin typeface="Söhne"/>
-              </a:rPr>
-              <a:t> </a:t>
-            </a:r>
-            <a:r>
-              <a:rPr lang="en-US" sz="1600" b="0" i="0" dirty="0" err="1">
-                <a:solidFill>
-                  <a:srgbClr val="374151"/>
-                </a:solidFill>
-                <a:effectLst/>
-                <a:latin typeface="Söhne"/>
-              </a:rPr>
-              <a:t>utilizați</a:t>
-            </a:r>
-            <a:r>
-              <a:rPr lang="en-US" sz="1600" b="0" i="0" dirty="0">
-                <a:solidFill>
-                  <a:srgbClr val="374151"/>
-                </a:solidFill>
-                <a:effectLst/>
-                <a:latin typeface="Söhne"/>
-              </a:rPr>
-              <a:t>. </a:t>
-            </a:r>
-            <a:endParaRPr lang="ro-RO" sz="1600" b="0" i="0" dirty="0">
-              <a:solidFill>
-                <a:srgbClr val="374151"/>
-              </a:solidFill>
-              <a:effectLst/>
-              <a:latin typeface="Söhne"/>
-            </a:endParaRPr>
-          </a:p>
-          <a:p>
-            <a:r>
-              <a:rPr lang="en-US" sz="1600" b="0" i="0" dirty="0" err="1">
-                <a:solidFill>
-                  <a:srgbClr val="374151"/>
-                </a:solidFill>
-                <a:effectLst/>
-                <a:latin typeface="Söhne"/>
-              </a:rPr>
-              <a:t>Fiecare</a:t>
-            </a:r>
-            <a:r>
-              <a:rPr lang="en-US" sz="1600" b="0" i="0" dirty="0">
-                <a:solidFill>
-                  <a:srgbClr val="374151"/>
-                </a:solidFill>
-                <a:effectLst/>
-                <a:latin typeface="Söhne"/>
-              </a:rPr>
-              <a:t> </a:t>
-            </a:r>
-            <a:r>
-              <a:rPr lang="en-US" sz="1600" b="0" i="0" dirty="0" err="1">
-                <a:solidFill>
-                  <a:srgbClr val="374151"/>
-                </a:solidFill>
-                <a:effectLst/>
-                <a:latin typeface="Söhne"/>
-              </a:rPr>
-              <a:t>metodă</a:t>
-            </a:r>
-            <a:r>
-              <a:rPr lang="en-US" sz="1600" b="0" i="0" dirty="0">
-                <a:solidFill>
-                  <a:srgbClr val="374151"/>
-                </a:solidFill>
-                <a:effectLst/>
-                <a:latin typeface="Söhne"/>
-              </a:rPr>
-              <a:t> are </a:t>
-            </a:r>
-            <a:r>
-              <a:rPr lang="en-US" sz="1600" b="0" i="0" dirty="0" err="1">
-                <a:solidFill>
-                  <a:srgbClr val="374151"/>
-                </a:solidFill>
-                <a:effectLst/>
-                <a:latin typeface="Söhne"/>
-              </a:rPr>
-              <a:t>avantaje</a:t>
-            </a:r>
-            <a:r>
-              <a:rPr lang="en-US" sz="1600" b="0" i="0" dirty="0">
-                <a:solidFill>
-                  <a:srgbClr val="374151"/>
-                </a:solidFill>
-                <a:effectLst/>
-                <a:latin typeface="Söhne"/>
-              </a:rPr>
-              <a:t> </a:t>
-            </a:r>
-            <a:r>
-              <a:rPr lang="en-US" sz="1600" b="0" i="0" dirty="0" err="1">
-                <a:solidFill>
-                  <a:srgbClr val="374151"/>
-                </a:solidFill>
-                <a:effectLst/>
-                <a:latin typeface="Söhne"/>
-              </a:rPr>
-              <a:t>și</a:t>
-            </a:r>
-            <a:r>
-              <a:rPr lang="en-US" sz="1600" b="0" i="0" dirty="0">
-                <a:solidFill>
-                  <a:srgbClr val="374151"/>
-                </a:solidFill>
-                <a:effectLst/>
-                <a:latin typeface="Söhne"/>
-              </a:rPr>
-              <a:t> </a:t>
-            </a:r>
-            <a:r>
-              <a:rPr lang="en-US" sz="1600" b="0" i="0" dirty="0" err="1">
-                <a:solidFill>
-                  <a:srgbClr val="374151"/>
-                </a:solidFill>
-                <a:effectLst/>
-                <a:latin typeface="Söhne"/>
-              </a:rPr>
-              <a:t>dezavantaje</a:t>
-            </a:r>
-            <a:r>
-              <a:rPr lang="en-US" sz="1600" b="0" i="0" dirty="0">
-                <a:solidFill>
-                  <a:srgbClr val="374151"/>
-                </a:solidFill>
-                <a:effectLst/>
-                <a:latin typeface="Söhne"/>
-              </a:rPr>
-              <a:t> </a:t>
-            </a:r>
-            <a:r>
-              <a:rPr lang="en-US" sz="1600" b="0" i="0" dirty="0" err="1">
-                <a:solidFill>
-                  <a:srgbClr val="374151"/>
-                </a:solidFill>
-                <a:effectLst/>
-                <a:latin typeface="Söhne"/>
-              </a:rPr>
-              <a:t>și</a:t>
-            </a:r>
-            <a:r>
-              <a:rPr lang="en-US" sz="1600" b="0" i="0" dirty="0">
-                <a:solidFill>
-                  <a:srgbClr val="374151"/>
-                </a:solidFill>
-                <a:effectLst/>
-                <a:latin typeface="Söhne"/>
-              </a:rPr>
-              <a:t> </a:t>
-            </a:r>
-            <a:r>
-              <a:rPr lang="en-US" sz="1600" b="0" i="0" dirty="0" err="1">
-                <a:solidFill>
-                  <a:srgbClr val="374151"/>
-                </a:solidFill>
-                <a:effectLst/>
-                <a:latin typeface="Söhne"/>
-              </a:rPr>
-              <a:t>trebuie</a:t>
-            </a:r>
-            <a:r>
-              <a:rPr lang="en-US" sz="1600" b="0" i="0" dirty="0">
-                <a:solidFill>
-                  <a:srgbClr val="374151"/>
-                </a:solidFill>
-                <a:effectLst/>
-                <a:latin typeface="Söhne"/>
-              </a:rPr>
-              <a:t> </a:t>
-            </a:r>
-            <a:r>
-              <a:rPr lang="en-US" sz="1600" b="0" i="0" dirty="0" err="1">
-                <a:solidFill>
-                  <a:srgbClr val="374151"/>
-                </a:solidFill>
-                <a:effectLst/>
-                <a:latin typeface="Söhne"/>
-              </a:rPr>
-              <a:t>aleasă</a:t>
-            </a:r>
-            <a:r>
-              <a:rPr lang="en-US" sz="1600" b="0" i="0" dirty="0">
-                <a:solidFill>
-                  <a:srgbClr val="374151"/>
-                </a:solidFill>
-                <a:effectLst/>
-                <a:latin typeface="Söhne"/>
-              </a:rPr>
-              <a:t> </a:t>
-            </a:r>
-            <a:r>
-              <a:rPr lang="en-US" sz="1600" b="0" i="0" dirty="0" err="1">
-                <a:solidFill>
-                  <a:srgbClr val="374151"/>
-                </a:solidFill>
-                <a:effectLst/>
-                <a:latin typeface="Söhne"/>
-              </a:rPr>
-              <a:t>în</a:t>
-            </a:r>
-            <a:r>
-              <a:rPr lang="en-US" sz="1600" b="0" i="0" dirty="0">
-                <a:solidFill>
-                  <a:srgbClr val="374151"/>
-                </a:solidFill>
-                <a:effectLst/>
-                <a:latin typeface="Söhne"/>
-              </a:rPr>
-              <a:t> </a:t>
-            </a:r>
-            <a:r>
-              <a:rPr lang="en-US" sz="1600" b="0" i="0" dirty="0" err="1">
-                <a:solidFill>
-                  <a:srgbClr val="374151"/>
-                </a:solidFill>
-                <a:effectLst/>
-                <a:latin typeface="Söhne"/>
-              </a:rPr>
-              <a:t>funcție</a:t>
-            </a:r>
-            <a:r>
-              <a:rPr lang="en-US" sz="1600" b="0" i="0" dirty="0">
-                <a:solidFill>
-                  <a:srgbClr val="374151"/>
-                </a:solidFill>
-                <a:effectLst/>
-                <a:latin typeface="Söhne"/>
-              </a:rPr>
-              <a:t> de </a:t>
-            </a:r>
-            <a:r>
-              <a:rPr lang="en-US" sz="1600" b="0" i="0" dirty="0" err="1">
-                <a:solidFill>
-                  <a:srgbClr val="374151"/>
-                </a:solidFill>
-                <a:effectLst/>
-                <a:latin typeface="Söhne"/>
-              </a:rPr>
-              <a:t>contextul</a:t>
-            </a:r>
-            <a:r>
-              <a:rPr lang="en-US" sz="1600" b="0" i="0" dirty="0">
-                <a:solidFill>
-                  <a:srgbClr val="374151"/>
-                </a:solidFill>
-                <a:effectLst/>
-                <a:latin typeface="Söhne"/>
-              </a:rPr>
-              <a:t> specific al </a:t>
-            </a:r>
-            <a:r>
-              <a:rPr lang="en-US" sz="1600" b="0" i="0" dirty="0" err="1">
-                <a:solidFill>
-                  <a:srgbClr val="374151"/>
-                </a:solidFill>
-                <a:effectLst/>
-                <a:latin typeface="Söhne"/>
-              </a:rPr>
-              <a:t>setului</a:t>
-            </a:r>
-            <a:r>
-              <a:rPr lang="en-US" sz="1600" b="0" i="0" dirty="0">
-                <a:solidFill>
-                  <a:srgbClr val="374151"/>
-                </a:solidFill>
-                <a:effectLst/>
-                <a:latin typeface="Söhne"/>
-              </a:rPr>
-              <a:t> de date </a:t>
-            </a:r>
-            <a:r>
-              <a:rPr lang="en-US" sz="1600" b="0" i="0" dirty="0" err="1">
-                <a:solidFill>
-                  <a:srgbClr val="374151"/>
-                </a:solidFill>
-                <a:effectLst/>
-                <a:latin typeface="Söhne"/>
-              </a:rPr>
-              <a:t>și</a:t>
-            </a:r>
-            <a:r>
-              <a:rPr lang="en-US" sz="1600" b="0" i="0" dirty="0">
-                <a:solidFill>
-                  <a:srgbClr val="374151"/>
-                </a:solidFill>
-                <a:effectLst/>
-                <a:latin typeface="Söhne"/>
-              </a:rPr>
-              <a:t> </a:t>
-            </a:r>
-            <a:r>
-              <a:rPr lang="en-US" sz="1600" b="0" i="0" dirty="0" err="1">
-                <a:solidFill>
-                  <a:srgbClr val="374151"/>
-                </a:solidFill>
-                <a:effectLst/>
-                <a:latin typeface="Söhne"/>
-              </a:rPr>
-              <a:t>obiectivele</a:t>
-            </a:r>
-            <a:r>
-              <a:rPr lang="en-US" sz="1600" b="0" i="0" dirty="0">
-                <a:solidFill>
-                  <a:srgbClr val="374151"/>
-                </a:solidFill>
-                <a:effectLst/>
-                <a:latin typeface="Söhne"/>
-              </a:rPr>
-              <a:t> </a:t>
-            </a:r>
-            <a:r>
-              <a:rPr lang="en-US" sz="1600" b="0" i="0" dirty="0" err="1">
-                <a:solidFill>
-                  <a:srgbClr val="374151"/>
-                </a:solidFill>
-                <a:effectLst/>
-                <a:latin typeface="Söhne"/>
-              </a:rPr>
-              <a:t>analizei</a:t>
-            </a:r>
-            <a:r>
-              <a:rPr lang="en-US" sz="1600" b="0" i="0" dirty="0">
-                <a:solidFill>
-                  <a:srgbClr val="374151"/>
-                </a:solidFill>
-                <a:effectLst/>
-                <a:latin typeface="Söhne"/>
-              </a:rPr>
-              <a:t>.</a:t>
-            </a:r>
-            <a:endParaRPr lang="ro-RO" sz="1600" dirty="0"/>
-          </a:p>
-        </p:txBody>
-      </p:sp>
-      <p:graphicFrame>
-        <p:nvGraphicFramePr>
-          <p:cNvPr id="4" name="Table 3">
-            <a:extLst>
-              <a:ext uri="{FF2B5EF4-FFF2-40B4-BE49-F238E27FC236}">
-                <a16:creationId xmlns:a16="http://schemas.microsoft.com/office/drawing/2014/main" id="{AAF92124-6C80-200F-729F-74F9003CEB13}"/>
-              </a:ext>
-            </a:extLst>
-          </p:cNvPr>
-          <p:cNvGraphicFramePr>
-            <a:graphicFrameLocks noGrp="1"/>
-          </p:cNvGraphicFramePr>
-          <p:nvPr/>
-        </p:nvGraphicFramePr>
-        <p:xfrm>
-          <a:off x="3709396" y="1027587"/>
-          <a:ext cx="5219812" cy="3636575"/>
-        </p:xfrm>
-        <a:graphic>
-          <a:graphicData uri="http://schemas.openxmlformats.org/drawingml/2006/table">
-            <a:tbl>
-              <a:tblPr/>
-              <a:tblGrid>
-                <a:gridCol w="1948838">
-                  <a:extLst>
-                    <a:ext uri="{9D8B030D-6E8A-4147-A177-3AD203B41FA5}">
-                      <a16:colId xmlns:a16="http://schemas.microsoft.com/office/drawing/2014/main" val="604617427"/>
-                    </a:ext>
-                  </a:extLst>
-                </a:gridCol>
-                <a:gridCol w="3270974">
-                  <a:extLst>
-                    <a:ext uri="{9D8B030D-6E8A-4147-A177-3AD203B41FA5}">
-                      <a16:colId xmlns:a16="http://schemas.microsoft.com/office/drawing/2014/main" val="2334129162"/>
-                    </a:ext>
-                  </a:extLst>
-                </a:gridCol>
-              </a:tblGrid>
-              <a:tr h="189369">
-                <a:tc>
-                  <a:txBody>
-                    <a:bodyPr/>
-                    <a:lstStyle/>
-                    <a:p>
-                      <a:pPr fontAlgn="b"/>
-                      <a:r>
-                        <a:rPr lang="en-US" sz="1050" b="1">
-                          <a:effectLst/>
-                        </a:rPr>
-                        <a:t>Metoda de Standardizare</a:t>
-                      </a:r>
-                    </a:p>
-                  </a:txBody>
-                  <a:tcPr marL="38044" marR="38044" marT="19022" marB="19022" anchor="b">
-                    <a:lnL w="6350" cap="flat" cmpd="sng" algn="ctr">
-                      <a:solidFill>
-                        <a:srgbClr val="D9D9E3"/>
-                      </a:solidFill>
-                      <a:prstDash val="solid"/>
-                      <a:round/>
-                      <a:headEnd type="none" w="med" len="med"/>
-                      <a:tailEnd type="none" w="med" len="med"/>
-                    </a:lnL>
-                    <a:lnR w="6350" cap="flat" cmpd="sng" algn="ctr">
-                      <a:solidFill>
-                        <a:srgbClr val="D9D9E3"/>
-                      </a:solidFill>
-                      <a:prstDash val="solid"/>
-                      <a:round/>
-                      <a:headEnd type="none" w="med" len="med"/>
-                      <a:tailEnd type="none" w="med" len="med"/>
-                    </a:lnR>
-                    <a:lnT w="6350" cap="flat" cmpd="sng" algn="ctr">
-                      <a:solidFill>
-                        <a:srgbClr val="D9D9E3"/>
-                      </a:solidFill>
-                      <a:prstDash val="solid"/>
-                      <a:round/>
-                      <a:headEnd type="none" w="med" len="med"/>
-                      <a:tailEnd type="none" w="med" len="med"/>
-                    </a:lnT>
-                    <a:lnB w="12700" cap="flat" cmpd="sng" algn="ctr">
-                      <a:solidFill>
-                        <a:srgbClr val="D9D9E3"/>
-                      </a:solidFill>
-                      <a:prstDash val="solid"/>
-                      <a:round/>
-                      <a:headEnd type="none" w="med" len="med"/>
-                      <a:tailEnd type="none" w="med" len="med"/>
-                    </a:lnB>
-                    <a:solidFill>
-                      <a:srgbClr val="F7F7F8"/>
-                    </a:solidFill>
-                  </a:tcPr>
-                </a:tc>
-                <a:tc>
-                  <a:txBody>
-                    <a:bodyPr/>
-                    <a:lstStyle/>
-                    <a:p>
-                      <a:pPr fontAlgn="b"/>
-                      <a:r>
-                        <a:rPr lang="en-US" sz="1050" b="1">
-                          <a:effectLst/>
-                        </a:rPr>
-                        <a:t>Descriere</a:t>
-                      </a:r>
-                    </a:p>
-                  </a:txBody>
-                  <a:tcPr marL="38044" marR="38044" marT="19022" marB="19022" anchor="b">
-                    <a:lnL w="6350" cap="flat" cmpd="sng" algn="ctr">
-                      <a:solidFill>
-                        <a:srgbClr val="D9D9E3"/>
-                      </a:solidFill>
-                      <a:prstDash val="solid"/>
-                      <a:round/>
-                      <a:headEnd type="none" w="med" len="med"/>
-                      <a:tailEnd type="none" w="med" len="med"/>
-                    </a:lnL>
-                    <a:lnR w="6350" cap="flat" cmpd="sng" algn="ctr">
-                      <a:solidFill>
-                        <a:srgbClr val="D9D9E3"/>
-                      </a:solidFill>
-                      <a:prstDash val="solid"/>
-                      <a:round/>
-                      <a:headEnd type="none" w="med" len="med"/>
-                      <a:tailEnd type="none" w="med" len="med"/>
-                    </a:lnR>
-                    <a:lnT w="6350" cap="flat" cmpd="sng" algn="ctr">
-                      <a:solidFill>
-                        <a:srgbClr val="D9D9E3"/>
-                      </a:solidFill>
-                      <a:prstDash val="solid"/>
-                      <a:round/>
-                      <a:headEnd type="none" w="med" len="med"/>
-                      <a:tailEnd type="none" w="med" len="med"/>
-                    </a:lnT>
-                    <a:lnB w="12700" cap="flat" cmpd="sng" algn="ctr">
-                      <a:solidFill>
-                        <a:srgbClr val="D9D9E3"/>
-                      </a:solidFill>
-                      <a:prstDash val="solid"/>
-                      <a:round/>
-                      <a:headEnd type="none" w="med" len="med"/>
-                      <a:tailEnd type="none" w="med" len="med"/>
-                    </a:lnB>
-                    <a:solidFill>
-                      <a:srgbClr val="F7F7F8"/>
-                    </a:solidFill>
-                  </a:tcPr>
-                </a:tc>
-                <a:extLst>
-                  <a:ext uri="{0D108BD9-81ED-4DB2-BD59-A6C34878D82A}">
-                    <a16:rowId xmlns:a16="http://schemas.microsoft.com/office/drawing/2014/main" val="2120944161"/>
-                  </a:ext>
-                </a:extLst>
-              </a:tr>
-              <a:tr h="592232">
-                <a:tc>
-                  <a:txBody>
-                    <a:bodyPr/>
-                    <a:lstStyle/>
-                    <a:p>
-                      <a:pPr fontAlgn="base"/>
-                      <a:r>
-                        <a:rPr lang="en-US" sz="1050">
-                          <a:effectLst/>
-                        </a:rPr>
-                        <a:t>Standardizarea Z-score</a:t>
-                      </a:r>
-                    </a:p>
-                  </a:txBody>
-                  <a:tcPr marL="38044" marR="38044" marT="19022" marB="19022" anchor="ctr">
-                    <a:lnL w="6350" cap="flat" cmpd="sng" algn="ctr">
-                      <a:solidFill>
-                        <a:srgbClr val="D9D9E3"/>
-                      </a:solidFill>
-                      <a:prstDash val="solid"/>
-                      <a:round/>
-                      <a:headEnd type="none" w="med" len="med"/>
-                      <a:tailEnd type="none" w="med" len="med"/>
-                    </a:lnL>
-                    <a:lnR w="6350" cap="flat" cmpd="sng" algn="ctr">
-                      <a:solidFill>
-                        <a:srgbClr val="D9D9E3"/>
-                      </a:solidFill>
-                      <a:prstDash val="solid"/>
-                      <a:round/>
-                      <a:headEnd type="none" w="med" len="med"/>
-                      <a:tailEnd type="none" w="med" len="med"/>
-                    </a:lnR>
-                    <a:lnT w="12700" cap="flat" cmpd="sng" algn="ctr">
-                      <a:solidFill>
-                        <a:srgbClr val="D9D9E3"/>
-                      </a:solidFill>
-                      <a:prstDash val="solid"/>
-                      <a:round/>
-                      <a:headEnd type="none" w="med" len="med"/>
-                      <a:tailEnd type="none" w="med" len="med"/>
-                    </a:lnT>
-                    <a:lnB w="12700" cap="flat" cmpd="sng" algn="ctr">
-                      <a:solidFill>
-                        <a:srgbClr val="D9D9E3"/>
-                      </a:solidFill>
-                      <a:prstDash val="solid"/>
-                      <a:round/>
-                      <a:headEnd type="none" w="med" len="med"/>
-                      <a:tailEnd type="none" w="med" len="med"/>
-                    </a:lnB>
-                    <a:solidFill>
-                      <a:srgbClr val="F7F7F8"/>
-                    </a:solidFill>
-                  </a:tcPr>
-                </a:tc>
-                <a:tc>
-                  <a:txBody>
-                    <a:bodyPr/>
-                    <a:lstStyle/>
-                    <a:p>
-                      <a:pPr fontAlgn="base"/>
-                      <a:r>
-                        <a:rPr lang="en-US" sz="1050">
-                          <a:effectLst/>
-                        </a:rPr>
-                        <a:t>Transformă datele astfel încât să aibă o medie de 0 și o deviație standard de 1, astfel încât valorile să fie centrate și scalate.</a:t>
-                      </a:r>
-                    </a:p>
-                  </a:txBody>
-                  <a:tcPr marL="38044" marR="38044" marT="19022" marB="19022" anchor="ctr">
-                    <a:lnL w="6350" cap="flat" cmpd="sng" algn="ctr">
-                      <a:solidFill>
-                        <a:srgbClr val="D9D9E3"/>
-                      </a:solidFill>
-                      <a:prstDash val="solid"/>
-                      <a:round/>
-                      <a:headEnd type="none" w="med" len="med"/>
-                      <a:tailEnd type="none" w="med" len="med"/>
-                    </a:lnL>
-                    <a:lnR w="6350" cap="flat" cmpd="sng" algn="ctr">
-                      <a:solidFill>
-                        <a:srgbClr val="D9D9E3"/>
-                      </a:solidFill>
-                      <a:prstDash val="solid"/>
-                      <a:round/>
-                      <a:headEnd type="none" w="med" len="med"/>
-                      <a:tailEnd type="none" w="med" len="med"/>
-                    </a:lnR>
-                    <a:lnT w="12700" cap="flat" cmpd="sng" algn="ctr">
-                      <a:solidFill>
-                        <a:srgbClr val="D9D9E3"/>
-                      </a:solidFill>
-                      <a:prstDash val="solid"/>
-                      <a:round/>
-                      <a:headEnd type="none" w="med" len="med"/>
-                      <a:tailEnd type="none" w="med" len="med"/>
-                    </a:lnT>
-                    <a:lnB w="12700" cap="flat" cmpd="sng" algn="ctr">
-                      <a:solidFill>
-                        <a:srgbClr val="D9D9E3"/>
-                      </a:solidFill>
-                      <a:prstDash val="solid"/>
-                      <a:round/>
-                      <a:headEnd type="none" w="med" len="med"/>
-                      <a:tailEnd type="none" w="med" len="med"/>
-                    </a:lnB>
-                    <a:solidFill>
-                      <a:srgbClr val="F7F7F8"/>
-                    </a:solidFill>
-                  </a:tcPr>
-                </a:tc>
-                <a:extLst>
-                  <a:ext uri="{0D108BD9-81ED-4DB2-BD59-A6C34878D82A}">
-                    <a16:rowId xmlns:a16="http://schemas.microsoft.com/office/drawing/2014/main" val="3463954543"/>
-                  </a:ext>
-                </a:extLst>
-              </a:tr>
-              <a:tr h="592232">
-                <a:tc>
-                  <a:txBody>
-                    <a:bodyPr/>
-                    <a:lstStyle/>
-                    <a:p>
-                      <a:pPr fontAlgn="base"/>
-                      <a:r>
-                        <a:rPr lang="en-US" sz="1050" dirty="0">
-                          <a:effectLst/>
-                        </a:rPr>
-                        <a:t>Min-Max Scaling</a:t>
-                      </a:r>
-                    </a:p>
-                  </a:txBody>
-                  <a:tcPr marL="38044" marR="38044" marT="19022" marB="19022" anchor="ctr">
-                    <a:lnL w="6350" cap="flat" cmpd="sng" algn="ctr">
-                      <a:solidFill>
-                        <a:srgbClr val="D9D9E3"/>
-                      </a:solidFill>
-                      <a:prstDash val="solid"/>
-                      <a:round/>
-                      <a:headEnd type="none" w="med" len="med"/>
-                      <a:tailEnd type="none" w="med" len="med"/>
-                    </a:lnL>
-                    <a:lnR w="6350" cap="flat" cmpd="sng" algn="ctr">
-                      <a:solidFill>
-                        <a:srgbClr val="D9D9E3"/>
-                      </a:solidFill>
-                      <a:prstDash val="solid"/>
-                      <a:round/>
-                      <a:headEnd type="none" w="med" len="med"/>
-                      <a:tailEnd type="none" w="med" len="med"/>
-                    </a:lnR>
-                    <a:lnT w="12700" cap="flat" cmpd="sng" algn="ctr">
-                      <a:solidFill>
-                        <a:srgbClr val="D9D9E3"/>
-                      </a:solidFill>
-                      <a:prstDash val="solid"/>
-                      <a:round/>
-                      <a:headEnd type="none" w="med" len="med"/>
-                      <a:tailEnd type="none" w="med" len="med"/>
-                    </a:lnT>
-                    <a:lnB w="12700" cap="flat" cmpd="sng" algn="ctr">
-                      <a:solidFill>
-                        <a:srgbClr val="D9D9E3"/>
-                      </a:solidFill>
-                      <a:prstDash val="solid"/>
-                      <a:round/>
-                      <a:headEnd type="none" w="med" len="med"/>
-                      <a:tailEnd type="none" w="med" len="med"/>
-                    </a:lnB>
-                    <a:solidFill>
-                      <a:srgbClr val="F7F7F8"/>
-                    </a:solidFill>
-                  </a:tcPr>
-                </a:tc>
-                <a:tc>
-                  <a:txBody>
-                    <a:bodyPr/>
-                    <a:lstStyle/>
-                    <a:p>
-                      <a:pPr fontAlgn="base"/>
-                      <a:r>
-                        <a:rPr lang="en-US" sz="1050">
-                          <a:effectLst/>
-                        </a:rPr>
-                        <a:t>Redimensionează datele pentru a se încadra într-un interval specific, cum ar fi [0, 1], păstrând relațiile relative între valorile initiale.</a:t>
-                      </a:r>
-                    </a:p>
-                  </a:txBody>
-                  <a:tcPr marL="38044" marR="38044" marT="19022" marB="19022" anchor="ctr">
-                    <a:lnL w="6350" cap="flat" cmpd="sng" algn="ctr">
-                      <a:solidFill>
-                        <a:srgbClr val="D9D9E3"/>
-                      </a:solidFill>
-                      <a:prstDash val="solid"/>
-                      <a:round/>
-                      <a:headEnd type="none" w="med" len="med"/>
-                      <a:tailEnd type="none" w="med" len="med"/>
-                    </a:lnL>
-                    <a:lnR w="6350" cap="flat" cmpd="sng" algn="ctr">
-                      <a:solidFill>
-                        <a:srgbClr val="D9D9E3"/>
-                      </a:solidFill>
-                      <a:prstDash val="solid"/>
-                      <a:round/>
-                      <a:headEnd type="none" w="med" len="med"/>
-                      <a:tailEnd type="none" w="med" len="med"/>
-                    </a:lnR>
-                    <a:lnT w="12700" cap="flat" cmpd="sng" algn="ctr">
-                      <a:solidFill>
-                        <a:srgbClr val="D9D9E3"/>
-                      </a:solidFill>
-                      <a:prstDash val="solid"/>
-                      <a:round/>
-                      <a:headEnd type="none" w="med" len="med"/>
-                      <a:tailEnd type="none" w="med" len="med"/>
-                    </a:lnT>
-                    <a:lnB w="12700" cap="flat" cmpd="sng" algn="ctr">
-                      <a:solidFill>
-                        <a:srgbClr val="D9D9E3"/>
-                      </a:solidFill>
-                      <a:prstDash val="solid"/>
-                      <a:round/>
-                      <a:headEnd type="none" w="med" len="med"/>
-                      <a:tailEnd type="none" w="med" len="med"/>
-                    </a:lnB>
-                    <a:solidFill>
-                      <a:srgbClr val="F7F7F8"/>
-                    </a:solidFill>
-                  </a:tcPr>
-                </a:tc>
-                <a:extLst>
-                  <a:ext uri="{0D108BD9-81ED-4DB2-BD59-A6C34878D82A}">
-                    <a16:rowId xmlns:a16="http://schemas.microsoft.com/office/drawing/2014/main" val="2004876208"/>
-                  </a:ext>
-                </a:extLst>
-              </a:tr>
-              <a:tr h="592232">
-                <a:tc>
-                  <a:txBody>
-                    <a:bodyPr/>
-                    <a:lstStyle/>
-                    <a:p>
-                      <a:pPr fontAlgn="base"/>
-                      <a:r>
-                        <a:rPr lang="en-US" sz="1050" dirty="0">
-                          <a:effectLst/>
-                        </a:rPr>
-                        <a:t>Robust Scaling (Scaling robust)</a:t>
-                      </a:r>
-                    </a:p>
-                  </a:txBody>
-                  <a:tcPr marL="38044" marR="38044" marT="19022" marB="19022" anchor="ctr">
-                    <a:lnL w="6350" cap="flat" cmpd="sng" algn="ctr">
-                      <a:solidFill>
-                        <a:srgbClr val="D9D9E3"/>
-                      </a:solidFill>
-                      <a:prstDash val="solid"/>
-                      <a:round/>
-                      <a:headEnd type="none" w="med" len="med"/>
-                      <a:tailEnd type="none" w="med" len="med"/>
-                    </a:lnL>
-                    <a:lnR w="6350" cap="flat" cmpd="sng" algn="ctr">
-                      <a:solidFill>
-                        <a:srgbClr val="D9D9E3"/>
-                      </a:solidFill>
-                      <a:prstDash val="solid"/>
-                      <a:round/>
-                      <a:headEnd type="none" w="med" len="med"/>
-                      <a:tailEnd type="none" w="med" len="med"/>
-                    </a:lnR>
-                    <a:lnT w="12700" cap="flat" cmpd="sng" algn="ctr">
-                      <a:solidFill>
-                        <a:srgbClr val="D9D9E3"/>
-                      </a:solidFill>
-                      <a:prstDash val="solid"/>
-                      <a:round/>
-                      <a:headEnd type="none" w="med" len="med"/>
-                      <a:tailEnd type="none" w="med" len="med"/>
-                    </a:lnT>
-                    <a:lnB w="12700" cap="flat" cmpd="sng" algn="ctr">
-                      <a:solidFill>
-                        <a:srgbClr val="D9D9E3"/>
-                      </a:solidFill>
-                      <a:prstDash val="solid"/>
-                      <a:round/>
-                      <a:headEnd type="none" w="med" len="med"/>
-                      <a:tailEnd type="none" w="med" len="med"/>
-                    </a:lnB>
-                    <a:solidFill>
-                      <a:srgbClr val="F7F7F8"/>
-                    </a:solidFill>
-                  </a:tcPr>
-                </a:tc>
-                <a:tc>
-                  <a:txBody>
-                    <a:bodyPr/>
-                    <a:lstStyle/>
-                    <a:p>
-                      <a:pPr fontAlgn="base"/>
-                      <a:r>
-                        <a:rPr lang="en-US" sz="1050">
-                          <a:effectLst/>
-                        </a:rPr>
-                        <a:t>Similar cu Standardizarea Z-score, dar utilizează statisticile robuste (mediană și cuartile) pentru a face față valorilor extreme.</a:t>
-                      </a:r>
-                    </a:p>
-                  </a:txBody>
-                  <a:tcPr marL="38044" marR="38044" marT="19022" marB="19022" anchor="ctr">
-                    <a:lnL w="6350" cap="flat" cmpd="sng" algn="ctr">
-                      <a:solidFill>
-                        <a:srgbClr val="D9D9E3"/>
-                      </a:solidFill>
-                      <a:prstDash val="solid"/>
-                      <a:round/>
-                      <a:headEnd type="none" w="med" len="med"/>
-                      <a:tailEnd type="none" w="med" len="med"/>
-                    </a:lnL>
-                    <a:lnR w="6350" cap="flat" cmpd="sng" algn="ctr">
-                      <a:solidFill>
-                        <a:srgbClr val="D9D9E3"/>
-                      </a:solidFill>
-                      <a:prstDash val="solid"/>
-                      <a:round/>
-                      <a:headEnd type="none" w="med" len="med"/>
-                      <a:tailEnd type="none" w="med" len="med"/>
-                    </a:lnR>
-                    <a:lnT w="12700" cap="flat" cmpd="sng" algn="ctr">
-                      <a:solidFill>
-                        <a:srgbClr val="D9D9E3"/>
-                      </a:solidFill>
-                      <a:prstDash val="solid"/>
-                      <a:round/>
-                      <a:headEnd type="none" w="med" len="med"/>
-                      <a:tailEnd type="none" w="med" len="med"/>
-                    </a:lnT>
-                    <a:lnB w="12700" cap="flat" cmpd="sng" algn="ctr">
-                      <a:solidFill>
-                        <a:srgbClr val="D9D9E3"/>
-                      </a:solidFill>
-                      <a:prstDash val="solid"/>
-                      <a:round/>
-                      <a:headEnd type="none" w="med" len="med"/>
-                      <a:tailEnd type="none" w="med" len="med"/>
-                    </a:lnB>
-                    <a:solidFill>
-                      <a:srgbClr val="F7F7F8"/>
-                    </a:solidFill>
-                  </a:tcPr>
-                </a:tc>
-                <a:extLst>
-                  <a:ext uri="{0D108BD9-81ED-4DB2-BD59-A6C34878D82A}">
-                    <a16:rowId xmlns:a16="http://schemas.microsoft.com/office/drawing/2014/main" val="1855618098"/>
-                  </a:ext>
-                </a:extLst>
-              </a:tr>
-              <a:tr h="495358">
-                <a:tc>
-                  <a:txBody>
-                    <a:bodyPr/>
-                    <a:lstStyle/>
-                    <a:p>
-                      <a:pPr fontAlgn="base"/>
-                      <a:r>
-                        <a:rPr lang="en-US" sz="1050">
-                          <a:effectLst/>
-                        </a:rPr>
-                        <a:t>Log Transformation</a:t>
-                      </a:r>
-                    </a:p>
-                  </a:txBody>
-                  <a:tcPr marL="38044" marR="38044" marT="19022" marB="19022" anchor="ctr">
-                    <a:lnL w="6350" cap="flat" cmpd="sng" algn="ctr">
-                      <a:solidFill>
-                        <a:srgbClr val="D9D9E3"/>
-                      </a:solidFill>
-                      <a:prstDash val="solid"/>
-                      <a:round/>
-                      <a:headEnd type="none" w="med" len="med"/>
-                      <a:tailEnd type="none" w="med" len="med"/>
-                    </a:lnL>
-                    <a:lnR w="6350" cap="flat" cmpd="sng" algn="ctr">
-                      <a:solidFill>
-                        <a:srgbClr val="D9D9E3"/>
-                      </a:solidFill>
-                      <a:prstDash val="solid"/>
-                      <a:round/>
-                      <a:headEnd type="none" w="med" len="med"/>
-                      <a:tailEnd type="none" w="med" len="med"/>
-                    </a:lnR>
-                    <a:lnT w="12700" cap="flat" cmpd="sng" algn="ctr">
-                      <a:solidFill>
-                        <a:srgbClr val="D9D9E3"/>
-                      </a:solidFill>
-                      <a:prstDash val="solid"/>
-                      <a:round/>
-                      <a:headEnd type="none" w="med" len="med"/>
-                      <a:tailEnd type="none" w="med" len="med"/>
-                    </a:lnT>
-                    <a:lnB w="12700" cap="flat" cmpd="sng" algn="ctr">
-                      <a:solidFill>
-                        <a:srgbClr val="D9D9E3"/>
-                      </a:solidFill>
-                      <a:prstDash val="solid"/>
-                      <a:round/>
-                      <a:headEnd type="none" w="med" len="med"/>
-                      <a:tailEnd type="none" w="med" len="med"/>
-                    </a:lnB>
-                    <a:solidFill>
-                      <a:srgbClr val="F7F7F8"/>
-                    </a:solidFill>
-                  </a:tcPr>
-                </a:tc>
-                <a:tc>
-                  <a:txBody>
-                    <a:bodyPr/>
-                    <a:lstStyle/>
-                    <a:p>
-                      <a:pPr fontAlgn="base"/>
-                      <a:r>
-                        <a:rPr lang="en-US" sz="1050">
-                          <a:effectLst/>
-                        </a:rPr>
-                        <a:t>Aplică logaritmul natural asupra datelor, reducând variația în cazul datelor cu distribuție asimetrică sau exponențială.</a:t>
-                      </a:r>
-                    </a:p>
-                  </a:txBody>
-                  <a:tcPr marL="38044" marR="38044" marT="19022" marB="19022" anchor="ctr">
-                    <a:lnL w="6350" cap="flat" cmpd="sng" algn="ctr">
-                      <a:solidFill>
-                        <a:srgbClr val="D9D9E3"/>
-                      </a:solidFill>
-                      <a:prstDash val="solid"/>
-                      <a:round/>
-                      <a:headEnd type="none" w="med" len="med"/>
-                      <a:tailEnd type="none" w="med" len="med"/>
-                    </a:lnL>
-                    <a:lnR w="6350" cap="flat" cmpd="sng" algn="ctr">
-                      <a:solidFill>
-                        <a:srgbClr val="D9D9E3"/>
-                      </a:solidFill>
-                      <a:prstDash val="solid"/>
-                      <a:round/>
-                      <a:headEnd type="none" w="med" len="med"/>
-                      <a:tailEnd type="none" w="med" len="med"/>
-                    </a:lnR>
-                    <a:lnT w="12700" cap="flat" cmpd="sng" algn="ctr">
-                      <a:solidFill>
-                        <a:srgbClr val="D9D9E3"/>
-                      </a:solidFill>
-                      <a:prstDash val="solid"/>
-                      <a:round/>
-                      <a:headEnd type="none" w="med" len="med"/>
-                      <a:tailEnd type="none" w="med" len="med"/>
-                    </a:lnT>
-                    <a:lnB w="12700" cap="flat" cmpd="sng" algn="ctr">
-                      <a:solidFill>
-                        <a:srgbClr val="D9D9E3"/>
-                      </a:solidFill>
-                      <a:prstDash val="solid"/>
-                      <a:round/>
-                      <a:headEnd type="none" w="med" len="med"/>
-                      <a:tailEnd type="none" w="med" len="med"/>
-                    </a:lnB>
-                    <a:solidFill>
-                      <a:srgbClr val="F7F7F8"/>
-                    </a:solidFill>
-                  </a:tcPr>
-                </a:tc>
-                <a:extLst>
-                  <a:ext uri="{0D108BD9-81ED-4DB2-BD59-A6C34878D82A}">
-                    <a16:rowId xmlns:a16="http://schemas.microsoft.com/office/drawing/2014/main" val="4069210191"/>
-                  </a:ext>
-                </a:extLst>
-              </a:tr>
-              <a:tr h="495358">
-                <a:tc>
-                  <a:txBody>
-                    <a:bodyPr/>
-                    <a:lstStyle/>
-                    <a:p>
-                      <a:pPr fontAlgn="base"/>
-                      <a:r>
-                        <a:rPr lang="en-US" sz="1050" dirty="0">
-                          <a:effectLst/>
-                        </a:rPr>
-                        <a:t>Box-Cox Transformation</a:t>
-                      </a:r>
-                    </a:p>
-                  </a:txBody>
-                  <a:tcPr marL="38044" marR="38044" marT="19022" marB="19022" anchor="ctr">
-                    <a:lnL w="6350" cap="flat" cmpd="sng" algn="ctr">
-                      <a:solidFill>
-                        <a:srgbClr val="D9D9E3"/>
-                      </a:solidFill>
-                      <a:prstDash val="solid"/>
-                      <a:round/>
-                      <a:headEnd type="none" w="med" len="med"/>
-                      <a:tailEnd type="none" w="med" len="med"/>
-                    </a:lnL>
-                    <a:lnR w="6350" cap="flat" cmpd="sng" algn="ctr">
-                      <a:solidFill>
-                        <a:srgbClr val="D9D9E3"/>
-                      </a:solidFill>
-                      <a:prstDash val="solid"/>
-                      <a:round/>
-                      <a:headEnd type="none" w="med" len="med"/>
-                      <a:tailEnd type="none" w="med" len="med"/>
-                    </a:lnR>
-                    <a:lnT w="12700" cap="flat" cmpd="sng" algn="ctr">
-                      <a:solidFill>
-                        <a:srgbClr val="D9D9E3"/>
-                      </a:solidFill>
-                      <a:prstDash val="solid"/>
-                      <a:round/>
-                      <a:headEnd type="none" w="med" len="med"/>
-                      <a:tailEnd type="none" w="med" len="med"/>
-                    </a:lnT>
-                    <a:lnB w="12700" cap="flat" cmpd="sng" algn="ctr">
-                      <a:solidFill>
-                        <a:srgbClr val="D9D9E3"/>
-                      </a:solidFill>
-                      <a:prstDash val="solid"/>
-                      <a:round/>
-                      <a:headEnd type="none" w="med" len="med"/>
-                      <a:tailEnd type="none" w="med" len="med"/>
-                    </a:lnB>
-                    <a:solidFill>
-                      <a:srgbClr val="F7F7F8"/>
-                    </a:solidFill>
-                  </a:tcPr>
-                </a:tc>
-                <a:tc>
-                  <a:txBody>
-                    <a:bodyPr/>
-                    <a:lstStyle/>
-                    <a:p>
-                      <a:pPr fontAlgn="base"/>
-                      <a:r>
-                        <a:rPr lang="en-US" sz="1050">
-                          <a:effectLst/>
-                        </a:rPr>
-                        <a:t>O metodă statistică care transformă datele într-o distribuție aproape normală, potrivită pentru date pozitive și negative.</a:t>
-                      </a:r>
-                    </a:p>
-                  </a:txBody>
-                  <a:tcPr marL="38044" marR="38044" marT="19022" marB="19022" anchor="ctr">
-                    <a:lnL w="6350" cap="flat" cmpd="sng" algn="ctr">
-                      <a:solidFill>
-                        <a:srgbClr val="D9D9E3"/>
-                      </a:solidFill>
-                      <a:prstDash val="solid"/>
-                      <a:round/>
-                      <a:headEnd type="none" w="med" len="med"/>
-                      <a:tailEnd type="none" w="med" len="med"/>
-                    </a:lnL>
-                    <a:lnR w="6350" cap="flat" cmpd="sng" algn="ctr">
-                      <a:solidFill>
-                        <a:srgbClr val="D9D9E3"/>
-                      </a:solidFill>
-                      <a:prstDash val="solid"/>
-                      <a:round/>
-                      <a:headEnd type="none" w="med" len="med"/>
-                      <a:tailEnd type="none" w="med" len="med"/>
-                    </a:lnR>
-                    <a:lnT w="12700" cap="flat" cmpd="sng" algn="ctr">
-                      <a:solidFill>
-                        <a:srgbClr val="D9D9E3"/>
-                      </a:solidFill>
-                      <a:prstDash val="solid"/>
-                      <a:round/>
-                      <a:headEnd type="none" w="med" len="med"/>
-                      <a:tailEnd type="none" w="med" len="med"/>
-                    </a:lnT>
-                    <a:lnB w="12700" cap="flat" cmpd="sng" algn="ctr">
-                      <a:solidFill>
-                        <a:srgbClr val="D9D9E3"/>
-                      </a:solidFill>
-                      <a:prstDash val="solid"/>
-                      <a:round/>
-                      <a:headEnd type="none" w="med" len="med"/>
-                      <a:tailEnd type="none" w="med" len="med"/>
-                    </a:lnB>
-                    <a:solidFill>
-                      <a:srgbClr val="F7F7F8"/>
-                    </a:solidFill>
-                  </a:tcPr>
-                </a:tc>
-                <a:extLst>
-                  <a:ext uri="{0D108BD9-81ED-4DB2-BD59-A6C34878D82A}">
-                    <a16:rowId xmlns:a16="http://schemas.microsoft.com/office/drawing/2014/main" val="1499508690"/>
-                  </a:ext>
-                </a:extLst>
-              </a:tr>
-              <a:tr h="648353">
-                <a:tc>
-                  <a:txBody>
-                    <a:bodyPr/>
-                    <a:lstStyle/>
-                    <a:p>
-                      <a:pPr fontAlgn="base"/>
-                      <a:r>
-                        <a:rPr lang="en-US" sz="1050">
-                          <a:effectLst/>
-                        </a:rPr>
-                        <a:t>Unit Vector Scaling</a:t>
-                      </a:r>
-                    </a:p>
-                  </a:txBody>
-                  <a:tcPr marL="38044" marR="38044" marT="19022" marB="19022" anchor="ctr">
-                    <a:lnL w="6350" cap="flat" cmpd="sng" algn="ctr">
-                      <a:solidFill>
-                        <a:srgbClr val="D9D9E3"/>
-                      </a:solidFill>
-                      <a:prstDash val="solid"/>
-                      <a:round/>
-                      <a:headEnd type="none" w="med" len="med"/>
-                      <a:tailEnd type="none" w="med" len="med"/>
-                    </a:lnL>
-                    <a:lnR w="6350" cap="flat" cmpd="sng" algn="ctr">
-                      <a:solidFill>
-                        <a:srgbClr val="D9D9E3"/>
-                      </a:solidFill>
-                      <a:prstDash val="solid"/>
-                      <a:round/>
-                      <a:headEnd type="none" w="med" len="med"/>
-                      <a:tailEnd type="none" w="med" len="med"/>
-                    </a:lnR>
-                    <a:lnT w="12700" cap="flat" cmpd="sng" algn="ctr">
-                      <a:solidFill>
-                        <a:srgbClr val="D9D9E3"/>
-                      </a:solidFill>
-                      <a:prstDash val="solid"/>
-                      <a:round/>
-                      <a:headEnd type="none" w="med" len="med"/>
-                      <a:tailEnd type="none" w="med" len="med"/>
-                    </a:lnT>
-                    <a:lnB w="6350" cap="flat" cmpd="sng" algn="ctr">
-                      <a:solidFill>
-                        <a:srgbClr val="D9D9E3"/>
-                      </a:solidFill>
-                      <a:prstDash val="solid"/>
-                      <a:round/>
-                      <a:headEnd type="none" w="med" len="med"/>
-                      <a:tailEnd type="none" w="med" len="med"/>
-                    </a:lnB>
-                    <a:solidFill>
-                      <a:srgbClr val="F7F7F8"/>
-                    </a:solidFill>
-                  </a:tcPr>
-                </a:tc>
-                <a:tc>
-                  <a:txBody>
-                    <a:bodyPr/>
-                    <a:lstStyle/>
-                    <a:p>
-                      <a:pPr fontAlgn="base"/>
-                      <a:r>
-                        <a:rPr lang="en-US" sz="1050" dirty="0" err="1">
-                          <a:effectLst/>
-                        </a:rPr>
-                        <a:t>Redimensionează</a:t>
-                      </a:r>
-                      <a:r>
-                        <a:rPr lang="en-US" sz="1050" dirty="0">
-                          <a:effectLst/>
-                        </a:rPr>
-                        <a:t> </a:t>
-                      </a:r>
-                      <a:r>
-                        <a:rPr lang="en-US" sz="1050" dirty="0" err="1">
-                          <a:effectLst/>
-                        </a:rPr>
-                        <a:t>datele</a:t>
-                      </a:r>
-                      <a:r>
-                        <a:rPr lang="en-US" sz="1050" dirty="0">
-                          <a:effectLst/>
-                        </a:rPr>
-                        <a:t> </a:t>
-                      </a:r>
-                      <a:r>
-                        <a:rPr lang="en-US" sz="1050" dirty="0" err="1">
-                          <a:effectLst/>
-                        </a:rPr>
-                        <a:t>astfel</a:t>
-                      </a:r>
-                      <a:r>
-                        <a:rPr lang="en-US" sz="1050" dirty="0">
-                          <a:effectLst/>
-                        </a:rPr>
-                        <a:t> </a:t>
-                      </a:r>
-                      <a:r>
-                        <a:rPr lang="en-US" sz="1050" dirty="0" err="1">
-                          <a:effectLst/>
-                        </a:rPr>
-                        <a:t>încât</a:t>
-                      </a:r>
-                      <a:r>
-                        <a:rPr lang="en-US" sz="1050" dirty="0">
-                          <a:effectLst/>
-                        </a:rPr>
-                        <a:t> </a:t>
-                      </a:r>
-                      <a:r>
-                        <a:rPr lang="en-US" sz="1050" dirty="0" err="1">
-                          <a:effectLst/>
-                        </a:rPr>
-                        <a:t>vectorii</a:t>
-                      </a:r>
-                      <a:r>
-                        <a:rPr lang="en-US" sz="1050" dirty="0">
-                          <a:effectLst/>
-                        </a:rPr>
-                        <a:t> </a:t>
-                      </a:r>
-                      <a:r>
-                        <a:rPr lang="en-US" sz="1050" dirty="0" err="1">
-                          <a:effectLst/>
-                        </a:rPr>
-                        <a:t>caracteristicilor</a:t>
-                      </a:r>
-                      <a:r>
-                        <a:rPr lang="en-US" sz="1050" dirty="0">
-                          <a:effectLst/>
-                        </a:rPr>
-                        <a:t> </a:t>
-                      </a:r>
-                      <a:r>
-                        <a:rPr lang="en-US" sz="1050" dirty="0" err="1">
-                          <a:effectLst/>
-                        </a:rPr>
-                        <a:t>să</a:t>
-                      </a:r>
-                      <a:r>
-                        <a:rPr lang="en-US" sz="1050" dirty="0">
-                          <a:effectLst/>
-                        </a:rPr>
-                        <a:t> </a:t>
-                      </a:r>
-                      <a:r>
-                        <a:rPr lang="en-US" sz="1050" dirty="0" err="1">
-                          <a:effectLst/>
-                        </a:rPr>
-                        <a:t>aibă</a:t>
-                      </a:r>
-                      <a:r>
-                        <a:rPr lang="en-US" sz="1050" dirty="0">
-                          <a:effectLst/>
-                        </a:rPr>
-                        <a:t> norma </a:t>
-                      </a:r>
-                      <a:r>
-                        <a:rPr lang="en-US" sz="1050" dirty="0" err="1">
-                          <a:effectLst/>
-                        </a:rPr>
-                        <a:t>unitară</a:t>
-                      </a:r>
-                      <a:r>
-                        <a:rPr lang="en-US" sz="1050" dirty="0">
-                          <a:effectLst/>
-                        </a:rPr>
-                        <a:t>, </a:t>
-                      </a:r>
-                      <a:r>
-                        <a:rPr lang="en-US" sz="1050" dirty="0" err="1">
-                          <a:effectLst/>
-                        </a:rPr>
-                        <a:t>folosită</a:t>
-                      </a:r>
-                      <a:r>
-                        <a:rPr lang="en-US" sz="1050" dirty="0">
-                          <a:effectLst/>
-                        </a:rPr>
-                        <a:t> </a:t>
-                      </a:r>
-                      <a:r>
-                        <a:rPr lang="en-US" sz="1050" dirty="0" err="1">
-                          <a:effectLst/>
-                        </a:rPr>
-                        <a:t>în</a:t>
-                      </a:r>
-                      <a:r>
-                        <a:rPr lang="en-US" sz="1050" dirty="0">
-                          <a:effectLst/>
-                        </a:rPr>
-                        <a:t> special </a:t>
-                      </a:r>
-                      <a:r>
-                        <a:rPr lang="en-US" sz="1050" dirty="0" err="1">
-                          <a:effectLst/>
-                        </a:rPr>
-                        <a:t>în</a:t>
-                      </a:r>
-                      <a:r>
-                        <a:rPr lang="en-US" sz="1050" dirty="0">
-                          <a:effectLst/>
-                        </a:rPr>
-                        <a:t> </a:t>
-                      </a:r>
-                      <a:r>
-                        <a:rPr lang="en-US" sz="1050" dirty="0" err="1">
-                          <a:effectLst/>
-                        </a:rPr>
-                        <a:t>algoritmi</a:t>
-                      </a:r>
-                      <a:r>
-                        <a:rPr lang="en-US" sz="1050" dirty="0">
-                          <a:effectLst/>
-                        </a:rPr>
-                        <a:t> care </a:t>
-                      </a:r>
-                      <a:r>
-                        <a:rPr lang="en-US" sz="1050" dirty="0" err="1">
-                          <a:effectLst/>
-                        </a:rPr>
-                        <a:t>depind</a:t>
-                      </a:r>
-                      <a:r>
-                        <a:rPr lang="en-US" sz="1050" dirty="0">
-                          <a:effectLst/>
-                        </a:rPr>
-                        <a:t> de </a:t>
-                      </a:r>
-                      <a:r>
-                        <a:rPr lang="en-US" sz="1050" dirty="0" err="1">
-                          <a:effectLst/>
-                        </a:rPr>
-                        <a:t>distanță</a:t>
-                      </a:r>
-                      <a:r>
-                        <a:rPr lang="en-US" sz="1050" dirty="0">
-                          <a:effectLst/>
-                        </a:rPr>
-                        <a:t> </a:t>
-                      </a:r>
-                      <a:r>
-                        <a:rPr lang="en-US" sz="1050" dirty="0" err="1">
-                          <a:effectLst/>
-                        </a:rPr>
-                        <a:t>sau</a:t>
-                      </a:r>
-                      <a:r>
-                        <a:rPr lang="en-US" sz="1050" dirty="0">
-                          <a:effectLst/>
-                        </a:rPr>
-                        <a:t> </a:t>
-                      </a:r>
-                      <a:r>
-                        <a:rPr lang="en-US" sz="1050" dirty="0" err="1">
-                          <a:effectLst/>
-                        </a:rPr>
-                        <a:t>similaritate</a:t>
-                      </a:r>
-                      <a:r>
-                        <a:rPr lang="en-US" sz="1050" dirty="0">
-                          <a:effectLst/>
-                        </a:rPr>
-                        <a:t>.</a:t>
-                      </a:r>
-                    </a:p>
-                  </a:txBody>
-                  <a:tcPr marL="38044" marR="38044" marT="19022" marB="19022" anchor="ctr">
-                    <a:lnL w="6350" cap="flat" cmpd="sng" algn="ctr">
-                      <a:solidFill>
-                        <a:srgbClr val="D9D9E3"/>
-                      </a:solidFill>
-                      <a:prstDash val="solid"/>
-                      <a:round/>
-                      <a:headEnd type="none" w="med" len="med"/>
-                      <a:tailEnd type="none" w="med" len="med"/>
-                    </a:lnL>
-                    <a:lnR w="6350" cap="flat" cmpd="sng" algn="ctr">
-                      <a:solidFill>
-                        <a:srgbClr val="D9D9E3"/>
-                      </a:solidFill>
-                      <a:prstDash val="solid"/>
-                      <a:round/>
-                      <a:headEnd type="none" w="med" len="med"/>
-                      <a:tailEnd type="none" w="med" len="med"/>
-                    </a:lnR>
-                    <a:lnT w="12700" cap="flat" cmpd="sng" algn="ctr">
-                      <a:solidFill>
-                        <a:srgbClr val="D9D9E3"/>
-                      </a:solidFill>
-                      <a:prstDash val="solid"/>
-                      <a:round/>
-                      <a:headEnd type="none" w="med" len="med"/>
-                      <a:tailEnd type="none" w="med" len="med"/>
-                    </a:lnT>
-                    <a:lnB w="6350" cap="flat" cmpd="sng" algn="ctr">
-                      <a:solidFill>
-                        <a:srgbClr val="D9D9E3"/>
-                      </a:solidFill>
-                      <a:prstDash val="solid"/>
-                      <a:round/>
-                      <a:headEnd type="none" w="med" len="med"/>
-                      <a:tailEnd type="none" w="med" len="med"/>
-                    </a:lnB>
-                    <a:solidFill>
-                      <a:srgbClr val="F7F7F8"/>
-                    </a:solidFill>
-                  </a:tcPr>
-                </a:tc>
-                <a:extLst>
-                  <a:ext uri="{0D108BD9-81ED-4DB2-BD59-A6C34878D82A}">
-                    <a16:rowId xmlns:a16="http://schemas.microsoft.com/office/drawing/2014/main" val="2283112124"/>
-                  </a:ext>
-                </a:extLst>
-              </a:tr>
-            </a:tbl>
-          </a:graphicData>
-        </a:graphic>
-      </p:graphicFrame>
-    </p:spTree>
-    <p:extLst>
-      <p:ext uri="{BB962C8B-B14F-4D97-AF65-F5344CB8AC3E}">
-        <p14:creationId xmlns:p14="http://schemas.microsoft.com/office/powerpoint/2010/main" val="3217728505"/>
-      </p:ext>
-    </p:extLst>
-  </p:cSld>
-  <p:clrMapOvr>
-    <a:masterClrMapping/>
-  </p:clrMapOvr>
-</p:sld>
-</file>
-
-<file path=ppt/slides/slide21.xml><?xml version="1.0" encoding="utf-8"?>
-<p:sld xmlns:a="http://schemas.openxmlformats.org/drawingml/2006/main" xmlns:r="http://schemas.openxmlformats.org/officeDocument/2006/relationships" xmlns:p="http://schemas.openxmlformats.org/presentationml/2006/main">
-  <p:cSld>
-    <p:spTree>
-      <p:nvGrpSpPr>
-        <p:cNvPr id="1" name=""/>
-        <p:cNvGrpSpPr/>
-        <p:nvPr/>
-      </p:nvGrpSpPr>
-      <p:grpSpPr>
-        <a:xfrm>
-          <a:off x="0" y="0"/>
-          <a:ext cx="0" cy="0"/>
-          <a:chOff x="0" y="0"/>
-          <a:chExt cx="0" cy="0"/>
-        </a:xfrm>
-      </p:grpSpPr>
-      <p:sp>
-        <p:nvSpPr>
-          <p:cNvPr id="2" name="Title 1">
-            <a:extLst>
-              <a:ext uri="{FF2B5EF4-FFF2-40B4-BE49-F238E27FC236}">
-                <a16:creationId xmlns:a16="http://schemas.microsoft.com/office/drawing/2014/main" id="{3785A259-D52B-E4BA-06AC-AEAADC506D81}"/>
-              </a:ext>
-            </a:extLst>
-          </p:cNvPr>
-          <p:cNvSpPr>
-            <a:spLocks noGrp="1"/>
-          </p:cNvSpPr>
-          <p:nvPr>
-            <p:ph type="title"/>
-          </p:nvPr>
-        </p:nvSpPr>
-        <p:spPr/>
-        <p:txBody>
-          <a:bodyPr/>
-          <a:lstStyle/>
-          <a:p>
-            <a:r>
-              <a:rPr lang="ro-RO" dirty="0"/>
-              <a:t>Normalizare, standardizare</a:t>
-            </a:r>
-            <a:endParaRPr lang="en-US" dirty="0"/>
-          </a:p>
-        </p:txBody>
-      </p:sp>
-      <p:sp>
-        <p:nvSpPr>
-          <p:cNvPr id="3" name="Content Placeholder 2">
-            <a:extLst>
-              <a:ext uri="{FF2B5EF4-FFF2-40B4-BE49-F238E27FC236}">
-                <a16:creationId xmlns:a16="http://schemas.microsoft.com/office/drawing/2014/main" id="{A2DFB215-DD8F-AFB7-BE6B-2193EC6111DB}"/>
-              </a:ext>
-            </a:extLst>
-          </p:cNvPr>
-          <p:cNvSpPr>
-            <a:spLocks noGrp="1"/>
-          </p:cNvSpPr>
-          <p:nvPr>
-            <p:ph idx="1"/>
-          </p:nvPr>
-        </p:nvSpPr>
-        <p:spPr>
-          <a:xfrm>
-            <a:off x="628650" y="1369219"/>
-            <a:ext cx="1832610" cy="3263504"/>
-          </a:xfrm>
-        </p:spPr>
-        <p:txBody>
-          <a:bodyPr/>
-          <a:lstStyle/>
-          <a:p>
-            <a:r>
-              <a:rPr lang="ro-RO" dirty="0"/>
-              <a:t>Resurse Python</a:t>
-            </a:r>
-            <a:endParaRPr lang="en-US" dirty="0"/>
-          </a:p>
-        </p:txBody>
-      </p:sp>
-      <p:pic>
-        <p:nvPicPr>
-          <p:cNvPr id="7" name="Picture 6">
-            <a:extLst>
-              <a:ext uri="{FF2B5EF4-FFF2-40B4-BE49-F238E27FC236}">
-                <a16:creationId xmlns:a16="http://schemas.microsoft.com/office/drawing/2014/main" id="{72348994-6311-84EA-F852-80EFA0EBC35D}"/>
-              </a:ext>
-            </a:extLst>
-          </p:cNvPr>
-          <p:cNvPicPr>
-            <a:picLocks noChangeAspect="1"/>
-          </p:cNvPicPr>
-          <p:nvPr/>
-        </p:nvPicPr>
-        <p:blipFill>
-          <a:blip r:embed="rId2"/>
-          <a:stretch>
-            <a:fillRect/>
-          </a:stretch>
-        </p:blipFill>
-        <p:spPr>
-          <a:xfrm>
-            <a:off x="1935480" y="1060450"/>
-            <a:ext cx="6119054" cy="3940300"/>
-          </a:xfrm>
-          <a:prstGeom prst="rect">
-            <a:avLst/>
-          </a:prstGeom>
-        </p:spPr>
-      </p:pic>
-    </p:spTree>
-    <p:extLst>
-      <p:ext uri="{BB962C8B-B14F-4D97-AF65-F5344CB8AC3E}">
-        <p14:creationId xmlns:p14="http://schemas.microsoft.com/office/powerpoint/2010/main" val="1818756370"/>
-      </p:ext>
-    </p:extLst>
-  </p:cSld>
-  <p:clrMapOvr>
-    <a:masterClrMapping/>
-  </p:clrMapOvr>
-</p:sld>
-</file>
-
-<file path=ppt/slides/slide22.xml><?xml version="1.0" encoding="utf-8"?>
-<p:sld xmlns:a="http://schemas.openxmlformats.org/drawingml/2006/main" xmlns:r="http://schemas.openxmlformats.org/officeDocument/2006/relationships" xmlns:p="http://schemas.openxmlformats.org/presentationml/2006/main">
-  <p:cSld>
-    <p:spTree>
-      <p:nvGrpSpPr>
-        <p:cNvPr id="1" name=""/>
-        <p:cNvGrpSpPr/>
-        <p:nvPr/>
-      </p:nvGrpSpPr>
-      <p:grpSpPr>
-        <a:xfrm>
-          <a:off x="0" y="0"/>
-          <a:ext cx="0" cy="0"/>
-          <a:chOff x="0" y="0"/>
-          <a:chExt cx="0" cy="0"/>
-        </a:xfrm>
-      </p:grpSpPr>
-      <p:sp>
-        <p:nvSpPr>
-          <p:cNvPr id="2" name="Title 1">
-            <a:extLst>
-              <a:ext uri="{FF2B5EF4-FFF2-40B4-BE49-F238E27FC236}">
-                <a16:creationId xmlns:a16="http://schemas.microsoft.com/office/drawing/2014/main" id="{51ADD173-1401-BC1C-5BD4-605AC73A9626}"/>
-              </a:ext>
-            </a:extLst>
-          </p:cNvPr>
-          <p:cNvSpPr>
-            <a:spLocks noGrp="1"/>
-          </p:cNvSpPr>
-          <p:nvPr>
-            <p:ph type="title"/>
-          </p:nvPr>
-        </p:nvSpPr>
-        <p:spPr/>
-        <p:txBody>
-          <a:bodyPr>
-            <a:normAutofit fontScale="90000"/>
-          </a:bodyPr>
-          <a:lstStyle/>
-          <a:p>
-            <a:r>
-              <a:rPr lang="en-US" dirty="0" err="1"/>
-              <a:t>Când</a:t>
-            </a:r>
-            <a:r>
-              <a:rPr lang="en-US" dirty="0"/>
-              <a:t> </a:t>
-            </a:r>
-            <a:r>
-              <a:rPr lang="en-US" dirty="0" err="1"/>
-              <a:t>este</a:t>
-            </a:r>
-            <a:r>
-              <a:rPr lang="en-US" dirty="0"/>
-              <a:t> </a:t>
-            </a:r>
-            <a:r>
-              <a:rPr lang="en-US" dirty="0" err="1"/>
-              <a:t>importantă</a:t>
-            </a:r>
-            <a:r>
-              <a:rPr lang="en-US" dirty="0"/>
-              <a:t> </a:t>
-            </a:r>
-            <a:r>
-              <a:rPr lang="en-US" dirty="0" err="1"/>
-              <a:t>standardizarea</a:t>
-            </a:r>
-            <a:r>
-              <a:rPr lang="en-US" dirty="0"/>
-              <a:t> </a:t>
-            </a:r>
-            <a:r>
-              <a:rPr lang="en-US" dirty="0" err="1"/>
-              <a:t>variabilelor</a:t>
-            </a:r>
-            <a:r>
-              <a:rPr lang="en-US" dirty="0"/>
-              <a:t>?</a:t>
-            </a:r>
-          </a:p>
-        </p:txBody>
-      </p:sp>
-      <p:sp>
-        <p:nvSpPr>
-          <p:cNvPr id="3" name="Content Placeholder 2">
-            <a:extLst>
-              <a:ext uri="{FF2B5EF4-FFF2-40B4-BE49-F238E27FC236}">
-                <a16:creationId xmlns:a16="http://schemas.microsoft.com/office/drawing/2014/main" id="{77345A67-048A-9A53-6E40-C5F73E23280B}"/>
-              </a:ext>
-            </a:extLst>
-          </p:cNvPr>
-          <p:cNvSpPr>
-            <a:spLocks noGrp="1"/>
-          </p:cNvSpPr>
-          <p:nvPr>
-            <p:ph idx="1"/>
-          </p:nvPr>
-        </p:nvSpPr>
-        <p:spPr/>
-        <p:txBody>
-          <a:bodyPr>
-            <a:normAutofit fontScale="92500" lnSpcReduction="10000"/>
-          </a:bodyPr>
-          <a:lstStyle/>
-          <a:p>
-            <a:r>
-              <a:rPr lang="ro-RO" dirty="0"/>
-              <a:t>Înainte de o clusterizare</a:t>
-            </a:r>
-          </a:p>
-          <a:p>
-            <a:pPr lvl="1"/>
-            <a:r>
-              <a:rPr lang="ro-RO" dirty="0"/>
-              <a:t>Tehnicile de analiză a grupurilor depind de conceptul de măsurare a distanței dintre diferitele observații pe care încercăm să le grupăm. Dacă o variabilă este măsurată la o scară mai mare decât celelalte variabile, atunci orice măsură pe care o folosim va fi influențată excesiv de acea variabilă.</a:t>
-            </a:r>
-          </a:p>
-          <a:p>
-            <a:r>
-              <a:rPr lang="ro-RO" dirty="0"/>
-              <a:t>Înainte de PCA</a:t>
-            </a:r>
-          </a:p>
-          <a:p>
-            <a:pPr lvl="1"/>
-            <a:r>
-              <a:rPr lang="en-US" dirty="0"/>
-              <a:t>PCA </a:t>
-            </a:r>
-            <a:r>
-              <a:rPr lang="en-US" dirty="0" err="1"/>
-              <a:t>oferă</a:t>
-            </a:r>
-            <a:r>
-              <a:rPr lang="en-US" dirty="0"/>
-              <a:t> </a:t>
-            </a:r>
-            <a:r>
-              <a:rPr lang="en-US" dirty="0" err="1"/>
-              <a:t>mai</a:t>
-            </a:r>
-            <a:r>
-              <a:rPr lang="en-US" dirty="0"/>
-              <a:t> </a:t>
-            </a:r>
-            <a:r>
-              <a:rPr lang="en-US" dirty="0" err="1"/>
-              <a:t>multă</a:t>
-            </a:r>
-            <a:r>
-              <a:rPr lang="en-US" dirty="0"/>
-              <a:t> </a:t>
-            </a:r>
-            <a:r>
-              <a:rPr lang="en-US" dirty="0" err="1"/>
-              <a:t>pondere</a:t>
-            </a:r>
-            <a:r>
-              <a:rPr lang="en-US" dirty="0"/>
-              <a:t> </a:t>
-            </a:r>
-            <a:r>
-              <a:rPr lang="en-US" dirty="0" err="1"/>
-              <a:t>acelor</a:t>
-            </a:r>
-            <a:r>
-              <a:rPr lang="en-US" dirty="0"/>
-              <a:t> </a:t>
-            </a:r>
-            <a:r>
-              <a:rPr lang="en-US" dirty="0" err="1"/>
-              <a:t>variabile</a:t>
-            </a:r>
-            <a:r>
-              <a:rPr lang="en-US" dirty="0"/>
-              <a:t> care au </a:t>
-            </a:r>
-            <a:r>
-              <a:rPr lang="en-US" dirty="0" err="1"/>
-              <a:t>varianțe</a:t>
-            </a:r>
-            <a:r>
-              <a:rPr lang="en-US" dirty="0"/>
-              <a:t> </a:t>
-            </a:r>
-            <a:r>
-              <a:rPr lang="en-US" dirty="0" err="1"/>
-              <a:t>mai</a:t>
-            </a:r>
-            <a:r>
-              <a:rPr lang="en-US" dirty="0"/>
-              <a:t> </a:t>
-            </a:r>
-            <a:r>
-              <a:rPr lang="en-US" dirty="0" err="1"/>
-              <a:t>mari</a:t>
-            </a:r>
-            <a:r>
-              <a:rPr lang="en-US" dirty="0"/>
-              <a:t> </a:t>
-            </a:r>
-            <a:r>
-              <a:rPr lang="en-US" dirty="0" err="1"/>
-              <a:t>decât</a:t>
-            </a:r>
-            <a:r>
-              <a:rPr lang="en-US" dirty="0"/>
-              <a:t> </a:t>
-            </a:r>
-            <a:r>
-              <a:rPr lang="en-US" dirty="0" err="1"/>
-              <a:t>variabilelor</a:t>
-            </a:r>
-            <a:r>
-              <a:rPr lang="en-US" dirty="0"/>
-              <a:t> care au </a:t>
-            </a:r>
-            <a:r>
-              <a:rPr lang="en-US" dirty="0" err="1"/>
-              <a:t>varianțe</a:t>
-            </a:r>
-            <a:r>
-              <a:rPr lang="en-US" dirty="0"/>
-              <a:t> </a:t>
-            </a:r>
-            <a:r>
-              <a:rPr lang="en-US" dirty="0" err="1"/>
-              <a:t>foarte</a:t>
-            </a:r>
-            <a:r>
-              <a:rPr lang="en-US" dirty="0"/>
-              <a:t> </a:t>
-            </a:r>
-            <a:r>
-              <a:rPr lang="en-US" dirty="0" err="1"/>
-              <a:t>mici</a:t>
-            </a:r>
-            <a:r>
-              <a:rPr lang="en-US" dirty="0"/>
-              <a:t>. De </a:t>
-            </a:r>
-            <a:r>
-              <a:rPr lang="en-US" dirty="0" err="1"/>
-              <a:t>fapt</a:t>
-            </a:r>
-            <a:r>
-              <a:rPr lang="en-US" dirty="0"/>
-              <a:t>, </a:t>
-            </a:r>
-            <a:r>
-              <a:rPr lang="en-US" dirty="0" err="1"/>
-              <a:t>rezultatele</a:t>
-            </a:r>
-            <a:r>
-              <a:rPr lang="en-US" dirty="0"/>
-              <a:t> </a:t>
-            </a:r>
-            <a:r>
-              <a:rPr lang="en-US" dirty="0" err="1"/>
-              <a:t>analizei</a:t>
-            </a:r>
-            <a:r>
-              <a:rPr lang="en-US" dirty="0"/>
-              <a:t> </a:t>
-            </a:r>
-            <a:r>
-              <a:rPr lang="en-US" dirty="0" err="1"/>
-              <a:t>vor</a:t>
-            </a:r>
-            <a:r>
-              <a:rPr lang="en-US" dirty="0"/>
-              <a:t> </a:t>
-            </a:r>
-            <a:r>
-              <a:rPr lang="en-US" dirty="0" err="1"/>
-              <a:t>depinde</a:t>
-            </a:r>
-            <a:r>
-              <a:rPr lang="en-US" dirty="0"/>
-              <a:t> de </a:t>
-            </a:r>
-            <a:r>
-              <a:rPr lang="en-US" dirty="0" err="1"/>
-              <a:t>ce</a:t>
-            </a:r>
-            <a:r>
-              <a:rPr lang="en-US" dirty="0"/>
-              <a:t> </a:t>
-            </a:r>
-            <a:r>
-              <a:rPr lang="en-US" dirty="0" err="1"/>
-              <a:t>unități</a:t>
-            </a:r>
-            <a:r>
-              <a:rPr lang="en-US" dirty="0"/>
-              <a:t> de </a:t>
-            </a:r>
-            <a:r>
-              <a:rPr lang="en-US" dirty="0" err="1"/>
-              <a:t>măsură</a:t>
-            </a:r>
-            <a:r>
-              <a:rPr lang="en-US" dirty="0"/>
-              <a:t> sunt </a:t>
-            </a:r>
-            <a:r>
-              <a:rPr lang="en-US" dirty="0" err="1"/>
-              <a:t>utilizate</a:t>
-            </a:r>
-            <a:r>
-              <a:rPr lang="en-US" dirty="0"/>
-              <a:t> </a:t>
-            </a:r>
-            <a:r>
-              <a:rPr lang="en-US" dirty="0" err="1"/>
-              <a:t>pentru</a:t>
-            </a:r>
-            <a:r>
-              <a:rPr lang="en-US" dirty="0"/>
-              <a:t> </a:t>
-            </a:r>
-            <a:r>
-              <a:rPr lang="en-US" dirty="0" err="1"/>
-              <a:t>măsurarea</a:t>
-            </a:r>
-            <a:r>
-              <a:rPr lang="en-US" dirty="0"/>
-              <a:t> </a:t>
-            </a:r>
-            <a:r>
-              <a:rPr lang="en-US" dirty="0" err="1"/>
-              <a:t>fiecărei</a:t>
-            </a:r>
-            <a:r>
-              <a:rPr lang="en-US" dirty="0"/>
-              <a:t> </a:t>
-            </a:r>
-            <a:r>
-              <a:rPr lang="en-US" dirty="0" err="1"/>
-              <a:t>variabile</a:t>
-            </a:r>
-            <a:r>
-              <a:rPr lang="en-US" dirty="0"/>
-              <a:t>. </a:t>
-            </a:r>
-            <a:r>
-              <a:rPr lang="en-US" dirty="0" err="1"/>
-              <a:t>Standardizarea</a:t>
-            </a:r>
-            <a:r>
-              <a:rPr lang="en-US" dirty="0"/>
-              <a:t> </a:t>
-            </a:r>
-            <a:r>
-              <a:rPr lang="en-US" dirty="0" err="1"/>
-              <a:t>valorilor</a:t>
-            </a:r>
-            <a:r>
-              <a:rPr lang="en-US" dirty="0"/>
-              <a:t> brute face o </a:t>
-            </a:r>
-            <a:r>
-              <a:rPr lang="en-US" dirty="0" err="1"/>
-              <a:t>variație</a:t>
-            </a:r>
-            <a:r>
-              <a:rPr lang="en-US" dirty="0"/>
-              <a:t> </a:t>
-            </a:r>
-            <a:r>
-              <a:rPr lang="en-US" dirty="0" err="1"/>
-              <a:t>egală</a:t>
-            </a:r>
-            <a:r>
-              <a:rPr lang="en-US" dirty="0"/>
-              <a:t>, </a:t>
-            </a:r>
-            <a:r>
-              <a:rPr lang="en-US" dirty="0" err="1"/>
-              <a:t>astfel</a:t>
-            </a:r>
-            <a:r>
-              <a:rPr lang="en-US" dirty="0"/>
-              <a:t> </a:t>
-            </a:r>
-            <a:r>
-              <a:rPr lang="en-US" dirty="0" err="1"/>
-              <a:t>încât</a:t>
-            </a:r>
-            <a:r>
-              <a:rPr lang="en-US" dirty="0"/>
-              <a:t> </a:t>
-            </a:r>
-            <a:r>
-              <a:rPr lang="en-US" dirty="0" err="1"/>
-              <a:t>ponderea</a:t>
-            </a:r>
-            <a:r>
-              <a:rPr lang="en-US" dirty="0"/>
-              <a:t> mare nu </a:t>
-            </a:r>
-            <a:r>
-              <a:rPr lang="en-US" dirty="0" err="1"/>
-              <a:t>este</a:t>
-            </a:r>
-            <a:r>
-              <a:rPr lang="en-US" dirty="0"/>
-              <a:t> </a:t>
-            </a:r>
-            <a:r>
-              <a:rPr lang="en-US" dirty="0" err="1"/>
-              <a:t>atribuită</a:t>
-            </a:r>
-            <a:r>
-              <a:rPr lang="en-US" dirty="0"/>
-              <a:t> </a:t>
-            </a:r>
-            <a:r>
-              <a:rPr lang="en-US" dirty="0" err="1"/>
-              <a:t>variabilelor</a:t>
-            </a:r>
-            <a:r>
-              <a:rPr lang="en-US" dirty="0"/>
-              <a:t> care au </a:t>
-            </a:r>
-            <a:r>
-              <a:rPr lang="en-US" dirty="0" err="1"/>
-              <a:t>varianțe</a:t>
-            </a:r>
-            <a:r>
-              <a:rPr lang="en-US" dirty="0"/>
-              <a:t> </a:t>
-            </a:r>
-            <a:r>
-              <a:rPr lang="en-US" dirty="0" err="1"/>
-              <a:t>mai</a:t>
-            </a:r>
-            <a:r>
-              <a:rPr lang="en-US" dirty="0"/>
-              <a:t> </a:t>
-            </a:r>
-            <a:r>
-              <a:rPr lang="en-US" dirty="0" err="1"/>
-              <a:t>mari</a:t>
-            </a:r>
-            <a:r>
-              <a:rPr lang="en-US" dirty="0"/>
-              <a:t>.</a:t>
-            </a:r>
-            <a:endParaRPr lang="ro-RO" dirty="0"/>
-          </a:p>
-          <a:p>
-            <a:r>
-              <a:rPr lang="ro-RO" dirty="0"/>
-              <a:t>Înainte de regresii (LASSO, RIDGE) sau când interpretăm o regresie clasică</a:t>
-            </a:r>
-            <a:endParaRPr lang="en-US" dirty="0"/>
-          </a:p>
-        </p:txBody>
-      </p:sp>
-    </p:spTree>
-    <p:extLst>
-      <p:ext uri="{BB962C8B-B14F-4D97-AF65-F5344CB8AC3E}">
-        <p14:creationId xmlns:p14="http://schemas.microsoft.com/office/powerpoint/2010/main" val="881332795"/>
-      </p:ext>
-    </p:extLst>
-  </p:cSld>
-  <p:clrMapOvr>
-    <a:masterClrMapping/>
-  </p:clrMapOvr>
-</p:sld>
-</file>
-
-<file path=ppt/slides/slide23.xml><?xml version="1.0" encoding="utf-8"?>
-<p:sld xmlns:a="http://schemas.openxmlformats.org/drawingml/2006/main" xmlns:r="http://schemas.openxmlformats.org/officeDocument/2006/relationships" xmlns:p="http://schemas.openxmlformats.org/presentationml/2006/main">
-  <p:cSld>
-    <p:spTree>
-      <p:nvGrpSpPr>
-        <p:cNvPr id="1" name=""/>
-        <p:cNvGrpSpPr/>
-        <p:nvPr/>
-      </p:nvGrpSpPr>
-      <p:grpSpPr>
-        <a:xfrm>
-          <a:off x="0" y="0"/>
-          <a:ext cx="0" cy="0"/>
-          <a:chOff x="0" y="0"/>
-          <a:chExt cx="0" cy="0"/>
-        </a:xfrm>
-      </p:grpSpPr>
-      <p:sp>
-        <p:nvSpPr>
-          <p:cNvPr id="2" name="Title 1">
-            <a:extLst>
-              <a:ext uri="{FF2B5EF4-FFF2-40B4-BE49-F238E27FC236}">
-                <a16:creationId xmlns:a16="http://schemas.microsoft.com/office/drawing/2014/main" id="{547BE5C9-9486-CE56-B6A0-10F0CEF9591D}"/>
-              </a:ext>
-            </a:extLst>
-          </p:cNvPr>
-          <p:cNvSpPr>
-            <a:spLocks noGrp="1"/>
-          </p:cNvSpPr>
-          <p:nvPr>
-            <p:ph type="title"/>
-          </p:nvPr>
-        </p:nvSpPr>
-        <p:spPr/>
-        <p:txBody>
-          <a:bodyPr/>
-          <a:lstStyle/>
-          <a:p>
-            <a:r>
-              <a:rPr lang="ro-RO" dirty="0"/>
-              <a:t>Balansarea claselor (pt. clasificare)</a:t>
-            </a:r>
-            <a:endParaRPr lang="en-US" dirty="0"/>
-          </a:p>
-        </p:txBody>
-      </p:sp>
-      <p:sp>
-        <p:nvSpPr>
-          <p:cNvPr id="3" name="Content Placeholder 2">
-            <a:extLst>
-              <a:ext uri="{FF2B5EF4-FFF2-40B4-BE49-F238E27FC236}">
-                <a16:creationId xmlns:a16="http://schemas.microsoft.com/office/drawing/2014/main" id="{5F23363E-89D6-0B8A-92E8-6DC8D3A4AEC5}"/>
-              </a:ext>
-            </a:extLst>
-          </p:cNvPr>
-          <p:cNvSpPr>
-            <a:spLocks noGrp="1"/>
-          </p:cNvSpPr>
-          <p:nvPr>
-            <p:ph idx="1"/>
-          </p:nvPr>
-        </p:nvSpPr>
-        <p:spPr/>
-        <p:txBody>
-          <a:bodyPr/>
-          <a:lstStyle/>
-          <a:p>
-            <a:r>
-              <a:rPr lang="ro-RO" dirty="0"/>
-              <a:t>Dacă o clasă este dominantă (de exemplu mai mult de 90% din observații), devin greu de construit un model de clasificare</a:t>
-            </a:r>
-          </a:p>
-          <a:p>
-            <a:r>
-              <a:rPr lang="ro-RO" dirty="0"/>
-              <a:t>În mod ideal, când antrenăm un model de clasificare cu n clase, datele de antrenament ar trebui să conțină un număr similar de observații pentru fiecare clasă</a:t>
-            </a:r>
-          </a:p>
-          <a:p>
-            <a:r>
-              <a:rPr lang="ro-RO" dirty="0"/>
-              <a:t>În realitate nu se întâmplă așa. Uneori este benefică balansarea claselor</a:t>
-            </a:r>
-          </a:p>
-          <a:p>
-            <a:pPr lvl="1"/>
-            <a:r>
-              <a:rPr lang="ro-RO" dirty="0"/>
-              <a:t>Prin supraeșantionare (oversampling), sau</a:t>
-            </a:r>
-          </a:p>
-          <a:p>
-            <a:pPr lvl="1"/>
-            <a:r>
-              <a:rPr lang="ro-RO" dirty="0"/>
-              <a:t>Prin subeșantionare (undersampling)</a:t>
-            </a:r>
-            <a:endParaRPr lang="en-US" dirty="0"/>
-          </a:p>
-        </p:txBody>
-      </p:sp>
-    </p:spTree>
-    <p:extLst>
-      <p:ext uri="{BB962C8B-B14F-4D97-AF65-F5344CB8AC3E}">
-        <p14:creationId xmlns:p14="http://schemas.microsoft.com/office/powerpoint/2010/main" val="3579705657"/>
-      </p:ext>
-    </p:extLst>
-  </p:cSld>
-  <p:clrMapOvr>
-    <a:masterClrMapping/>
-  </p:clrMapOvr>
-</p:sld>
-</file>
-
-<file path=ppt/slides/slide24.xml><?xml version="1.0" encoding="utf-8"?>
-<p:sld xmlns:a="http://schemas.openxmlformats.org/drawingml/2006/main" xmlns:r="http://schemas.openxmlformats.org/officeDocument/2006/relationships" xmlns:p="http://schemas.openxmlformats.org/presentationml/2006/main">
-  <p:cSld>
-    <p:spTree>
-      <p:nvGrpSpPr>
-        <p:cNvPr id="1" name=""/>
-        <p:cNvGrpSpPr/>
-        <p:nvPr/>
-      </p:nvGrpSpPr>
-      <p:grpSpPr>
-        <a:xfrm>
-          <a:off x="0" y="0"/>
-          <a:ext cx="0" cy="0"/>
-          <a:chOff x="0" y="0"/>
-          <a:chExt cx="0" cy="0"/>
-        </a:xfrm>
-      </p:grpSpPr>
-      <p:sp>
-        <p:nvSpPr>
-          <p:cNvPr id="2" name="Title 1">
-            <a:extLst>
-              <a:ext uri="{FF2B5EF4-FFF2-40B4-BE49-F238E27FC236}">
-                <a16:creationId xmlns:a16="http://schemas.microsoft.com/office/drawing/2014/main" id="{547BE5C9-9486-CE56-B6A0-10F0CEF9591D}"/>
-              </a:ext>
-            </a:extLst>
-          </p:cNvPr>
-          <p:cNvSpPr>
-            <a:spLocks noGrp="1"/>
-          </p:cNvSpPr>
-          <p:nvPr>
-            <p:ph type="title"/>
-          </p:nvPr>
-        </p:nvSpPr>
-        <p:spPr>
-          <a:xfrm>
-            <a:off x="628650" y="510777"/>
-            <a:ext cx="7886700" cy="994172"/>
-          </a:xfrm>
-        </p:spPr>
-        <p:txBody>
-          <a:bodyPr>
-            <a:normAutofit fontScale="90000"/>
-          </a:bodyPr>
-          <a:lstStyle/>
-          <a:p>
-            <a:r>
-              <a:rPr lang="ro-RO" dirty="0"/>
-              <a:t>Balansarea claselor prin subeșantionare (undersampling)</a:t>
-            </a:r>
-            <a:br>
-              <a:rPr lang="en-US" dirty="0"/>
-            </a:br>
-            <a:endParaRPr lang="en-US" dirty="0"/>
-          </a:p>
-        </p:txBody>
-      </p:sp>
-      <p:sp>
-        <p:nvSpPr>
-          <p:cNvPr id="3" name="Content Placeholder 2">
-            <a:extLst>
-              <a:ext uri="{FF2B5EF4-FFF2-40B4-BE49-F238E27FC236}">
-                <a16:creationId xmlns:a16="http://schemas.microsoft.com/office/drawing/2014/main" id="{5F23363E-89D6-0B8A-92E8-6DC8D3A4AEC5}"/>
-              </a:ext>
-            </a:extLst>
-          </p:cNvPr>
-          <p:cNvSpPr>
-            <a:spLocks noGrp="1"/>
-          </p:cNvSpPr>
-          <p:nvPr>
-            <p:ph idx="1"/>
-          </p:nvPr>
-        </p:nvSpPr>
-        <p:spPr>
-          <a:xfrm>
-            <a:off x="628649" y="1369219"/>
-            <a:ext cx="8398750" cy="3263504"/>
-          </a:xfrm>
-        </p:spPr>
-        <p:txBody>
-          <a:bodyPr>
-            <a:normAutofit fontScale="92500" lnSpcReduction="10000"/>
-          </a:bodyPr>
-          <a:lstStyle/>
-          <a:p>
-            <a:r>
-              <a:rPr lang="ro-RO" sz="1800" dirty="0"/>
-              <a:t>Cea mai simplă strategie – din clasa mare se eșantionează de mărimea clasei mai mici</a:t>
-            </a:r>
-          </a:p>
-          <a:p>
-            <a:r>
-              <a:rPr lang="ro-RO" sz="1800" dirty="0"/>
-              <a:t>Funcționează bine pentru Big Data</a:t>
-            </a:r>
-          </a:p>
-          <a:p>
-            <a:endParaRPr lang="ro-RO" sz="1800" dirty="0"/>
-          </a:p>
-          <a:p>
-            <a:endParaRPr lang="ro-RO" sz="1800" dirty="0"/>
-          </a:p>
-          <a:p>
-            <a:endParaRPr lang="ro-RO" sz="1800" dirty="0"/>
-          </a:p>
-          <a:p>
-            <a:endParaRPr lang="ro-RO" sz="1800" dirty="0"/>
-          </a:p>
-          <a:p>
-            <a:endParaRPr lang="ro-RO" sz="1800" dirty="0"/>
-          </a:p>
-          <a:p>
-            <a:endParaRPr lang="ro-RO" sz="1800" dirty="0"/>
-          </a:p>
-          <a:p>
-            <a:r>
-              <a:rPr lang="ro-RO" sz="1800" dirty="0"/>
-              <a:t>Pentru date puține (ca în psihologie) nu este benefică</a:t>
-            </a:r>
-          </a:p>
-          <a:p>
-            <a:pPr lvl="1"/>
-            <a:r>
-              <a:rPr lang="ro-RO" sz="1400" dirty="0"/>
-              <a:t>De exemplu dacă avem 100 de observații cu clasele 0 și 1 și 5 sunt cu clasa 0 restul clasa 1, subeșantionarea ne dă un set cu înregistrări – 5 cu clasa 1 și 5 cu clasa 0. Cam greu de făcut statistică cu 10 numere –</a:t>
-            </a:r>
-            <a:r>
-              <a:rPr lang="ro-RO" sz="1400" dirty="0">
-                <a:hlinkClick r:id="rId2"/>
-              </a:rPr>
-              <a:t>contraexemplu:</a:t>
-            </a:r>
-            <a:endParaRPr lang="en-US" sz="1400" dirty="0"/>
-          </a:p>
-        </p:txBody>
-      </p:sp>
-      <p:pic>
-        <p:nvPicPr>
-          <p:cNvPr id="3076" name="Picture 4" descr="How to deal with imbalanced datasets in ML">
-            <a:extLst>
-              <a:ext uri="{FF2B5EF4-FFF2-40B4-BE49-F238E27FC236}">
-                <a16:creationId xmlns:a16="http://schemas.microsoft.com/office/drawing/2014/main" id="{322BB974-3D5C-BAC7-01CC-F8911167CAE2}"/>
-              </a:ext>
-            </a:extLst>
-          </p:cNvPr>
-          <p:cNvPicPr>
-            <a:picLocks noChangeAspect="1" noChangeArrowheads="1"/>
-          </p:cNvPicPr>
-          <p:nvPr/>
-        </p:nvPicPr>
-        <p:blipFill rotWithShape="1">
-          <a:blip r:embed="rId3">
-            <a:grayscl/>
-            <a:extLst>
-              <a:ext uri="{28A0092B-C50C-407E-A947-70E740481C1C}">
-                <a14:useLocalDpi xmlns:a14="http://schemas.microsoft.com/office/drawing/2010/main" val="0"/>
-              </a:ext>
-            </a:extLst>
-          </a:blip>
-          <a:srcRect l="8877" t="5877" r="6002" b="5159"/>
-          <a:stretch/>
-        </p:blipFill>
-        <p:spPr bwMode="auto">
-          <a:xfrm>
-            <a:off x="4122291" y="1669927"/>
-            <a:ext cx="2984254" cy="2169728"/>
-          </a:xfrm>
-          <a:prstGeom prst="rect">
-            <a:avLst/>
-          </a:prstGeom>
-          <a:noFill/>
-          <a:extLst>
-            <a:ext uri="{909E8E84-426E-40DD-AFC4-6F175D3DCCD1}">
-              <a14:hiddenFill xmlns:a14="http://schemas.microsoft.com/office/drawing/2010/main">
-                <a:solidFill>
-                  <a:srgbClr val="FFFFFF"/>
-                </a:solidFill>
-              </a14:hiddenFill>
-            </a:ext>
-          </a:extLst>
-        </p:spPr>
-      </p:pic>
-    </p:spTree>
-    <p:extLst>
-      <p:ext uri="{BB962C8B-B14F-4D97-AF65-F5344CB8AC3E}">
-        <p14:creationId xmlns:p14="http://schemas.microsoft.com/office/powerpoint/2010/main" val="2336866953"/>
-      </p:ext>
-    </p:extLst>
-  </p:cSld>
-  <p:clrMapOvr>
-    <a:masterClrMapping/>
-  </p:clrMapOvr>
-</p:sld>
-</file>
-
-<file path=ppt/slides/slide25.xml><?xml version="1.0" encoding="utf-8"?>
-<p:sld xmlns:a="http://schemas.openxmlformats.org/drawingml/2006/main" xmlns:r="http://schemas.openxmlformats.org/officeDocument/2006/relationships" xmlns:p="http://schemas.openxmlformats.org/presentationml/2006/main">
-  <p:cSld>
-    <p:spTree>
-      <p:nvGrpSpPr>
-        <p:cNvPr id="1" name=""/>
-        <p:cNvGrpSpPr/>
-        <p:nvPr/>
-      </p:nvGrpSpPr>
-      <p:grpSpPr>
-        <a:xfrm>
-          <a:off x="0" y="0"/>
-          <a:ext cx="0" cy="0"/>
-          <a:chOff x="0" y="0"/>
-          <a:chExt cx="0" cy="0"/>
-        </a:xfrm>
-      </p:grpSpPr>
-      <p:sp>
-        <p:nvSpPr>
-          <p:cNvPr id="2" name="Title 1">
-            <a:extLst>
-              <a:ext uri="{FF2B5EF4-FFF2-40B4-BE49-F238E27FC236}">
-                <a16:creationId xmlns:a16="http://schemas.microsoft.com/office/drawing/2014/main" id="{547BE5C9-9486-CE56-B6A0-10F0CEF9591D}"/>
-              </a:ext>
-            </a:extLst>
-          </p:cNvPr>
-          <p:cNvSpPr>
-            <a:spLocks noGrp="1"/>
-          </p:cNvSpPr>
-          <p:nvPr>
-            <p:ph type="title"/>
-          </p:nvPr>
-        </p:nvSpPr>
-        <p:spPr/>
-        <p:txBody>
-          <a:bodyPr>
-            <a:normAutofit fontScale="90000"/>
-          </a:bodyPr>
-          <a:lstStyle/>
-          <a:p>
-            <a:r>
-              <a:rPr lang="ro-RO" dirty="0"/>
-              <a:t>Balansarea claselor prin supraeșantionare (oversampling)</a:t>
-            </a:r>
-            <a:endParaRPr lang="en-US" dirty="0"/>
-          </a:p>
-        </p:txBody>
-      </p:sp>
-      <p:sp>
-        <p:nvSpPr>
-          <p:cNvPr id="3" name="Content Placeholder 2">
-            <a:extLst>
-              <a:ext uri="{FF2B5EF4-FFF2-40B4-BE49-F238E27FC236}">
-                <a16:creationId xmlns:a16="http://schemas.microsoft.com/office/drawing/2014/main" id="{5F23363E-89D6-0B8A-92E8-6DC8D3A4AEC5}"/>
-              </a:ext>
-            </a:extLst>
-          </p:cNvPr>
-          <p:cNvSpPr>
-            <a:spLocks noGrp="1"/>
-          </p:cNvSpPr>
-          <p:nvPr>
-            <p:ph idx="1"/>
-          </p:nvPr>
-        </p:nvSpPr>
-        <p:spPr/>
-        <p:txBody>
-          <a:bodyPr/>
-          <a:lstStyle/>
-          <a:p>
-            <a:r>
-              <a:rPr lang="ro-RO" dirty="0"/>
-              <a:t>Strategia pornește cu clasa mai mică</a:t>
-            </a:r>
-          </a:p>
-          <a:p>
-            <a:r>
-              <a:rPr lang="ro-RO" dirty="0"/>
-              <a:t>Se generează sintetic observații asemănătoare celor din clasa mică până când mărimea eșantionului este similară cu cea a clasei mari</a:t>
-            </a:r>
-            <a:endParaRPr lang="en-US" dirty="0"/>
-          </a:p>
-        </p:txBody>
-      </p:sp>
-      <p:pic>
-        <p:nvPicPr>
-          <p:cNvPr id="4098" name="Picture 2" descr="How to Deal With Imbalanced Classification and Regression Data">
-            <a:extLst>
-              <a:ext uri="{FF2B5EF4-FFF2-40B4-BE49-F238E27FC236}">
-                <a16:creationId xmlns:a16="http://schemas.microsoft.com/office/drawing/2014/main" id="{093568CF-D91F-046B-4B46-DA6BA231B977}"/>
-              </a:ext>
-            </a:extLst>
-          </p:cNvPr>
-          <p:cNvPicPr>
-            <a:picLocks noChangeAspect="1" noChangeArrowheads="1"/>
-          </p:cNvPicPr>
-          <p:nvPr/>
-        </p:nvPicPr>
-        <p:blipFill rotWithShape="1">
-          <a:blip r:embed="rId2">
-            <a:extLst>
-              <a:ext uri="{BEBA8EAE-BF5A-486C-A8C5-ECC9F3942E4B}">
-                <a14:imgProps xmlns:a14="http://schemas.microsoft.com/office/drawing/2010/main">
-                  <a14:imgLayer r:embed="rId3">
-                    <a14:imgEffect>
-                      <a14:saturation sat="0"/>
-                    </a14:imgEffect>
-                  </a14:imgLayer>
-                </a14:imgProps>
-              </a:ext>
-              <a:ext uri="{28A0092B-C50C-407E-A947-70E740481C1C}">
-                <a14:useLocalDpi xmlns:a14="http://schemas.microsoft.com/office/drawing/2010/main" val="0"/>
-              </a:ext>
-            </a:extLst>
-          </a:blip>
-          <a:srcRect b="7729"/>
-          <a:stretch/>
-        </p:blipFill>
-        <p:spPr bwMode="auto">
-          <a:xfrm>
-            <a:off x="1890713" y="2383047"/>
-            <a:ext cx="5226367" cy="2547093"/>
-          </a:xfrm>
-          <a:prstGeom prst="rect">
-            <a:avLst/>
-          </a:prstGeom>
-          <a:noFill/>
-          <a:extLst>
-            <a:ext uri="{909E8E84-426E-40DD-AFC4-6F175D3DCCD1}">
-              <a14:hiddenFill xmlns:a14="http://schemas.microsoft.com/office/drawing/2010/main">
-                <a:solidFill>
-                  <a:srgbClr val="FFFFFF"/>
-                </a:solidFill>
-              </a14:hiddenFill>
-            </a:ext>
-          </a:extLst>
-        </p:spPr>
-      </p:pic>
-    </p:spTree>
-    <p:extLst>
-      <p:ext uri="{BB962C8B-B14F-4D97-AF65-F5344CB8AC3E}">
-        <p14:creationId xmlns:p14="http://schemas.microsoft.com/office/powerpoint/2010/main" val="2292906121"/>
-      </p:ext>
-    </p:extLst>
-  </p:cSld>
-  <p:clrMapOvr>
-    <a:masterClrMapping/>
-  </p:clrMapOvr>
-</p:sld>
-</file>
-
-<file path=ppt/slides/slide26.xml><?xml version="1.0" encoding="utf-8"?>
-<p:sld xmlns:a="http://schemas.openxmlformats.org/drawingml/2006/main" xmlns:r="http://schemas.openxmlformats.org/officeDocument/2006/relationships" xmlns:p="http://schemas.openxmlformats.org/presentationml/2006/main">
-  <p:cSld>
-    <p:spTree>
-      <p:nvGrpSpPr>
-        <p:cNvPr id="1" name=""/>
-        <p:cNvGrpSpPr/>
-        <p:nvPr/>
-      </p:nvGrpSpPr>
-      <p:grpSpPr>
-        <a:xfrm>
-          <a:off x="0" y="0"/>
-          <a:ext cx="0" cy="0"/>
-          <a:chOff x="0" y="0"/>
-          <a:chExt cx="0" cy="0"/>
-        </a:xfrm>
-      </p:grpSpPr>
-      <p:sp>
-        <p:nvSpPr>
-          <p:cNvPr id="2" name="Title 1">
-            <a:extLst>
-              <a:ext uri="{FF2B5EF4-FFF2-40B4-BE49-F238E27FC236}">
-                <a16:creationId xmlns:a16="http://schemas.microsoft.com/office/drawing/2014/main" id="{A5BE955B-6CDC-4AB1-06CF-1B7D0AC1DA49}"/>
-              </a:ext>
-            </a:extLst>
-          </p:cNvPr>
-          <p:cNvSpPr>
-            <a:spLocks noGrp="1"/>
-          </p:cNvSpPr>
-          <p:nvPr>
-            <p:ph type="title"/>
-          </p:nvPr>
-        </p:nvSpPr>
-        <p:spPr/>
-        <p:txBody>
-          <a:bodyPr/>
-          <a:lstStyle/>
-          <a:p>
-            <a:r>
-              <a:rPr lang="ro-RO" dirty="0"/>
-              <a:t>Balansarea claselor – metode Python</a:t>
-            </a:r>
-            <a:endParaRPr lang="en-US" dirty="0"/>
-          </a:p>
-        </p:txBody>
-      </p:sp>
-      <p:sp>
-        <p:nvSpPr>
-          <p:cNvPr id="3" name="Content Placeholder 2">
-            <a:extLst>
-              <a:ext uri="{FF2B5EF4-FFF2-40B4-BE49-F238E27FC236}">
-                <a16:creationId xmlns:a16="http://schemas.microsoft.com/office/drawing/2014/main" id="{2BABE2DB-0B62-F984-196F-EFB274BF5710}"/>
-              </a:ext>
-            </a:extLst>
-          </p:cNvPr>
-          <p:cNvSpPr>
-            <a:spLocks noGrp="1"/>
-          </p:cNvSpPr>
-          <p:nvPr>
-            <p:ph idx="1"/>
-          </p:nvPr>
-        </p:nvSpPr>
-        <p:spPr/>
-        <p:txBody>
-          <a:bodyPr/>
-          <a:lstStyle/>
-          <a:p>
-            <a:r>
-              <a:rPr lang="ro-RO" dirty="0"/>
-              <a:t>Resurse Python</a:t>
-            </a:r>
-          </a:p>
-          <a:p>
-            <a:pPr lvl="1"/>
-            <a:r>
-              <a:rPr lang="ro-RO" dirty="0"/>
-              <a:t>https://imbalanced-learn.org/stable/</a:t>
-            </a:r>
-          </a:p>
-          <a:p>
-            <a:pPr lvl="1"/>
-            <a:r>
-              <a:rPr lang="en-US" dirty="0"/>
-              <a:t>https://learn-scikit.oneoffcoder.com/imbalanced-learn.html</a:t>
-            </a:r>
-          </a:p>
-        </p:txBody>
-      </p:sp>
-      <p:pic>
-        <p:nvPicPr>
-          <p:cNvPr id="5" name="Picture 4">
-            <a:extLst>
-              <a:ext uri="{FF2B5EF4-FFF2-40B4-BE49-F238E27FC236}">
-                <a16:creationId xmlns:a16="http://schemas.microsoft.com/office/drawing/2014/main" id="{F89BD8FA-B3C6-23BE-AD29-D94169F73C78}"/>
-              </a:ext>
-            </a:extLst>
-          </p:cNvPr>
-          <p:cNvPicPr>
-            <a:picLocks noChangeAspect="1"/>
-          </p:cNvPicPr>
-          <p:nvPr/>
-        </p:nvPicPr>
-        <p:blipFill>
-          <a:blip r:embed="rId2"/>
-          <a:stretch>
-            <a:fillRect/>
-          </a:stretch>
-        </p:blipFill>
-        <p:spPr>
-          <a:xfrm>
-            <a:off x="1045158" y="2301726"/>
-            <a:ext cx="2716769" cy="2660945"/>
-          </a:xfrm>
-          <a:prstGeom prst="rect">
-            <a:avLst/>
-          </a:prstGeom>
-        </p:spPr>
-      </p:pic>
-      <p:pic>
-        <p:nvPicPr>
-          <p:cNvPr id="7" name="Picture 6">
-            <a:extLst>
-              <a:ext uri="{FF2B5EF4-FFF2-40B4-BE49-F238E27FC236}">
-                <a16:creationId xmlns:a16="http://schemas.microsoft.com/office/drawing/2014/main" id="{864AE8DB-C06A-93C3-B234-50C5F0B7D61A}"/>
-              </a:ext>
-            </a:extLst>
-          </p:cNvPr>
-          <p:cNvPicPr>
-            <a:picLocks noChangeAspect="1"/>
-          </p:cNvPicPr>
-          <p:nvPr/>
-        </p:nvPicPr>
-        <p:blipFill rotWithShape="1">
-          <a:blip r:embed="rId3"/>
-          <a:srcRect b="32796"/>
-          <a:stretch/>
-        </p:blipFill>
-        <p:spPr>
-          <a:xfrm>
-            <a:off x="3887909" y="2571750"/>
-            <a:ext cx="2163088" cy="1803869"/>
-          </a:xfrm>
-          <a:prstGeom prst="rect">
-            <a:avLst/>
-          </a:prstGeom>
-        </p:spPr>
-      </p:pic>
-    </p:spTree>
-    <p:extLst>
-      <p:ext uri="{BB962C8B-B14F-4D97-AF65-F5344CB8AC3E}">
-        <p14:creationId xmlns:p14="http://schemas.microsoft.com/office/powerpoint/2010/main" val="1205620916"/>
-      </p:ext>
-    </p:extLst>
-  </p:cSld>
-  <p:clrMapOvr>
-    <a:masterClrMapping/>
-  </p:clrMapOvr>
-</p:sld>
-</file>
-
-<file path=ppt/slides/slide27.xml><?xml version="1.0" encoding="utf-8"?>
-<p:sld xmlns:a="http://schemas.openxmlformats.org/drawingml/2006/main" xmlns:r="http://schemas.openxmlformats.org/officeDocument/2006/relationships" xmlns:p="http://schemas.openxmlformats.org/presentationml/2006/main">
-  <p:cSld>
-    <p:spTree>
-      <p:nvGrpSpPr>
-        <p:cNvPr id="1" name=""/>
-        <p:cNvGrpSpPr/>
-        <p:nvPr/>
-      </p:nvGrpSpPr>
-      <p:grpSpPr>
-        <a:xfrm>
-          <a:off x="0" y="0"/>
-          <a:ext cx="0" cy="0"/>
-          <a:chOff x="0" y="0"/>
-          <a:chExt cx="0" cy="0"/>
-        </a:xfrm>
-      </p:grpSpPr>
-      <p:sp>
-        <p:nvSpPr>
-          <p:cNvPr id="2" name="Title 1">
-            <a:extLst>
-              <a:ext uri="{FF2B5EF4-FFF2-40B4-BE49-F238E27FC236}">
-                <a16:creationId xmlns:a16="http://schemas.microsoft.com/office/drawing/2014/main" id="{4953CC1A-823B-F644-300D-4CC0E45F0F6E}"/>
-              </a:ext>
-            </a:extLst>
-          </p:cNvPr>
-          <p:cNvSpPr>
-            <a:spLocks noGrp="1"/>
-          </p:cNvSpPr>
-          <p:nvPr>
-            <p:ph type="title"/>
-          </p:nvPr>
-        </p:nvSpPr>
-        <p:spPr/>
-        <p:txBody>
-          <a:bodyPr/>
-          <a:lstStyle/>
-          <a:p>
-            <a:r>
-              <a:rPr lang="ro-RO" dirty="0"/>
-              <a:t>Ingineria atributelor (Feature engineering)</a:t>
-            </a:r>
-          </a:p>
-        </p:txBody>
-      </p:sp>
-      <p:sp>
-        <p:nvSpPr>
-          <p:cNvPr id="3" name="Content Placeholder 2">
-            <a:extLst>
-              <a:ext uri="{FF2B5EF4-FFF2-40B4-BE49-F238E27FC236}">
-                <a16:creationId xmlns:a16="http://schemas.microsoft.com/office/drawing/2014/main" id="{BE040A14-ABCB-6E15-1DC9-3CAD1FFDEFCB}"/>
-              </a:ext>
-            </a:extLst>
-          </p:cNvPr>
-          <p:cNvSpPr>
-            <a:spLocks noGrp="1"/>
-          </p:cNvSpPr>
-          <p:nvPr>
-            <p:ph idx="1"/>
-          </p:nvPr>
-        </p:nvSpPr>
-        <p:spPr>
-          <a:xfrm>
-            <a:off x="628650" y="1369219"/>
-            <a:ext cx="7938480" cy="1803565"/>
-          </a:xfrm>
-        </p:spPr>
-        <p:txBody>
-          <a:bodyPr>
-            <a:normAutofit fontScale="92500" lnSpcReduction="10000"/>
-          </a:bodyPr>
-          <a:lstStyle/>
-          <a:p>
-            <a:r>
-              <a:rPr lang="ro-RO" dirty="0"/>
-              <a:t>Constă în adăugarea de atribute derivate din datele existente</a:t>
-            </a:r>
-          </a:p>
-          <a:p>
-            <a:pPr lvl="1"/>
-            <a:r>
-              <a:rPr lang="ro-RO" dirty="0"/>
-              <a:t>Atributele obținute prin discretizare</a:t>
-            </a:r>
-          </a:p>
-          <a:p>
-            <a:pPr lvl="1"/>
-            <a:r>
-              <a:rPr lang="ro-RO" dirty="0"/>
-              <a:t>Atribute agregate obținute la nivel de grupări detectate (exemplu: volum vânzări clienți mici,medii mari)</a:t>
-            </a:r>
-          </a:p>
-          <a:p>
-            <a:pPr lvl="1"/>
-            <a:r>
-              <a:rPr lang="ro-RO" dirty="0"/>
-              <a:t>Atribute obținute prin calcul direct, stabilind astfel legături complexe între atribute </a:t>
-            </a:r>
-          </a:p>
-          <a:p>
-            <a:pPr lvl="2"/>
-            <a:r>
-              <a:rPr lang="ro-RO" dirty="0"/>
-              <a:t>Țin în general de natura problemei și depinde doar de creativitatea echipei pentru a inventa atribute care să aducă valoare</a:t>
-            </a:r>
-          </a:p>
-          <a:p>
-            <a:pPr lvl="3"/>
-            <a:endParaRPr lang="ro-RO" dirty="0"/>
-          </a:p>
-        </p:txBody>
-      </p:sp>
-      <p:sp>
-        <p:nvSpPr>
-          <p:cNvPr id="6" name="TextBox 5">
-            <a:extLst>
-              <a:ext uri="{FF2B5EF4-FFF2-40B4-BE49-F238E27FC236}">
-                <a16:creationId xmlns:a16="http://schemas.microsoft.com/office/drawing/2014/main" id="{0EC468E3-6F99-2092-32AE-0676DC179A26}"/>
-              </a:ext>
-            </a:extLst>
-          </p:cNvPr>
-          <p:cNvSpPr txBox="1"/>
-          <p:nvPr/>
-        </p:nvSpPr>
-        <p:spPr>
-          <a:xfrm>
-            <a:off x="659717" y="3337202"/>
-            <a:ext cx="4191511" cy="1154162"/>
-          </a:xfrm>
-          <a:prstGeom prst="rect">
-            <a:avLst/>
-          </a:prstGeom>
-          <a:noFill/>
-        </p:spPr>
-        <p:txBody>
-          <a:bodyPr wrap="square" rtlCol="0">
-            <a:spAutoFit/>
-          </a:bodyPr>
-          <a:lstStyle/>
-          <a:p>
-            <a:pPr lvl="3"/>
-            <a:r>
-              <a:rPr lang="ro-RO" sz="1100" dirty="0">
-                <a:solidFill>
-                  <a:schemeClr val="accent1">
-                    <a:lumMod val="75000"/>
-                  </a:schemeClr>
-                </a:solidFill>
-              </a:rPr>
-              <a:t>Exemplu - indexul de profit al unui produs în grupa din care face parte:</a:t>
-            </a:r>
-          </a:p>
-          <a:p>
-            <a:pPr marL="171450" lvl="4" indent="-171450">
-              <a:buFont typeface="Arial" panose="020B0604020202020204" pitchFamily="34" charset="0"/>
-              <a:buChar char="•"/>
-            </a:pPr>
-            <a:r>
-              <a:rPr lang="ro-RO" sz="1100" dirty="0">
-                <a:solidFill>
-                  <a:schemeClr val="accent1">
-                    <a:lumMod val="75000"/>
-                  </a:schemeClr>
-                </a:solidFill>
-              </a:rPr>
-              <a:t>se împarte profitul (mediu al) produsului la media de profit a produselor grupei</a:t>
-            </a:r>
-          </a:p>
-          <a:p>
-            <a:pPr marL="171450" lvl="4" indent="-171450">
-              <a:buFont typeface="Arial" panose="020B0604020202020204" pitchFamily="34" charset="0"/>
-              <a:buChar char="•"/>
-            </a:pPr>
-            <a:r>
-              <a:rPr lang="ro-RO" sz="1100" dirty="0">
-                <a:solidFill>
-                  <a:schemeClr val="accent1">
-                    <a:lumMod val="75000"/>
-                  </a:schemeClr>
-                </a:solidFill>
-              </a:rPr>
-              <a:t>astfel se poate stabili gradul de profitabilitate în categorie</a:t>
-            </a:r>
-          </a:p>
-          <a:p>
-            <a:endParaRPr lang="en-US" dirty="0"/>
-          </a:p>
-        </p:txBody>
-      </p:sp>
-      <p:pic>
-        <p:nvPicPr>
-          <p:cNvPr id="12" name="Picture 11">
-            <a:extLst>
-              <a:ext uri="{FF2B5EF4-FFF2-40B4-BE49-F238E27FC236}">
-                <a16:creationId xmlns:a16="http://schemas.microsoft.com/office/drawing/2014/main" id="{11BA6A22-D187-2845-755B-6C02BC9E56BB}"/>
-              </a:ext>
-            </a:extLst>
-          </p:cNvPr>
-          <p:cNvPicPr>
-            <a:picLocks noChangeAspect="1"/>
-          </p:cNvPicPr>
-          <p:nvPr/>
-        </p:nvPicPr>
-        <p:blipFill>
-          <a:blip r:embed="rId2"/>
-          <a:stretch>
-            <a:fillRect/>
-          </a:stretch>
-        </p:blipFill>
-        <p:spPr>
-          <a:xfrm>
-            <a:off x="4723992" y="3114073"/>
-            <a:ext cx="3341039" cy="1648171"/>
-          </a:xfrm>
-          <a:prstGeom prst="rect">
-            <a:avLst/>
-          </a:prstGeom>
-        </p:spPr>
-      </p:pic>
-    </p:spTree>
-    <p:extLst>
-      <p:ext uri="{BB962C8B-B14F-4D97-AF65-F5344CB8AC3E}">
-        <p14:creationId xmlns:p14="http://schemas.microsoft.com/office/powerpoint/2010/main" val="2370099568"/>
-      </p:ext>
-    </p:extLst>
-  </p:cSld>
-  <p:clrMapOvr>
-    <a:masterClrMapping/>
-  </p:clrMapOvr>
-</p:sld>
-</file>
-
-<file path=ppt/slides/slide28.xml><?xml version="1.0" encoding="utf-8"?>
-<p:sld xmlns:a="http://schemas.openxmlformats.org/drawingml/2006/main" xmlns:r="http://schemas.openxmlformats.org/officeDocument/2006/relationships" xmlns:p="http://schemas.openxmlformats.org/presentationml/2006/main">
-  <p:cSld>
-    <p:spTree>
-      <p:nvGrpSpPr>
-        <p:cNvPr id="1" name=""/>
-        <p:cNvGrpSpPr/>
-        <p:nvPr/>
-      </p:nvGrpSpPr>
-      <p:grpSpPr>
-        <a:xfrm>
-          <a:off x="0" y="0"/>
-          <a:ext cx="0" cy="0"/>
-          <a:chOff x="0" y="0"/>
-          <a:chExt cx="0" cy="0"/>
-        </a:xfrm>
-      </p:grpSpPr>
-      <p:sp>
-        <p:nvSpPr>
-          <p:cNvPr id="2" name="Title 1">
-            <a:extLst>
-              <a:ext uri="{FF2B5EF4-FFF2-40B4-BE49-F238E27FC236}">
-                <a16:creationId xmlns:a16="http://schemas.microsoft.com/office/drawing/2014/main" id="{374F6EAE-85CD-F3AD-2188-B26B17C1E872}"/>
-              </a:ext>
-            </a:extLst>
-          </p:cNvPr>
-          <p:cNvSpPr>
-            <a:spLocks noGrp="1"/>
-          </p:cNvSpPr>
-          <p:nvPr>
-            <p:ph type="title"/>
-          </p:nvPr>
-        </p:nvSpPr>
-        <p:spPr/>
-        <p:txBody>
-          <a:bodyPr/>
-          <a:lstStyle/>
-          <a:p>
-            <a:r>
-              <a:rPr lang="ro-RO" dirty="0"/>
-              <a:t>Linii de procesare a datelor</a:t>
-            </a:r>
-            <a:endParaRPr lang="en-US" dirty="0"/>
-          </a:p>
-        </p:txBody>
-      </p:sp>
-      <p:sp>
-        <p:nvSpPr>
-          <p:cNvPr id="3" name="Content Placeholder 2">
-            <a:extLst>
-              <a:ext uri="{FF2B5EF4-FFF2-40B4-BE49-F238E27FC236}">
-                <a16:creationId xmlns:a16="http://schemas.microsoft.com/office/drawing/2014/main" id="{443EE54F-7F0E-43AA-0439-74FE4E157482}"/>
-              </a:ext>
-            </a:extLst>
-          </p:cNvPr>
-          <p:cNvSpPr>
-            <a:spLocks noGrp="1"/>
-          </p:cNvSpPr>
-          <p:nvPr>
-            <p:ph idx="1"/>
-          </p:nvPr>
-        </p:nvSpPr>
-        <p:spPr/>
-        <p:txBody>
-          <a:bodyPr>
-            <a:normAutofit lnSpcReduction="10000"/>
-          </a:bodyPr>
-          <a:lstStyle/>
-          <a:p>
-            <a:r>
-              <a:rPr lang="ro-RO" dirty="0"/>
-              <a:t>În general paradigma învățării automate constă în manipularea datelor prin înlănțuirea unor pași</a:t>
-            </a:r>
-          </a:p>
-          <a:p>
-            <a:r>
-              <a:rPr lang="ro-RO" dirty="0"/>
-              <a:t>Pașii se pot împărți în:</a:t>
-            </a:r>
-          </a:p>
-          <a:p>
-            <a:pPr lvl="1"/>
-            <a:r>
-              <a:rPr lang="ro-RO" dirty="0"/>
-              <a:t>Pași de transformare a datelor – setul de date de la intrare este prelucrat și la ieșire se obține un alt set de date</a:t>
-            </a:r>
-          </a:p>
-          <a:p>
-            <a:pPr lvl="2"/>
-            <a:r>
-              <a:rPr lang="ro-RO" dirty="0"/>
-              <a:t>Exemple: filtrare, eliminare date lipsă, eliminare anomalii, imputare, codificarea datelor, standardizare, discretizare, ingineria atributelor</a:t>
-            </a:r>
-          </a:p>
-          <a:p>
-            <a:pPr lvl="2"/>
-            <a:r>
-              <a:rPr lang="ro-RO" dirty="0"/>
-              <a:t>Acești pași sunt executați de transformatoare de date – module dedicate care execută pașii necesari</a:t>
-            </a:r>
-          </a:p>
-          <a:p>
-            <a:pPr lvl="1"/>
-            <a:r>
-              <a:rPr lang="ro-RO" dirty="0"/>
-              <a:t>Pasul de antrenare/evaluare a unui model – setul de date de la intrare este folosit pentru a antrena un model de învățare automată, iar la ieșire avem un model care poate fi salvat și reutilizat pe date noi</a:t>
-            </a:r>
-          </a:p>
-          <a:p>
-            <a:pPr lvl="2"/>
-            <a:r>
-              <a:rPr lang="ro-RO" dirty="0"/>
-              <a:t>Este un singur astfel de pas, ultimul de pe linia de procesare</a:t>
-            </a:r>
-            <a:endParaRPr lang="en-US" dirty="0"/>
-          </a:p>
-        </p:txBody>
-      </p:sp>
-    </p:spTree>
-    <p:extLst>
-      <p:ext uri="{BB962C8B-B14F-4D97-AF65-F5344CB8AC3E}">
-        <p14:creationId xmlns:p14="http://schemas.microsoft.com/office/powerpoint/2010/main" val="109265057"/>
-      </p:ext>
-    </p:extLst>
-  </p:cSld>
-  <p:clrMapOvr>
-    <a:masterClrMapping/>
-  </p:clrMapOvr>
-</p:sld>
-</file>
-
-<file path=ppt/slides/slide29.xml><?xml version="1.0" encoding="utf-8"?>
-<p:sld xmlns:a="http://schemas.openxmlformats.org/drawingml/2006/main" xmlns:r="http://schemas.openxmlformats.org/officeDocument/2006/relationships" xmlns:p="http://schemas.openxmlformats.org/presentationml/2006/main">
-  <p:cSld>
-    <p:spTree>
-      <p:nvGrpSpPr>
-        <p:cNvPr id="1" name=""/>
-        <p:cNvGrpSpPr/>
-        <p:nvPr/>
-      </p:nvGrpSpPr>
-      <p:grpSpPr>
-        <a:xfrm>
-          <a:off x="0" y="0"/>
-          <a:ext cx="0" cy="0"/>
-          <a:chOff x="0" y="0"/>
-          <a:chExt cx="0" cy="0"/>
-        </a:xfrm>
-      </p:grpSpPr>
-      <p:sp>
-        <p:nvSpPr>
-          <p:cNvPr id="2" name="Title 1">
-            <a:extLst>
-              <a:ext uri="{FF2B5EF4-FFF2-40B4-BE49-F238E27FC236}">
-                <a16:creationId xmlns:a16="http://schemas.microsoft.com/office/drawing/2014/main" id="{374F6EAE-85CD-F3AD-2188-B26B17C1E872}"/>
-              </a:ext>
-            </a:extLst>
-          </p:cNvPr>
-          <p:cNvSpPr>
-            <a:spLocks noGrp="1"/>
-          </p:cNvSpPr>
-          <p:nvPr>
-            <p:ph type="title"/>
-          </p:nvPr>
-        </p:nvSpPr>
-        <p:spPr/>
-        <p:txBody>
-          <a:bodyPr/>
-          <a:lstStyle/>
-          <a:p>
-            <a:r>
-              <a:rPr lang="ro-RO" dirty="0"/>
-              <a:t>Linii de procesare a datelor</a:t>
-            </a:r>
-            <a:endParaRPr lang="en-US" dirty="0"/>
-          </a:p>
-        </p:txBody>
-      </p:sp>
-      <p:sp>
-        <p:nvSpPr>
-          <p:cNvPr id="3" name="Content Placeholder 2">
-            <a:extLst>
-              <a:ext uri="{FF2B5EF4-FFF2-40B4-BE49-F238E27FC236}">
-                <a16:creationId xmlns:a16="http://schemas.microsoft.com/office/drawing/2014/main" id="{443EE54F-7F0E-43AA-0439-74FE4E157482}"/>
-              </a:ext>
-            </a:extLst>
-          </p:cNvPr>
-          <p:cNvSpPr>
-            <a:spLocks noGrp="1"/>
-          </p:cNvSpPr>
-          <p:nvPr>
-            <p:ph idx="1"/>
-          </p:nvPr>
-        </p:nvSpPr>
-        <p:spPr/>
-        <p:txBody>
-          <a:bodyPr>
-            <a:normAutofit/>
-          </a:bodyPr>
-          <a:lstStyle/>
-          <a:p>
-            <a:r>
-              <a:rPr lang="ro-RO" dirty="0"/>
-              <a:t>Linii de asamblare:</a:t>
-            </a:r>
-          </a:p>
-          <a:p>
-            <a:endParaRPr lang="ro-RO" dirty="0"/>
-          </a:p>
-          <a:p>
-            <a:endParaRPr lang="ro-RO" dirty="0"/>
-          </a:p>
-          <a:p>
-            <a:endParaRPr lang="ro-RO" dirty="0"/>
-          </a:p>
-          <a:p>
-            <a:r>
-              <a:rPr lang="ro-RO" dirty="0"/>
-              <a:t>Resurse Python:</a:t>
-            </a:r>
-          </a:p>
-          <a:p>
-            <a:endParaRPr lang="en-US" dirty="0"/>
-          </a:p>
-        </p:txBody>
-      </p:sp>
-      <p:sp>
-        <p:nvSpPr>
-          <p:cNvPr id="4" name="Rectangle 3">
-            <a:extLst>
-              <a:ext uri="{FF2B5EF4-FFF2-40B4-BE49-F238E27FC236}">
-                <a16:creationId xmlns:a16="http://schemas.microsoft.com/office/drawing/2014/main" id="{D0E2A861-1222-389C-7231-87D6EF46D2B3}"/>
-              </a:ext>
-            </a:extLst>
-          </p:cNvPr>
-          <p:cNvSpPr/>
-          <p:nvPr/>
-        </p:nvSpPr>
-        <p:spPr>
-          <a:xfrm>
-            <a:off x="841249" y="1967789"/>
-            <a:ext cx="993688" cy="731520"/>
-          </a:xfrm>
-          <a:prstGeom prst="rect">
-            <a:avLst/>
-          </a:prstGeom>
-        </p:spPr>
-        <p:style>
-          <a:lnRef idx="2">
-            <a:schemeClr val="accent1">
-              <a:shade val="15000"/>
-            </a:schemeClr>
-          </a:lnRef>
-          <a:fillRef idx="1">
-            <a:schemeClr val="accent1"/>
-          </a:fillRef>
-          <a:effectRef idx="0">
-            <a:schemeClr val="accent1"/>
-          </a:effectRef>
-          <a:fontRef idx="minor">
-            <a:schemeClr val="lt1"/>
-          </a:fontRef>
-        </p:style>
-        <p:txBody>
-          <a:bodyPr rtlCol="0" anchor="ctr"/>
-          <a:lstStyle/>
-          <a:p>
-            <a:pPr algn="ctr"/>
-            <a:r>
-              <a:rPr lang="ro-RO" dirty="0"/>
-              <a:t>Date Initiale</a:t>
-            </a:r>
-            <a:endParaRPr lang="en-US" dirty="0"/>
-          </a:p>
-        </p:txBody>
-      </p:sp>
-      <p:sp>
-        <p:nvSpPr>
-          <p:cNvPr id="6" name="Rectangle 5">
-            <a:extLst>
-              <a:ext uri="{FF2B5EF4-FFF2-40B4-BE49-F238E27FC236}">
-                <a16:creationId xmlns:a16="http://schemas.microsoft.com/office/drawing/2014/main" id="{3BBDD427-1110-BA57-8833-0A267C2F6CB2}"/>
-              </a:ext>
-            </a:extLst>
-          </p:cNvPr>
-          <p:cNvSpPr/>
-          <p:nvPr/>
-        </p:nvSpPr>
-        <p:spPr>
-          <a:xfrm>
-            <a:off x="2144081" y="1965629"/>
-            <a:ext cx="993688" cy="731520"/>
-          </a:xfrm>
-          <a:prstGeom prst="rect">
-            <a:avLst/>
-          </a:prstGeom>
-          <a:solidFill>
-            <a:schemeClr val="accent2"/>
-          </a:solidFill>
-        </p:spPr>
-        <p:style>
-          <a:lnRef idx="2">
-            <a:schemeClr val="accent1">
-              <a:shade val="15000"/>
-            </a:schemeClr>
-          </a:lnRef>
-          <a:fillRef idx="1">
-            <a:schemeClr val="accent1"/>
-          </a:fillRef>
-          <a:effectRef idx="0">
-            <a:schemeClr val="accent1"/>
-          </a:effectRef>
-          <a:fontRef idx="minor">
-            <a:schemeClr val="lt1"/>
-          </a:fontRef>
-        </p:style>
-        <p:txBody>
-          <a:bodyPr rtlCol="0" anchor="ctr"/>
-          <a:lstStyle/>
-          <a:p>
-            <a:pPr algn="ctr"/>
-            <a:r>
-              <a:rPr lang="ro-RO" sz="1050" dirty="0"/>
-              <a:t>Transformator1</a:t>
-            </a:r>
-            <a:endParaRPr lang="en-US" sz="1050" dirty="0"/>
-          </a:p>
-        </p:txBody>
-      </p:sp>
-      <p:sp>
-        <p:nvSpPr>
-          <p:cNvPr id="7" name="Rectangle 6">
-            <a:extLst>
-              <a:ext uri="{FF2B5EF4-FFF2-40B4-BE49-F238E27FC236}">
-                <a16:creationId xmlns:a16="http://schemas.microsoft.com/office/drawing/2014/main" id="{AF8C1961-6C96-3738-F0DF-AC3D6353801A}"/>
-              </a:ext>
-            </a:extLst>
-          </p:cNvPr>
-          <p:cNvSpPr/>
-          <p:nvPr/>
-        </p:nvSpPr>
-        <p:spPr>
-          <a:xfrm>
-            <a:off x="3214089" y="1965629"/>
-            <a:ext cx="558514" cy="731520"/>
-          </a:xfrm>
-          <a:prstGeom prst="rect">
-            <a:avLst/>
-          </a:prstGeom>
-          <a:ln>
-            <a:solidFill>
-              <a:schemeClr val="bg1"/>
-            </a:solidFill>
-          </a:ln>
-        </p:spPr>
-        <p:style>
-          <a:lnRef idx="2">
-            <a:schemeClr val="accent6"/>
-          </a:lnRef>
-          <a:fillRef idx="1">
-            <a:schemeClr val="lt1"/>
-          </a:fillRef>
-          <a:effectRef idx="0">
-            <a:schemeClr val="accent6"/>
-          </a:effectRef>
-          <a:fontRef idx="minor">
-            <a:schemeClr val="dk1"/>
-          </a:fontRef>
-        </p:style>
-        <p:txBody>
-          <a:bodyPr rtlCol="0" anchor="ctr"/>
-          <a:lstStyle/>
-          <a:p>
-            <a:pPr algn="ctr"/>
-            <a:r>
-              <a:rPr lang="ro-RO" dirty="0"/>
-              <a:t>...</a:t>
-            </a:r>
-            <a:endParaRPr lang="en-US" dirty="0"/>
-          </a:p>
-        </p:txBody>
-      </p:sp>
-      <p:sp>
-        <p:nvSpPr>
-          <p:cNvPr id="8" name="Rectangle 7">
-            <a:extLst>
-              <a:ext uri="{FF2B5EF4-FFF2-40B4-BE49-F238E27FC236}">
-                <a16:creationId xmlns:a16="http://schemas.microsoft.com/office/drawing/2014/main" id="{D5D2BD5A-BDD5-148B-B96C-AF3BDF1C4845}"/>
-              </a:ext>
-            </a:extLst>
-          </p:cNvPr>
-          <p:cNvSpPr/>
-          <p:nvPr/>
-        </p:nvSpPr>
-        <p:spPr>
-          <a:xfrm>
-            <a:off x="3854974" y="1967446"/>
-            <a:ext cx="993688" cy="731520"/>
-          </a:xfrm>
-          <a:prstGeom prst="rect">
-            <a:avLst/>
-          </a:prstGeom>
-          <a:solidFill>
-            <a:schemeClr val="accent2"/>
-          </a:solidFill>
-        </p:spPr>
-        <p:style>
-          <a:lnRef idx="2">
-            <a:schemeClr val="accent1">
-              <a:shade val="15000"/>
-            </a:schemeClr>
-          </a:lnRef>
-          <a:fillRef idx="1">
-            <a:schemeClr val="accent1"/>
-          </a:fillRef>
-          <a:effectRef idx="0">
-            <a:schemeClr val="accent1"/>
-          </a:effectRef>
-          <a:fontRef idx="minor">
-            <a:schemeClr val="lt1"/>
-          </a:fontRef>
-        </p:style>
-        <p:txBody>
-          <a:bodyPr rtlCol="0" anchor="ctr"/>
-          <a:lstStyle/>
-          <a:p>
-            <a:pPr marL="0" marR="0" lvl="0" indent="0" algn="ctr" defTabSz="914400" rtl="0" eaLnBrk="1" fontAlgn="auto" latinLnBrk="0" hangingPunct="1">
-              <a:lnSpc>
-                <a:spcPct val="100000"/>
-              </a:lnSpc>
-              <a:spcBef>
-                <a:spcPts val="0"/>
-              </a:spcBef>
-              <a:spcAft>
-                <a:spcPts val="0"/>
-              </a:spcAft>
-              <a:buClr>
-                <a:srgbClr val="000000"/>
-              </a:buClr>
-              <a:buSzTx/>
-              <a:buFont typeface="Arial"/>
-              <a:buNone/>
-              <a:tabLst/>
-              <a:defRPr/>
-            </a:pPr>
-            <a:r>
-              <a:rPr kumimoji="0" lang="ro-RO" sz="1050" b="0" i="0" u="none" strike="noStrike" kern="0" cap="none" spc="0" normalizeH="0" baseline="0" noProof="0" dirty="0">
-                <a:ln>
-                  <a:noFill/>
-                </a:ln>
-                <a:solidFill>
-                  <a:prstClr val="white"/>
-                </a:solidFill>
-                <a:effectLst/>
-                <a:uLnTx/>
-                <a:uFillTx/>
-                <a:latin typeface="Calibri" panose="020F0502020204030204"/>
-                <a:ea typeface="+mn-ea"/>
-                <a:cs typeface="+mn-cs"/>
-                <a:sym typeface="Arial"/>
-              </a:rPr>
-              <a:t>Transformatorn</a:t>
-            </a:r>
-            <a:endParaRPr kumimoji="0" lang="en-US" sz="1050" b="0" i="0" u="none" strike="noStrike" kern="0" cap="none" spc="0" normalizeH="0" baseline="0" noProof="0" dirty="0">
-              <a:ln>
-                <a:noFill/>
-              </a:ln>
-              <a:solidFill>
-                <a:prstClr val="white"/>
-              </a:solidFill>
-              <a:effectLst/>
-              <a:uLnTx/>
-              <a:uFillTx/>
-              <a:latin typeface="Calibri" panose="020F0502020204030204"/>
-              <a:ea typeface="+mn-ea"/>
-              <a:cs typeface="+mn-cs"/>
-              <a:sym typeface="Arial"/>
-            </a:endParaRPr>
-          </a:p>
-        </p:txBody>
-      </p:sp>
-      <p:sp>
-        <p:nvSpPr>
-          <p:cNvPr id="10" name="Rectangle 9">
-            <a:extLst>
-              <a:ext uri="{FF2B5EF4-FFF2-40B4-BE49-F238E27FC236}">
-                <a16:creationId xmlns:a16="http://schemas.microsoft.com/office/drawing/2014/main" id="{48E062E3-EE01-6395-F33E-3ECED5BE0130}"/>
-              </a:ext>
-            </a:extLst>
-          </p:cNvPr>
-          <p:cNvSpPr/>
-          <p:nvPr/>
-        </p:nvSpPr>
-        <p:spPr>
-          <a:xfrm>
-            <a:off x="5151755" y="1965629"/>
-            <a:ext cx="1871788" cy="731520"/>
-          </a:xfrm>
-          <a:prstGeom prst="rect">
-            <a:avLst/>
-          </a:prstGeom>
-          <a:solidFill>
-            <a:schemeClr val="bg2">
-              <a:lumMod val="50000"/>
-            </a:schemeClr>
-          </a:solidFill>
-        </p:spPr>
-        <p:style>
-          <a:lnRef idx="2">
-            <a:schemeClr val="accent1">
-              <a:shade val="15000"/>
-            </a:schemeClr>
-          </a:lnRef>
-          <a:fillRef idx="1">
-            <a:schemeClr val="accent1"/>
-          </a:fillRef>
-          <a:effectRef idx="0">
-            <a:schemeClr val="accent1"/>
-          </a:effectRef>
-          <a:fontRef idx="minor">
-            <a:schemeClr val="lt1"/>
-          </a:fontRef>
-        </p:style>
-        <p:txBody>
-          <a:bodyPr rtlCol="0" anchor="ctr"/>
-          <a:lstStyle/>
-          <a:p>
-            <a:pPr algn="ctr"/>
-            <a:r>
-              <a:rPr lang="ro-RO" dirty="0"/>
-              <a:t>Evaluator:antrenare model</a:t>
-            </a:r>
-            <a:endParaRPr lang="en-US" dirty="0"/>
-          </a:p>
-        </p:txBody>
-      </p:sp>
-      <p:sp>
-        <p:nvSpPr>
-          <p:cNvPr id="12" name="Rectangle 11">
-            <a:extLst>
-              <a:ext uri="{FF2B5EF4-FFF2-40B4-BE49-F238E27FC236}">
-                <a16:creationId xmlns:a16="http://schemas.microsoft.com/office/drawing/2014/main" id="{05304C34-C309-AEBB-8CFC-62485B729611}"/>
-              </a:ext>
-            </a:extLst>
-          </p:cNvPr>
-          <p:cNvSpPr/>
-          <p:nvPr/>
-        </p:nvSpPr>
-        <p:spPr>
-          <a:xfrm>
-            <a:off x="7326637" y="1965629"/>
-            <a:ext cx="993688" cy="731520"/>
-          </a:xfrm>
-          <a:prstGeom prst="rect">
-            <a:avLst/>
-          </a:prstGeom>
-          <a:solidFill>
-            <a:schemeClr val="accent6"/>
-          </a:solidFill>
-        </p:spPr>
-        <p:style>
-          <a:lnRef idx="2">
-            <a:schemeClr val="accent1">
-              <a:shade val="15000"/>
-            </a:schemeClr>
-          </a:lnRef>
-          <a:fillRef idx="1">
-            <a:schemeClr val="accent1"/>
-          </a:fillRef>
-          <a:effectRef idx="0">
-            <a:schemeClr val="accent1"/>
-          </a:effectRef>
-          <a:fontRef idx="minor">
-            <a:schemeClr val="lt1"/>
-          </a:fontRef>
-        </p:style>
-        <p:txBody>
-          <a:bodyPr rtlCol="0" anchor="ctr"/>
-          <a:lstStyle/>
-          <a:p>
-            <a:pPr algn="ctr"/>
-            <a:r>
-              <a:rPr lang="ro-RO" dirty="0"/>
-              <a:t>Salvare model</a:t>
-            </a:r>
-            <a:endParaRPr lang="en-US" dirty="0"/>
-          </a:p>
-        </p:txBody>
-      </p:sp>
-      <p:cxnSp>
-        <p:nvCxnSpPr>
-          <p:cNvPr id="14" name="Straight Arrow Connector 13">
-            <a:extLst>
-              <a:ext uri="{FF2B5EF4-FFF2-40B4-BE49-F238E27FC236}">
-                <a16:creationId xmlns:a16="http://schemas.microsoft.com/office/drawing/2014/main" id="{E309EB5E-6E54-FAC8-9645-C6ED6D6B06CE}"/>
-              </a:ext>
-            </a:extLst>
-          </p:cNvPr>
-          <p:cNvCxnSpPr>
-            <a:cxnSpLocks/>
-            <a:endCxn id="6" idx="1"/>
-          </p:cNvCxnSpPr>
-          <p:nvPr/>
-        </p:nvCxnSpPr>
-        <p:spPr>
-          <a:xfrm>
-            <a:off x="1834937" y="2331389"/>
-            <a:ext cx="309144" cy="0"/>
-          </a:xfrm>
-          <a:prstGeom prst="straightConnector1">
-            <a:avLst/>
-          </a:prstGeom>
-          <a:ln>
-            <a:tailEnd type="triangle"/>
-          </a:ln>
-        </p:spPr>
-        <p:style>
-          <a:lnRef idx="2">
-            <a:schemeClr val="dk1"/>
-          </a:lnRef>
-          <a:fillRef idx="0">
-            <a:schemeClr val="dk1"/>
-          </a:fillRef>
-          <a:effectRef idx="1">
-            <a:schemeClr val="dk1"/>
-          </a:effectRef>
-          <a:fontRef idx="minor">
-            <a:schemeClr val="tx1"/>
-          </a:fontRef>
-        </p:style>
-      </p:cxnSp>
-      <p:cxnSp>
-        <p:nvCxnSpPr>
-          <p:cNvPr id="17" name="Straight Arrow Connector 16">
-            <a:extLst>
-              <a:ext uri="{FF2B5EF4-FFF2-40B4-BE49-F238E27FC236}">
-                <a16:creationId xmlns:a16="http://schemas.microsoft.com/office/drawing/2014/main" id="{DCC732B1-4153-5BA4-3EA7-927FED71D69A}"/>
-              </a:ext>
-            </a:extLst>
-          </p:cNvPr>
-          <p:cNvCxnSpPr>
-            <a:cxnSpLocks/>
-          </p:cNvCxnSpPr>
-          <p:nvPr/>
-        </p:nvCxnSpPr>
-        <p:spPr>
-          <a:xfrm>
-            <a:off x="3137769" y="2342002"/>
-            <a:ext cx="309144" cy="0"/>
-          </a:xfrm>
-          <a:prstGeom prst="straightConnector1">
-            <a:avLst/>
-          </a:prstGeom>
-          <a:ln>
-            <a:tailEnd type="triangle"/>
-          </a:ln>
-        </p:spPr>
-        <p:style>
-          <a:lnRef idx="2">
-            <a:schemeClr val="dk1"/>
-          </a:lnRef>
-          <a:fillRef idx="0">
-            <a:schemeClr val="dk1"/>
-          </a:fillRef>
-          <a:effectRef idx="1">
-            <a:schemeClr val="dk1"/>
-          </a:effectRef>
-          <a:fontRef idx="minor">
-            <a:schemeClr val="tx1"/>
-          </a:fontRef>
-        </p:style>
-      </p:cxnSp>
-      <p:cxnSp>
-        <p:nvCxnSpPr>
-          <p:cNvPr id="18" name="Straight Arrow Connector 17">
-            <a:extLst>
-              <a:ext uri="{FF2B5EF4-FFF2-40B4-BE49-F238E27FC236}">
-                <a16:creationId xmlns:a16="http://schemas.microsoft.com/office/drawing/2014/main" id="{0B7E5005-5875-4BF6-7993-6243B9CA8341}"/>
-              </a:ext>
-            </a:extLst>
-          </p:cNvPr>
-          <p:cNvCxnSpPr>
-            <a:cxnSpLocks/>
-          </p:cNvCxnSpPr>
-          <p:nvPr/>
-        </p:nvCxnSpPr>
-        <p:spPr>
-          <a:xfrm>
-            <a:off x="3545830" y="2346478"/>
-            <a:ext cx="309144" cy="0"/>
-          </a:xfrm>
-          <a:prstGeom prst="straightConnector1">
-            <a:avLst/>
-          </a:prstGeom>
-          <a:ln>
-            <a:tailEnd type="triangle"/>
-          </a:ln>
-        </p:spPr>
-        <p:style>
-          <a:lnRef idx="2">
-            <a:schemeClr val="dk1"/>
-          </a:lnRef>
-          <a:fillRef idx="0">
-            <a:schemeClr val="dk1"/>
-          </a:fillRef>
-          <a:effectRef idx="1">
-            <a:schemeClr val="dk1"/>
-          </a:effectRef>
-          <a:fontRef idx="minor">
-            <a:schemeClr val="tx1"/>
-          </a:fontRef>
-        </p:style>
-      </p:cxnSp>
-      <p:cxnSp>
-        <p:nvCxnSpPr>
-          <p:cNvPr id="19" name="Straight Arrow Connector 18">
-            <a:extLst>
-              <a:ext uri="{FF2B5EF4-FFF2-40B4-BE49-F238E27FC236}">
-                <a16:creationId xmlns:a16="http://schemas.microsoft.com/office/drawing/2014/main" id="{41550766-7B17-7A82-BA3D-E9B952DC1C8E}"/>
-              </a:ext>
-            </a:extLst>
-          </p:cNvPr>
-          <p:cNvCxnSpPr>
-            <a:cxnSpLocks/>
-          </p:cNvCxnSpPr>
-          <p:nvPr/>
-        </p:nvCxnSpPr>
-        <p:spPr>
-          <a:xfrm>
-            <a:off x="4848662" y="2338680"/>
-            <a:ext cx="309144" cy="0"/>
-          </a:xfrm>
-          <a:prstGeom prst="straightConnector1">
-            <a:avLst/>
-          </a:prstGeom>
-          <a:ln>
-            <a:tailEnd type="triangle"/>
-          </a:ln>
-        </p:spPr>
-        <p:style>
-          <a:lnRef idx="2">
-            <a:schemeClr val="dk1"/>
-          </a:lnRef>
-          <a:fillRef idx="0">
-            <a:schemeClr val="dk1"/>
-          </a:fillRef>
-          <a:effectRef idx="1">
-            <a:schemeClr val="dk1"/>
-          </a:effectRef>
-          <a:fontRef idx="minor">
-            <a:schemeClr val="tx1"/>
-          </a:fontRef>
-        </p:style>
-      </p:cxnSp>
-      <p:cxnSp>
-        <p:nvCxnSpPr>
-          <p:cNvPr id="20" name="Straight Arrow Connector 19">
-            <a:extLst>
-              <a:ext uri="{FF2B5EF4-FFF2-40B4-BE49-F238E27FC236}">
-                <a16:creationId xmlns:a16="http://schemas.microsoft.com/office/drawing/2014/main" id="{51E921DD-C9EE-A509-ECD2-AD337001DDC4}"/>
-              </a:ext>
-            </a:extLst>
-          </p:cNvPr>
-          <p:cNvCxnSpPr>
-            <a:cxnSpLocks/>
-          </p:cNvCxnSpPr>
-          <p:nvPr/>
-        </p:nvCxnSpPr>
-        <p:spPr>
-          <a:xfrm>
-            <a:off x="7017493" y="2347633"/>
-            <a:ext cx="309144" cy="0"/>
-          </a:xfrm>
-          <a:prstGeom prst="straightConnector1">
-            <a:avLst/>
-          </a:prstGeom>
-          <a:ln>
-            <a:tailEnd type="triangle"/>
-          </a:ln>
-        </p:spPr>
-        <p:style>
-          <a:lnRef idx="2">
-            <a:schemeClr val="dk1"/>
-          </a:lnRef>
-          <a:fillRef idx="0">
-            <a:schemeClr val="dk1"/>
-          </a:fillRef>
-          <a:effectRef idx="1">
-            <a:schemeClr val="dk1"/>
-          </a:effectRef>
-          <a:fontRef idx="minor">
-            <a:schemeClr val="tx1"/>
-          </a:fontRef>
-        </p:style>
-      </p:cxnSp>
-      <p:pic>
-        <p:nvPicPr>
-          <p:cNvPr id="22" name="Picture 21">
-            <a:extLst>
-              <a:ext uri="{FF2B5EF4-FFF2-40B4-BE49-F238E27FC236}">
-                <a16:creationId xmlns:a16="http://schemas.microsoft.com/office/drawing/2014/main" id="{45A91971-19A1-D2F3-C936-E60F063607AC}"/>
-              </a:ext>
-            </a:extLst>
-          </p:cNvPr>
-          <p:cNvPicPr>
-            <a:picLocks noChangeAspect="1"/>
-          </p:cNvPicPr>
-          <p:nvPr/>
-        </p:nvPicPr>
-        <p:blipFill>
-          <a:blip r:embed="rId2"/>
-          <a:stretch>
-            <a:fillRect/>
-          </a:stretch>
-        </p:blipFill>
-        <p:spPr>
-          <a:xfrm>
-            <a:off x="2784374" y="2804820"/>
-            <a:ext cx="5224298" cy="1984581"/>
-          </a:xfrm>
-          <a:prstGeom prst="rect">
-            <a:avLst/>
-          </a:prstGeom>
-        </p:spPr>
-      </p:pic>
-    </p:spTree>
-    <p:extLst>
-      <p:ext uri="{BB962C8B-B14F-4D97-AF65-F5344CB8AC3E}">
-        <p14:creationId xmlns:p14="http://schemas.microsoft.com/office/powerpoint/2010/main" val="113858941"/>
-      </p:ext>
-    </p:extLst>
-  </p:cSld>
-  <p:clrMapOvr>
-    <a:masterClrMapping/>
-  </p:clrMapOvr>
-</p:sld>
-</file>
-
 <file path=ppt/slides/slide3.xml><?xml version="1.0" encoding="utf-8"?>
 <p:sld xmlns:a="http://schemas.openxmlformats.org/drawingml/2006/main" xmlns:r="http://schemas.openxmlformats.org/officeDocument/2006/relationships" xmlns:p="http://schemas.openxmlformats.org/presentationml/2006/main">
   <p:cSld>
@@ -14476,6 +8095,35 @@
               <a:t>i a extrage valoare din ele.”</a:t>
             </a:r>
             <a:endParaRPr dirty="0"/>
+          </a:p>
+        </p:txBody>
+      </p:sp>
+      <p:sp>
+        <p:nvSpPr>
+          <p:cNvPr id="91" name="TextBox 90"/>
+          <p:cNvSpPr txBox="1"/>
+          <p:nvPr/>
+        </p:nvSpPr>
+        <p:spPr>
+          <a:xfrm>
+            <a:off x="628650" y="4560000"/>
+            <a:ext cx="7886700" cy="480000"/>
+          </a:xfrm>
+          <a:prstGeom prst="rect">
+            <a:avLst/>
+          </a:prstGeom>
+          <a:noFill/>
+        </p:spPr>
+        <p:txBody>
+          <a:bodyPr wrap="square">
+            <a:spAutoFit/>
+          </a:bodyPr>
+          <a:lstStyle/>
+          <a:p>
+            <a:r>
+              <a:rPr sz="1000" i="1"/>
+              <a:t>Referință: Tukey, J. W. (1977). Exploratory Data Analysis. Addison-Wesley, Reading, MA.</a:t>
+            </a:r>
           </a:p>
         </p:txBody>
       </p:sp>
